--- a/docs/video-series/06_Algo_MAX_Роль_Куратор.pptx
+++ b/docs/video-series/06_Algo_MAX_Роль_Куратор.pptx
@@ -26,6 +26,9 @@
     <p:sldId id="274" r:id="rId25"/>
     <p:sldId id="275" r:id="rId26"/>
     <p:sldId id="276" r:id="rId27"/>
+    <p:sldId id="277" r:id="rId28"/>
+    <p:sldId id="278" r:id="rId29"/>
+    <p:sldId id="279" r:id="rId30"/>
   </p:sldIdLst>
   <p:sldSz cx="12191695" cy="6858000" type="screen4x3"/>
   <p:notesSz cx="6858000" cy="9144000"/>
@@ -3828,7 +3831,7 @@
                 </a:solidFill>
                 <a:latin typeface="Arial"/>
               </a:rPr>
-              <a:t>РАССЫЛКИ</a:t>
+              <a:t>ОТЧЕТ AC</a:t>
             </a:r>
           </a:p>
         </p:txBody>
@@ -3873,7 +3876,7 @@
                 </a:solidFill>
                 <a:latin typeface="Arial"/>
               </a:rPr>
-              <a:t>Категория, формат и группы</a:t>
+              <a:t>Период, преподаватель и группа</a:t>
             </a:r>
           </a:p>
         </p:txBody>
@@ -4051,7 +4054,7 @@
                 </a:solidFill>
                 <a:latin typeface="Arial"/>
               </a:rPr>
-              <a:t>Рассылки -&gt; Получатели</a:t>
+              <a:t>Отчет AC</a:t>
             </a:r>
           </a:p>
         </p:txBody>
@@ -4205,8 +4208,8 @@
         </p:blipFill>
         <p:spPr>
           <a:xfrm>
-            <a:off x="1510223" y="2432303"/>
-            <a:ext cx="6178417" cy="3767327"/>
+            <a:off x="1585569" y="2432303"/>
+            <a:ext cx="6027724" cy="3767327"/>
           </a:xfrm>
           <a:prstGeom prst="rect">
             <a:avLst/>
@@ -4221,7 +4224,7 @@
         </p:nvSpPr>
         <p:spPr>
           <a:xfrm>
-            <a:off x="3196932" y="5029199"/>
+            <a:off x="5817485" y="3974348"/>
             <a:ext cx="457200" cy="457200"/>
           </a:xfrm>
           <a:prstGeom prst="ellipse">
@@ -4264,7 +4267,7 @@
         </p:nvSpPr>
         <p:spPr>
           <a:xfrm>
-            <a:off x="3260940" y="5093207"/>
+            <a:off x="5881493" y="4038356"/>
             <a:ext cx="329184" cy="329184"/>
           </a:xfrm>
           <a:prstGeom prst="ellipse">
@@ -4316,7 +4319,7 @@
         </p:nvSpPr>
         <p:spPr>
           <a:xfrm rot="18900000">
-            <a:off x="3516972" y="5367527"/>
+            <a:off x="6137525" y="4312676"/>
             <a:ext cx="256032" cy="365760"/>
           </a:xfrm>
           <a:prstGeom prst="upArrow">
@@ -4657,7 +4660,7 @@
                 </a:solidFill>
                 <a:latin typeface="Arial"/>
               </a:rPr>
-              <a:t>Уточните площадки</a:t>
+              <a:t>Уточните группу</a:t>
             </a:r>
           </a:p>
         </p:txBody>
@@ -4702,7 +4705,7 @@
                 </a:solidFill>
                 <a:latin typeface="Arial"/>
               </a:rPr>
-              <a:t>Выберите площадки и конкретные группы.</a:t>
+              <a:t>Фильтры применяются вместе.</a:t>
             </a:r>
           </a:p>
         </p:txBody>
@@ -4878,7 +4881,7 @@
                 </a:solidFill>
                 <a:latin typeface="Arial"/>
               </a:rPr>
-              <a:t>Куратор видит только доступные ему группы и проверяет итоговое число получателей.</a:t>
+              <a:t>Куратор проверяет операции только по доступным ему группам и ученикам.</a:t>
             </a:r>
           </a:p>
         </p:txBody>
@@ -5258,7 +5261,7 @@
                 </a:solidFill>
                 <a:latin typeface="Arial"/>
               </a:rPr>
-              <a:t>ТИПИЧНАЯ СИТУАЦИЯ</a:t>
+              <a:t>РАССЫЛКИ</a:t>
             </a:r>
           </a:p>
         </p:txBody>
@@ -5303,7 +5306,7 @@
                 </a:solidFill>
                 <a:latin typeface="Arial"/>
               </a:rPr>
-              <a:t>Аудитория пуста</a:t>
+              <a:t>Категория, формат и группы</a:t>
             </a:r>
           </a:p>
         </p:txBody>
@@ -5368,7 +5371,7 @@
             <a:avLst/>
           </a:prstGeom>
           <a:solidFill>
-            <a:srgbClr val="FCE7EC"/>
+            <a:srgbClr val="EEE7FF"/>
           </a:solidFill>
           <a:ln>
             <a:noFill/>
@@ -5404,8 +5407,8 @@
         </p:nvSpPr>
         <p:spPr>
           <a:xfrm>
-            <a:off x="603504" y="1737360"/>
-            <a:ext cx="2926080" cy="155448"/>
+            <a:off x="603504" y="1746504"/>
+            <a:ext cx="420624" cy="137160"/>
           </a:xfrm>
           <a:prstGeom prst="rect">
             <a:avLst/>
@@ -5432,18 +5435,63 @@
             <a:r>
               <a:rPr sz="850" b="1">
                 <a:solidFill>
-                  <a:srgbClr val="D94261"/>
-                </a:solidFill>
-                <a:latin typeface="Arial"/>
-              </a:rPr>
-              <a:t>ВОСПРОИЗВЕДЕННАЯ ОШИБКА</a:t>
-            </a:r>
-          </a:p>
-        </p:txBody>
-      </p:sp>
-      <p:sp>
-        <p:nvSpPr>
-          <p:cNvPr id="10" name="Rectangle 9"/>
+                  <a:srgbClr val="6F35D4"/>
+                </a:solidFill>
+                <a:latin typeface="Arial"/>
+              </a:rPr>
+              <a:t>ПУТЬ</a:t>
+            </a:r>
+          </a:p>
+        </p:txBody>
+      </p:sp>
+      <p:sp>
+        <p:nvSpPr>
+          <p:cNvPr id="10" name="TextBox 9"/>
+          <p:cNvSpPr txBox="1"/>
+          <p:nvPr/>
+        </p:nvSpPr>
+        <p:spPr>
+          <a:xfrm>
+            <a:off x="1097280" y="1700784"/>
+            <a:ext cx="10287000" cy="201168"/>
+          </a:xfrm>
+          <a:prstGeom prst="rect">
+            <a:avLst/>
+          </a:prstGeom>
+          <a:noFill/>
+        </p:spPr>
+        <p:txBody>
+          <a:bodyPr wrap="square" anchor="t" lIns="0" rIns="0" tIns="0" bIns="0">
+            <a:spAutoFit/>
+          </a:bodyPr>
+          <a:lstStyle/>
+          <a:p>
+            <a:pPr algn="l">
+              <a:lnSpc>
+                <a:spcPct val="100000"/>
+              </a:lnSpc>
+              <a:spcBef>
+                <a:spcPts val="0"/>
+              </a:spcBef>
+              <a:spcAft>
+                <a:spcPts val="0"/>
+              </a:spcAft>
+            </a:pPr>
+            <a:r>
+              <a:rPr sz="1150" b="1">
+                <a:solidFill>
+                  <a:srgbClr val="21172F"/>
+                </a:solidFill>
+                <a:latin typeface="Arial"/>
+              </a:rPr>
+              <a:t>Рассылки -&gt; Получатели</a:t>
+            </a:r>
+          </a:p>
+        </p:txBody>
+      </p:sp>
+      <p:sp>
+        <p:nvSpPr>
+          <p:cNvPr id="11" name="Rectangle 10"/>
           <p:cNvSpPr/>
           <p:nvPr/>
         </p:nvSpPr>
@@ -5488,7 +5536,7 @@
       </p:sp>
       <p:sp>
         <p:nvSpPr>
-          <p:cNvPr id="11" name="Rectangle 10"/>
+          <p:cNvPr id="12" name="Rectangle 11"/>
           <p:cNvSpPr/>
           <p:nvPr/>
         </p:nvSpPr>
@@ -5531,7 +5579,7 @@
       </p:sp>
       <p:sp>
         <p:nvSpPr>
-          <p:cNvPr id="12" name="TextBox 11"/>
+          <p:cNvPr id="13" name="TextBox 12"/>
           <p:cNvSpPr txBox="1"/>
           <p:nvPr/>
         </p:nvSpPr>
@@ -5576,7 +5624,7 @@
       </p:sp>
       <p:pic>
         <p:nvPicPr>
-          <p:cNvPr id="13" name="Picture 12" descr="image.png"/>
+          <p:cNvPr id="14" name="Picture 13" descr="image.png"/>
           <p:cNvPicPr>
             <a:picLocks noChangeAspect="1"/>
           </p:cNvPicPr>
@@ -5590,8 +5638,8 @@
         </p:blipFill>
         <p:spPr>
           <a:xfrm>
-            <a:off x="1510223" y="2432303"/>
-            <a:ext cx="6178417" cy="3767327"/>
+            <a:off x="1585569" y="2432303"/>
+            <a:ext cx="6027724" cy="3767327"/>
           </a:xfrm>
           <a:prstGeom prst="rect">
             <a:avLst/>
@@ -5600,22 +5648,20 @@
       </p:pic>
       <p:sp>
         <p:nvSpPr>
-          <p:cNvPr id="14" name="Rectangle 13"/>
+          <p:cNvPr id="15" name="Oval 14"/>
           <p:cNvSpPr/>
           <p:nvPr/>
         </p:nvSpPr>
         <p:spPr>
           <a:xfrm>
-            <a:off x="9015984" y="2066543"/>
-            <a:ext cx="2578608" cy="1499616"/>
-          </a:xfrm>
-          <a:prstGeom prst="rect">
-            <a:avLst/>
-          </a:prstGeom>
-          <a:solidFill>
-            <a:srgbClr val="FCE7EC"/>
-          </a:solidFill>
-          <a:ln w="10160">
+            <a:off x="2984455" y="3484595"/>
+            <a:ext cx="457200" cy="457200"/>
+          </a:xfrm>
+          <a:prstGeom prst="ellipse">
+            <a:avLst/>
+          </a:prstGeom>
+          <a:noFill/>
+          <a:ln w="27940">
             <a:solidFill>
               <a:srgbClr val="D94261"/>
             </a:solidFill>
@@ -5645,115 +5691,23 @@
       </p:sp>
       <p:sp>
         <p:nvSpPr>
-          <p:cNvPr id="15" name="TextBox 14"/>
-          <p:cNvSpPr txBox="1"/>
-          <p:nvPr/>
-        </p:nvSpPr>
-        <p:spPr>
-          <a:xfrm>
-            <a:off x="9198863" y="2267712"/>
-            <a:ext cx="2212848" cy="274320"/>
-          </a:xfrm>
-          <a:prstGeom prst="rect">
-            <a:avLst/>
-          </a:prstGeom>
-          <a:noFill/>
-        </p:spPr>
-        <p:txBody>
-          <a:bodyPr wrap="square" anchor="t" lIns="0" rIns="0" tIns="0" bIns="0">
-            <a:spAutoFit/>
-          </a:bodyPr>
-          <a:lstStyle/>
-          <a:p>
-            <a:pPr algn="l">
-              <a:lnSpc>
-                <a:spcPct val="100000"/>
-              </a:lnSpc>
-              <a:spcBef>
-                <a:spcPts val="0"/>
-              </a:spcBef>
-              <a:spcAft>
-                <a:spcPts val="0"/>
-              </a:spcAft>
-            </a:pPr>
-            <a:r>
-              <a:rPr sz="1200" b="1">
-                <a:solidFill>
-                  <a:srgbClr val="21172F"/>
-                </a:solidFill>
-                <a:latin typeface="Arial"/>
-              </a:rPr>
-              <a:t>Что произошло</a:t>
-            </a:r>
-          </a:p>
-        </p:txBody>
-      </p:sp>
-      <p:sp>
-        <p:nvSpPr>
-          <p:cNvPr id="16" name="TextBox 15"/>
-          <p:cNvSpPr txBox="1"/>
-          <p:nvPr/>
-        </p:nvSpPr>
-        <p:spPr>
-          <a:xfrm>
-            <a:off x="9198863" y="2651760"/>
-            <a:ext cx="2212848" cy="713232"/>
-          </a:xfrm>
-          <a:prstGeom prst="rect">
-            <a:avLst/>
-          </a:prstGeom>
-          <a:noFill/>
-        </p:spPr>
-        <p:txBody>
-          <a:bodyPr wrap="square" anchor="t" lIns="0" rIns="0" tIns="0" bIns="0">
-            <a:spAutoFit/>
-          </a:bodyPr>
-          <a:lstStyle/>
-          <a:p>
-            <a:pPr algn="l">
-              <a:lnSpc>
-                <a:spcPct val="100000"/>
-              </a:lnSpc>
-              <a:spcBef>
-                <a:spcPts val="0"/>
-              </a:spcBef>
-              <a:spcAft>
-                <a:spcPts val="0"/>
-              </a:spcAft>
-            </a:pPr>
-            <a:r>
-              <a:rPr sz="1019" b="0">
-                <a:solidFill>
-                  <a:srgbClr val="6E687D"/>
-                </a:solidFill>
-                <a:latin typeface="Arial"/>
-              </a:rPr>
-              <a:t>Выбранная группа недоступна или фильтры исключили всех получателей.</a:t>
-            </a:r>
-          </a:p>
-        </p:txBody>
-      </p:sp>
-      <p:sp>
-        <p:nvSpPr>
-          <p:cNvPr id="17" name="Rectangle 16"/>
+          <p:cNvPr id="16" name="Oval 15"/>
           <p:cNvSpPr/>
           <p:nvPr/>
         </p:nvSpPr>
         <p:spPr>
           <a:xfrm>
-            <a:off x="9015984" y="3822191"/>
-            <a:ext cx="2578608" cy="1627632"/>
-          </a:xfrm>
-          <a:prstGeom prst="rect">
+            <a:off x="3048463" y="3548603"/>
+            <a:ext cx="329184" cy="329184"/>
+          </a:xfrm>
+          <a:prstGeom prst="ellipse">
             <a:avLst/>
           </a:prstGeom>
           <a:solidFill>
-            <a:srgbClr val="E1F6F3"/>
+            <a:srgbClr val="D94261"/>
           </a:solidFill>
-          <a:ln w="10160">
-            <a:solidFill>
-              <a:srgbClr val="149B91"/>
-            </a:solidFill>
+          <a:ln>
+            <a:noFill/>
           </a:ln>
         </p:spPr>
         <p:style>
@@ -5771,6 +5725,60 @@
           </a:fontRef>
         </p:style>
         <p:txBody>
+          <a:bodyPr rtlCol="0" anchor="ctr" lIns="0" rIns="0" tIns="0" bIns="0"/>
+          <a:lstStyle/>
+          <a:p>
+            <a:pPr algn="ctr"/>
+            <a:r>
+              <a:rPr sz="1200" b="1">
+                <a:solidFill>
+                  <a:srgbClr val="FFFFFF"/>
+                </a:solidFill>
+                <a:latin typeface="Arial"/>
+              </a:rPr>
+              <a:t>1</a:t>
+            </a:r>
+          </a:p>
+        </p:txBody>
+      </p:sp>
+      <p:sp>
+        <p:nvSpPr>
+          <p:cNvPr id="17" name="Up Arrow 16"/>
+          <p:cNvSpPr/>
+          <p:nvPr/>
+        </p:nvSpPr>
+        <p:spPr>
+          <a:xfrm rot="18900000">
+            <a:off x="3304495" y="3822923"/>
+            <a:ext cx="256032" cy="365760"/>
+          </a:xfrm>
+          <a:prstGeom prst="upArrow">
+            <a:avLst/>
+          </a:prstGeom>
+          <a:solidFill>
+            <a:srgbClr val="FFFFFF"/>
+          </a:solidFill>
+          <a:ln w="17780">
+            <a:solidFill>
+              <a:srgbClr val="3B1F68"/>
+            </a:solidFill>
+          </a:ln>
+        </p:spPr>
+        <p:style>
+          <a:lnRef idx="1">
+            <a:schemeClr val="accent1"/>
+          </a:lnRef>
+          <a:fillRef idx="3">
+            <a:schemeClr val="accent1"/>
+          </a:fillRef>
+          <a:effectRef idx="2">
+            <a:schemeClr val="accent1"/>
+          </a:effectRef>
+          <a:fontRef idx="minor">
+            <a:schemeClr val="lt1"/>
+          </a:fontRef>
+        </p:style>
+        <p:txBody>
           <a:bodyPr rtlCol="0" anchor="ctr"/>
           <a:lstStyle/>
           <a:p>
@@ -5780,14 +5788,57 @@
       </p:sp>
       <p:sp>
         <p:nvSpPr>
-          <p:cNvPr id="18" name="TextBox 17"/>
-          <p:cNvSpPr txBox="1"/>
-          <p:nvPr/>
-        </p:nvSpPr>
-        <p:spPr>
-          <a:xfrm>
-            <a:off x="9198863" y="4023360"/>
-            <a:ext cx="2212848" cy="274320"/>
+          <p:cNvPr id="18" name="Rectangle 17"/>
+          <p:cNvSpPr/>
+          <p:nvPr/>
+        </p:nvSpPr>
+        <p:spPr>
+          <a:xfrm>
+            <a:off x="9015984" y="2066543"/>
+            <a:ext cx="2578608" cy="420624"/>
+          </a:xfrm>
+          <a:prstGeom prst="rect">
+            <a:avLst/>
+          </a:prstGeom>
+          <a:solidFill>
+            <a:srgbClr val="3B1F68"/>
+          </a:solidFill>
+          <a:ln>
+            <a:noFill/>
+          </a:ln>
+        </p:spPr>
+        <p:style>
+          <a:lnRef idx="1">
+            <a:schemeClr val="accent1"/>
+          </a:lnRef>
+          <a:fillRef idx="3">
+            <a:schemeClr val="accent1"/>
+          </a:fillRef>
+          <a:effectRef idx="2">
+            <a:schemeClr val="accent1"/>
+          </a:effectRef>
+          <a:fontRef idx="minor">
+            <a:schemeClr val="lt1"/>
+          </a:fontRef>
+        </p:style>
+        <p:txBody>
+          <a:bodyPr rtlCol="0" anchor="ctr"/>
+          <a:lstStyle/>
+          <a:p>
+            <a:pPr algn="ctr"/>
+          </a:p>
+        </p:txBody>
+      </p:sp>
+      <p:sp>
+        <p:nvSpPr>
+          <p:cNvPr id="19" name="TextBox 18"/>
+          <p:cNvSpPr txBox="1"/>
+          <p:nvPr/>
+        </p:nvSpPr>
+        <p:spPr>
+          <a:xfrm>
+            <a:off x="9180576" y="2185416"/>
+            <a:ext cx="2249424" cy="164592"/>
           </a:xfrm>
           <a:prstGeom prst="rect">
             <a:avLst/>
@@ -5812,27 +5863,248 @@
               </a:spcAft>
             </a:pPr>
             <a:r>
-              <a:rPr sz="1200" b="1">
+              <a:rPr sz="950" b="1">
+                <a:solidFill>
+                  <a:srgbClr val="FFFFFF"/>
+                </a:solidFill>
+                <a:latin typeface="Arial"/>
+              </a:rPr>
+              <a:t>ШАГ 1 ИЗ 3</a:t>
+            </a:r>
+          </a:p>
+        </p:txBody>
+      </p:sp>
+      <p:sp>
+        <p:nvSpPr>
+          <p:cNvPr id="20" name="Rectangle 19"/>
+          <p:cNvSpPr/>
+          <p:nvPr/>
+        </p:nvSpPr>
+        <p:spPr>
+          <a:xfrm>
+            <a:off x="9015984" y="2596896"/>
+            <a:ext cx="2578608" cy="1499616"/>
+          </a:xfrm>
+          <a:prstGeom prst="rect">
+            <a:avLst/>
+          </a:prstGeom>
+          <a:solidFill>
+            <a:srgbClr val="FFFFFF"/>
+          </a:solidFill>
+          <a:ln w="10160">
+            <a:solidFill>
+              <a:srgbClr val="DED9E8"/>
+            </a:solidFill>
+          </a:ln>
+        </p:spPr>
+        <p:style>
+          <a:lnRef idx="1">
+            <a:schemeClr val="accent1"/>
+          </a:lnRef>
+          <a:fillRef idx="3">
+            <a:schemeClr val="accent1"/>
+          </a:fillRef>
+          <a:effectRef idx="2">
+            <a:schemeClr val="accent1"/>
+          </a:effectRef>
+          <a:fontRef idx="minor">
+            <a:schemeClr val="lt1"/>
+          </a:fontRef>
+        </p:style>
+        <p:txBody>
+          <a:bodyPr rtlCol="0" anchor="ctr"/>
+          <a:lstStyle/>
+          <a:p>
+            <a:pPr algn="ctr"/>
+          </a:p>
+        </p:txBody>
+      </p:sp>
+      <p:sp>
+        <p:nvSpPr>
+          <p:cNvPr id="21" name="Rectangle 20"/>
+          <p:cNvSpPr/>
+          <p:nvPr/>
+        </p:nvSpPr>
+        <p:spPr>
+          <a:xfrm>
+            <a:off x="9015984" y="2596896"/>
+            <a:ext cx="54864" cy="1499616"/>
+          </a:xfrm>
+          <a:prstGeom prst="rect">
+            <a:avLst/>
+          </a:prstGeom>
+          <a:solidFill>
+            <a:srgbClr val="D94261"/>
+          </a:solidFill>
+          <a:ln>
+            <a:noFill/>
+          </a:ln>
+        </p:spPr>
+        <p:style>
+          <a:lnRef idx="1">
+            <a:schemeClr val="accent1"/>
+          </a:lnRef>
+          <a:fillRef idx="3">
+            <a:schemeClr val="accent1"/>
+          </a:fillRef>
+          <a:effectRef idx="2">
+            <a:schemeClr val="accent1"/>
+          </a:effectRef>
+          <a:fontRef idx="minor">
+            <a:schemeClr val="lt1"/>
+          </a:fontRef>
+        </p:style>
+        <p:txBody>
+          <a:bodyPr rtlCol="0" anchor="ctr"/>
+          <a:lstStyle/>
+          <a:p>
+            <a:pPr algn="ctr"/>
+          </a:p>
+        </p:txBody>
+      </p:sp>
+      <p:sp>
+        <p:nvSpPr>
+          <p:cNvPr id="22" name="Rounded Rectangle 21"/>
+          <p:cNvSpPr/>
+          <p:nvPr/>
+        </p:nvSpPr>
+        <p:spPr>
+          <a:xfrm>
+            <a:off x="9180576" y="2734056"/>
+            <a:ext cx="310896" cy="310896"/>
+          </a:xfrm>
+          <a:prstGeom prst="roundRect">
+            <a:avLst/>
+          </a:prstGeom>
+          <a:solidFill>
+            <a:srgbClr val="D94261"/>
+          </a:solidFill>
+          <a:ln>
+            <a:noFill/>
+          </a:ln>
+        </p:spPr>
+        <p:style>
+          <a:lnRef idx="1">
+            <a:schemeClr val="accent1"/>
+          </a:lnRef>
+          <a:fillRef idx="3">
+            <a:schemeClr val="accent1"/>
+          </a:fillRef>
+          <a:effectRef idx="2">
+            <a:schemeClr val="accent1"/>
+          </a:effectRef>
+          <a:fontRef idx="minor">
+            <a:schemeClr val="lt1"/>
+          </a:fontRef>
+        </p:style>
+        <p:txBody>
+          <a:bodyPr rtlCol="0" anchor="ctr"/>
+          <a:lstStyle/>
+          <a:p>
+            <a:pPr algn="ctr"/>
+          </a:p>
+        </p:txBody>
+      </p:sp>
+      <p:sp>
+        <p:nvSpPr>
+          <p:cNvPr id="23" name="TextBox 22"/>
+          <p:cNvSpPr txBox="1"/>
+          <p:nvPr/>
+        </p:nvSpPr>
+        <p:spPr>
+          <a:xfrm>
+            <a:off x="9180576" y="2743200"/>
+            <a:ext cx="310896" cy="256032"/>
+          </a:xfrm>
+          <a:prstGeom prst="rect">
+            <a:avLst/>
+          </a:prstGeom>
+          <a:noFill/>
+        </p:spPr>
+        <p:txBody>
+          <a:bodyPr wrap="square" anchor="ctr" lIns="0" rIns="0" tIns="0" bIns="0">
+            <a:spAutoFit/>
+          </a:bodyPr>
+          <a:lstStyle/>
+          <a:p>
+            <a:pPr algn="ctr">
+              <a:lnSpc>
+                <a:spcPct val="100000"/>
+              </a:lnSpc>
+              <a:spcBef>
+                <a:spcPts val="0"/>
+              </a:spcBef>
+              <a:spcAft>
+                <a:spcPts val="0"/>
+              </a:spcAft>
+            </a:pPr>
+            <a:r>
+              <a:rPr sz="1100" b="1">
+                <a:solidFill>
+                  <a:srgbClr val="FFFFFF"/>
+                </a:solidFill>
+                <a:latin typeface="Arial"/>
+              </a:rPr>
+              <a:t>1</a:t>
+            </a:r>
+          </a:p>
+        </p:txBody>
+      </p:sp>
+      <p:sp>
+        <p:nvSpPr>
+          <p:cNvPr id="24" name="TextBox 23"/>
+          <p:cNvSpPr txBox="1"/>
+          <p:nvPr/>
+        </p:nvSpPr>
+        <p:spPr>
+          <a:xfrm>
+            <a:off x="9601200" y="2688336"/>
+            <a:ext cx="1847087" cy="310896"/>
+          </a:xfrm>
+          <a:prstGeom prst="rect">
+            <a:avLst/>
+          </a:prstGeom>
+          <a:noFill/>
+        </p:spPr>
+        <p:txBody>
+          <a:bodyPr wrap="square" anchor="t" lIns="0" rIns="0" tIns="0" bIns="0">
+            <a:spAutoFit/>
+          </a:bodyPr>
+          <a:lstStyle/>
+          <a:p>
+            <a:pPr algn="l">
+              <a:lnSpc>
+                <a:spcPct val="100000"/>
+              </a:lnSpc>
+              <a:spcBef>
+                <a:spcPts val="0"/>
+              </a:spcBef>
+              <a:spcAft>
+                <a:spcPts val="0"/>
+              </a:spcAft>
+            </a:pPr>
+            <a:r>
+              <a:rPr sz="1180" b="1">
                 <a:solidFill>
                   <a:srgbClr val="21172F"/>
                 </a:solidFill>
                 <a:latin typeface="Arial"/>
               </a:rPr>
-              <a:t>Как исправить</a:t>
-            </a:r>
-          </a:p>
-        </p:txBody>
-      </p:sp>
-      <p:sp>
-        <p:nvSpPr>
-          <p:cNvPr id="19" name="TextBox 18"/>
-          <p:cNvSpPr txBox="1"/>
-          <p:nvPr/>
-        </p:nvSpPr>
-        <p:spPr>
-          <a:xfrm>
-            <a:off x="9198863" y="4407408"/>
-            <a:ext cx="2212848" cy="822960"/>
+              <a:t>Выберите получателей</a:t>
+            </a:r>
+          </a:p>
+        </p:txBody>
+      </p:sp>
+      <p:sp>
+        <p:nvSpPr>
+          <p:cNvPr id="25" name="TextBox 24"/>
+          <p:cNvSpPr txBox="1"/>
+          <p:nvPr/>
+        </p:nvSpPr>
+        <p:spPr>
+          <a:xfrm>
+            <a:off x="9601200" y="3008376"/>
+            <a:ext cx="1847087" cy="1033271"/>
           </a:xfrm>
           <a:prstGeom prst="rect">
             <a:avLst/>
@@ -5857,20 +6129,284 @@
               </a:spcAft>
             </a:pPr>
             <a:r>
-              <a:rPr sz="1019" b="0">
+              <a:rPr sz="1000" b="0">
                 <a:solidFill>
                   <a:srgbClr val="6E687D"/>
                 </a:solidFill>
                 <a:latin typeface="Arial"/>
               </a:rPr>
-              <a:t>Сбросьте лишние условия, выберите доступную группу и снова рассчитайте аудиторию.</a:t>
-            </a:r>
-          </a:p>
-        </p:txBody>
-      </p:sp>
-      <p:sp>
-        <p:nvSpPr>
-          <p:cNvPr id="20" name="Rectangle 19"/>
+              <a:t>Родители, ученики или обе категории.</a:t>
+            </a:r>
+          </a:p>
+        </p:txBody>
+      </p:sp>
+      <p:sp>
+        <p:nvSpPr>
+          <p:cNvPr id="26" name="Rectangle 25"/>
+          <p:cNvSpPr/>
+          <p:nvPr/>
+        </p:nvSpPr>
+        <p:spPr>
+          <a:xfrm>
+            <a:off x="9015984" y="4315968"/>
+            <a:ext cx="2578608" cy="877824"/>
+          </a:xfrm>
+          <a:prstGeom prst="rect">
+            <a:avLst/>
+          </a:prstGeom>
+          <a:solidFill>
+            <a:srgbClr val="E1F6F3"/>
+          </a:solidFill>
+          <a:ln>
+            <a:noFill/>
+          </a:ln>
+        </p:spPr>
+        <p:style>
+          <a:lnRef idx="1">
+            <a:schemeClr val="accent1"/>
+          </a:lnRef>
+          <a:fillRef idx="3">
+            <a:schemeClr val="accent1"/>
+          </a:fillRef>
+          <a:effectRef idx="2">
+            <a:schemeClr val="accent1"/>
+          </a:effectRef>
+          <a:fontRef idx="minor">
+            <a:schemeClr val="lt1"/>
+          </a:fontRef>
+        </p:style>
+        <p:txBody>
+          <a:bodyPr rtlCol="0" anchor="ctr"/>
+          <a:lstStyle/>
+          <a:p>
+            <a:pPr algn="ctr"/>
+          </a:p>
+        </p:txBody>
+      </p:sp>
+      <p:sp>
+        <p:nvSpPr>
+          <p:cNvPr id="27" name="Rectangle 26"/>
+          <p:cNvSpPr/>
+          <p:nvPr/>
+        </p:nvSpPr>
+        <p:spPr>
+          <a:xfrm>
+            <a:off x="9015984" y="4315968"/>
+            <a:ext cx="54864" cy="877824"/>
+          </a:xfrm>
+          <a:prstGeom prst="rect">
+            <a:avLst/>
+          </a:prstGeom>
+          <a:solidFill>
+            <a:srgbClr val="149B91"/>
+          </a:solidFill>
+          <a:ln>
+            <a:noFill/>
+          </a:ln>
+        </p:spPr>
+        <p:style>
+          <a:lnRef idx="1">
+            <a:schemeClr val="accent1"/>
+          </a:lnRef>
+          <a:fillRef idx="3">
+            <a:schemeClr val="accent1"/>
+          </a:fillRef>
+          <a:effectRef idx="2">
+            <a:schemeClr val="accent1"/>
+          </a:effectRef>
+          <a:fontRef idx="minor">
+            <a:schemeClr val="lt1"/>
+          </a:fontRef>
+        </p:style>
+        <p:txBody>
+          <a:bodyPr rtlCol="0" anchor="ctr"/>
+          <a:lstStyle/>
+          <a:p>
+            <a:pPr algn="ctr"/>
+          </a:p>
+        </p:txBody>
+      </p:sp>
+      <p:sp>
+        <p:nvSpPr>
+          <p:cNvPr id="28" name="TextBox 27"/>
+          <p:cNvSpPr txBox="1"/>
+          <p:nvPr/>
+        </p:nvSpPr>
+        <p:spPr>
+          <a:xfrm>
+            <a:off x="9217152" y="4425696"/>
+            <a:ext cx="2249424" cy="219456"/>
+          </a:xfrm>
+          <a:prstGeom prst="rect">
+            <a:avLst/>
+          </a:prstGeom>
+          <a:noFill/>
+        </p:spPr>
+        <p:txBody>
+          <a:bodyPr wrap="square" anchor="t" lIns="0" rIns="0" tIns="0" bIns="0">
+            <a:spAutoFit/>
+          </a:bodyPr>
+          <a:lstStyle/>
+          <a:p>
+            <a:pPr algn="l">
+              <a:lnSpc>
+                <a:spcPct val="100000"/>
+              </a:lnSpc>
+              <a:spcBef>
+                <a:spcPts val="0"/>
+              </a:spcBef>
+              <a:spcAft>
+                <a:spcPts val="0"/>
+              </a:spcAft>
+            </a:pPr>
+            <a:r>
+              <a:rPr sz="1150" b="1">
+                <a:solidFill>
+                  <a:srgbClr val="21172F"/>
+                </a:solidFill>
+                <a:latin typeface="Arial"/>
+              </a:rPr>
+              <a:t>Проверка результата</a:t>
+            </a:r>
+          </a:p>
+        </p:txBody>
+      </p:sp>
+      <p:sp>
+        <p:nvSpPr>
+          <p:cNvPr id="29" name="TextBox 28"/>
+          <p:cNvSpPr txBox="1"/>
+          <p:nvPr/>
+        </p:nvSpPr>
+        <p:spPr>
+          <a:xfrm>
+            <a:off x="9217152" y="4681728"/>
+            <a:ext cx="2249424" cy="402336"/>
+          </a:xfrm>
+          <a:prstGeom prst="rect">
+            <a:avLst/>
+          </a:prstGeom>
+          <a:noFill/>
+        </p:spPr>
+        <p:txBody>
+          <a:bodyPr wrap="square" anchor="t" lIns="0" rIns="0" tIns="0" bIns="0">
+            <a:spAutoFit/>
+          </a:bodyPr>
+          <a:lstStyle/>
+          <a:p>
+            <a:pPr algn="l">
+              <a:lnSpc>
+                <a:spcPct val="100000"/>
+              </a:lnSpc>
+              <a:spcBef>
+                <a:spcPts val="0"/>
+              </a:spcBef>
+              <a:spcAft>
+                <a:spcPts val="0"/>
+              </a:spcAft>
+            </a:pPr>
+            <a:r>
+              <a:rPr sz="1000" b="0">
+                <a:solidFill>
+                  <a:srgbClr val="6E687D"/>
+                </a:solidFill>
+                <a:latin typeface="Arial"/>
+              </a:rPr>
+              <a:t>После нажатия дождитесь изменения экрана и переходите к следующему шагу.</a:t>
+            </a:r>
+          </a:p>
+        </p:txBody>
+      </p:sp>
+      <p:sp>
+        <p:nvSpPr>
+          <p:cNvPr id="30" name="Rectangle 29"/>
+          <p:cNvSpPr/>
+          <p:nvPr/>
+        </p:nvSpPr>
+        <p:spPr>
+          <a:xfrm>
+            <a:off x="9015984" y="5413248"/>
+            <a:ext cx="2578608" cy="603504"/>
+          </a:xfrm>
+          <a:prstGeom prst="rect">
+            <a:avLst/>
+          </a:prstGeom>
+          <a:solidFill>
+            <a:srgbClr val="FFF5C9"/>
+          </a:solidFill>
+          <a:ln>
+            <a:noFill/>
+          </a:ln>
+        </p:spPr>
+        <p:style>
+          <a:lnRef idx="1">
+            <a:schemeClr val="accent1"/>
+          </a:lnRef>
+          <a:fillRef idx="3">
+            <a:schemeClr val="accent1"/>
+          </a:fillRef>
+          <a:effectRef idx="2">
+            <a:schemeClr val="accent1"/>
+          </a:effectRef>
+          <a:fontRef idx="minor">
+            <a:schemeClr val="lt1"/>
+          </a:fontRef>
+        </p:style>
+        <p:txBody>
+          <a:bodyPr rtlCol="0" anchor="ctr"/>
+          <a:lstStyle/>
+          <a:p>
+            <a:pPr algn="ctr"/>
+          </a:p>
+        </p:txBody>
+      </p:sp>
+      <p:sp>
+        <p:nvSpPr>
+          <p:cNvPr id="31" name="TextBox 30"/>
+          <p:cNvSpPr txBox="1"/>
+          <p:nvPr/>
+        </p:nvSpPr>
+        <p:spPr>
+          <a:xfrm>
+            <a:off x="9180576" y="5559552"/>
+            <a:ext cx="2249424" cy="292608"/>
+          </a:xfrm>
+          <a:prstGeom prst="rect">
+            <a:avLst/>
+          </a:prstGeom>
+          <a:noFill/>
+        </p:spPr>
+        <p:txBody>
+          <a:bodyPr wrap="square" anchor="t" lIns="0" rIns="0" tIns="0" bIns="0">
+            <a:spAutoFit/>
+          </a:bodyPr>
+          <a:lstStyle/>
+          <a:p>
+            <a:pPr algn="l">
+              <a:lnSpc>
+                <a:spcPct val="100000"/>
+              </a:lnSpc>
+              <a:spcBef>
+                <a:spcPts val="0"/>
+              </a:spcBef>
+              <a:spcAft>
+                <a:spcPts val="0"/>
+              </a:spcAft>
+            </a:pPr>
+            <a:r>
+              <a:rPr sz="919" b="0">
+                <a:solidFill>
+                  <a:srgbClr val="6E687D"/>
+                </a:solidFill>
+                <a:latin typeface="Arial"/>
+              </a:rPr>
+              <a:t>Курсор и номер показывают единственное действие этого кадра.</a:t>
+            </a:r>
+          </a:p>
+        </p:txBody>
+      </p:sp>
+      <p:sp>
+        <p:nvSpPr>
+          <p:cNvPr id="32" name="Rectangle 31"/>
           <p:cNvSpPr/>
           <p:nvPr/>
         </p:nvSpPr>
@@ -5913,7 +6449,7 @@
       </p:sp>
       <p:sp>
         <p:nvSpPr>
-          <p:cNvPr id="21" name="TextBox 20"/>
+          <p:cNvPr id="33" name="TextBox 32"/>
           <p:cNvSpPr txBox="1"/>
           <p:nvPr/>
         </p:nvSpPr>
@@ -6200,7 +6736,7 @@
                 </a:solidFill>
                 <a:latin typeface="Arial"/>
               </a:rPr>
-              <a:t>Текст новости и изображение</a:t>
+              <a:t>Категория, формат и группы</a:t>
             </a:r>
           </a:p>
         </p:txBody>
@@ -6378,7 +6914,7 @@
                 </a:solidFill>
                 <a:latin typeface="Arial"/>
               </a:rPr>
-              <a:t>Рассылки -&gt; Новость</a:t>
+              <a:t>Рассылки -&gt; Получатели</a:t>
             </a:r>
           </a:p>
         </p:txBody>
@@ -6391,8 +6927,8 @@
         </p:nvSpPr>
         <p:spPr>
           <a:xfrm>
-            <a:off x="530352" y="2066543"/>
-            <a:ext cx="3822191" cy="4206240"/>
+            <a:off x="438912" y="2066543"/>
+            <a:ext cx="8321040" cy="4206240"/>
           </a:xfrm>
           <a:prstGeom prst="rect">
             <a:avLst/>
@@ -6436,8 +6972,8 @@
         </p:nvSpPr>
         <p:spPr>
           <a:xfrm>
-            <a:off x="530352" y="2066543"/>
-            <a:ext cx="3822191" cy="292608"/>
+            <a:off x="438912" y="2066543"/>
+            <a:ext cx="8321040" cy="292608"/>
           </a:xfrm>
           <a:prstGeom prst="rect">
             <a:avLst/>
@@ -6479,8 +7015,8 @@
         </p:nvSpPr>
         <p:spPr>
           <a:xfrm>
-            <a:off x="658368" y="2121408"/>
-            <a:ext cx="3566159" cy="182880"/>
+            <a:off x="566928" y="2121408"/>
+            <a:ext cx="8065008" cy="182880"/>
           </a:xfrm>
           <a:prstGeom prst="rect">
             <a:avLst/>
@@ -6511,7 +7047,7 @@
                 </a:solidFill>
                 <a:latin typeface="Arial"/>
               </a:rPr>
-              <a:t>Экран на телефоне</a:t>
+              <a:t>Экран приложения</a:t>
             </a:r>
           </a:p>
         </p:txBody>
@@ -6532,8 +7068,8 @@
         </p:blipFill>
         <p:spPr>
           <a:xfrm>
-            <a:off x="1513886" y="2432303"/>
-            <a:ext cx="1855123" cy="3767327"/>
+            <a:off x="1585569" y="2432303"/>
+            <a:ext cx="6027724" cy="3767327"/>
           </a:xfrm>
           <a:prstGeom prst="rect">
             <a:avLst/>
@@ -6548,7 +7084,7 @@
         </p:nvSpPr>
         <p:spPr>
           <a:xfrm>
-            <a:off x="2212848" y="3145535"/>
+            <a:off x="3105009" y="4200387"/>
             <a:ext cx="457200" cy="457200"/>
           </a:xfrm>
           <a:prstGeom prst="ellipse">
@@ -6591,7 +7127,7 @@
         </p:nvSpPr>
         <p:spPr>
           <a:xfrm>
-            <a:off x="2276856" y="3209543"/>
+            <a:off x="3169017" y="4264395"/>
             <a:ext cx="329184" cy="329184"/>
           </a:xfrm>
           <a:prstGeom prst="ellipse">
@@ -6630,7 +7166,7 @@
                 </a:solidFill>
                 <a:latin typeface="Arial"/>
               </a:rPr>
-              <a:t>1</a:t>
+              <a:t>2</a:t>
             </a:r>
           </a:p>
         </p:txBody>
@@ -6643,7 +7179,7 @@
         </p:nvSpPr>
         <p:spPr>
           <a:xfrm rot="18900000">
-            <a:off x="2532888" y="3483863"/>
+            <a:off x="3425049" y="4538715"/>
             <a:ext cx="256032" cy="365760"/>
           </a:xfrm>
           <a:prstGeom prst="upArrow">
@@ -6688,8 +7224,8 @@
         </p:nvSpPr>
         <p:spPr>
           <a:xfrm>
-            <a:off x="4645152" y="2066543"/>
-            <a:ext cx="6949440" cy="420624"/>
+            <a:off x="9015984" y="2066543"/>
+            <a:ext cx="2578608" cy="420624"/>
           </a:xfrm>
           <a:prstGeom prst="rect">
             <a:avLst/>
@@ -6731,8 +7267,8 @@
         </p:nvSpPr>
         <p:spPr>
           <a:xfrm>
-            <a:off x="4809744" y="2185416"/>
-            <a:ext cx="6620255" cy="164592"/>
+            <a:off x="9180576" y="2185416"/>
+            <a:ext cx="2249424" cy="164592"/>
           </a:xfrm>
           <a:prstGeom prst="rect">
             <a:avLst/>
@@ -6763,7 +7299,7 @@
                 </a:solidFill>
                 <a:latin typeface="Arial"/>
               </a:rPr>
-              <a:t>ШАГ 1 ИЗ 3</a:t>
+              <a:t>ШАГ 2 ИЗ 3</a:t>
             </a:r>
           </a:p>
         </p:txBody>
@@ -6776,8 +7312,8 @@
         </p:nvSpPr>
         <p:spPr>
           <a:xfrm>
-            <a:off x="4645152" y="2596896"/>
-            <a:ext cx="6949440" cy="1499616"/>
+            <a:off x="9015984" y="2596896"/>
+            <a:ext cx="2578608" cy="1499616"/>
           </a:xfrm>
           <a:prstGeom prst="rect">
             <a:avLst/>
@@ -6821,7 +7357,7 @@
         </p:nvSpPr>
         <p:spPr>
           <a:xfrm>
-            <a:off x="4645152" y="2596896"/>
+            <a:off x="9015984" y="2596896"/>
             <a:ext cx="54864" cy="1499616"/>
           </a:xfrm>
           <a:prstGeom prst="rect">
@@ -6864,7 +7400,7 @@
         </p:nvSpPr>
         <p:spPr>
           <a:xfrm>
-            <a:off x="4809744" y="2734056"/>
+            <a:off x="9180576" y="2734056"/>
             <a:ext cx="310896" cy="310896"/>
           </a:xfrm>
           <a:prstGeom prst="roundRect">
@@ -6907,7 +7443,7 @@
         </p:nvSpPr>
         <p:spPr>
           <a:xfrm>
-            <a:off x="4809744" y="2743200"/>
+            <a:off x="9180576" y="2743200"/>
             <a:ext cx="310896" cy="256032"/>
           </a:xfrm>
           <a:prstGeom prst="rect">
@@ -6939,7 +7475,7 @@
                 </a:solidFill>
                 <a:latin typeface="Arial"/>
               </a:rPr>
-              <a:t>1</a:t>
+              <a:t>2</a:t>
             </a:r>
           </a:p>
         </p:txBody>
@@ -6952,8 +7488,8 @@
         </p:nvSpPr>
         <p:spPr>
           <a:xfrm>
-            <a:off x="5230368" y="2688336"/>
-            <a:ext cx="6217920" cy="310896"/>
+            <a:off x="9601200" y="2688336"/>
+            <a:ext cx="1847087" cy="310896"/>
           </a:xfrm>
           <a:prstGeom prst="rect">
             <a:avLst/>
@@ -6984,7 +7520,7 @@
                 </a:solidFill>
                 <a:latin typeface="Arial"/>
               </a:rPr>
-              <a:t>Введите заголовок</a:t>
+              <a:t>Выберите формат</a:t>
             </a:r>
           </a:p>
         </p:txBody>
@@ -6997,8 +7533,8 @@
         </p:nvSpPr>
         <p:spPr>
           <a:xfrm>
-            <a:off x="5230368" y="3008376"/>
-            <a:ext cx="6217920" cy="1033271"/>
+            <a:off x="9601200" y="3008376"/>
+            <a:ext cx="1847087" cy="1033271"/>
           </a:xfrm>
           <a:prstGeom prst="rect">
             <a:avLst/>
@@ -7029,7 +7565,7 @@
                 </a:solidFill>
                 <a:latin typeface="Arial"/>
               </a:rPr>
-              <a:t>Он должен кратко объяснять тему.</a:t>
+              <a:t>Очные, онлайн или индивидуальные группы.</a:t>
             </a:r>
           </a:p>
         </p:txBody>
@@ -7042,8 +7578,8 @@
         </p:nvSpPr>
         <p:spPr>
           <a:xfrm>
-            <a:off x="4645152" y="4315968"/>
-            <a:ext cx="6949440" cy="877824"/>
+            <a:off x="9015984" y="4315968"/>
+            <a:ext cx="2578608" cy="877824"/>
           </a:xfrm>
           <a:prstGeom prst="rect">
             <a:avLst/>
@@ -7085,7 +7621,7 @@
         </p:nvSpPr>
         <p:spPr>
           <a:xfrm>
-            <a:off x="4645152" y="4315968"/>
+            <a:off x="9015984" y="4315968"/>
             <a:ext cx="54864" cy="877824"/>
           </a:xfrm>
           <a:prstGeom prst="rect">
@@ -7128,8 +7664,8 @@
         </p:nvSpPr>
         <p:spPr>
           <a:xfrm>
-            <a:off x="4846320" y="4425696"/>
-            <a:ext cx="6620255" cy="219456"/>
+            <a:off x="9217152" y="4425696"/>
+            <a:ext cx="2249424" cy="219456"/>
           </a:xfrm>
           <a:prstGeom prst="rect">
             <a:avLst/>
@@ -7173,8 +7709,8 @@
         </p:nvSpPr>
         <p:spPr>
           <a:xfrm>
-            <a:off x="4846320" y="4681728"/>
-            <a:ext cx="6620255" cy="402336"/>
+            <a:off x="9217152" y="4681728"/>
+            <a:ext cx="2249424" cy="402336"/>
           </a:xfrm>
           <a:prstGeom prst="rect">
             <a:avLst/>
@@ -7218,8 +7754,8 @@
         </p:nvSpPr>
         <p:spPr>
           <a:xfrm>
-            <a:off x="4645152" y="5413248"/>
-            <a:ext cx="6949440" cy="603504"/>
+            <a:off x="9015984" y="5413248"/>
+            <a:ext cx="2578608" cy="603504"/>
           </a:xfrm>
           <a:prstGeom prst="rect">
             <a:avLst/>
@@ -7261,8 +7797,8 @@
         </p:nvSpPr>
         <p:spPr>
           <a:xfrm>
-            <a:off x="4809744" y="5559552"/>
-            <a:ext cx="6620255" cy="292608"/>
+            <a:off x="9180576" y="5559552"/>
+            <a:ext cx="2249424" cy="292608"/>
           </a:xfrm>
           <a:prstGeom prst="rect">
             <a:avLst/>
@@ -7630,7 +8166,7 @@
                 </a:solidFill>
                 <a:latin typeface="Arial"/>
               </a:rPr>
-              <a:t>Текст новости и изображение</a:t>
+              <a:t>Категория, формат и группы</a:t>
             </a:r>
           </a:p>
         </p:txBody>
@@ -7808,7 +8344,7 @@
                 </a:solidFill>
                 <a:latin typeface="Arial"/>
               </a:rPr>
-              <a:t>Рассылки -&gt; Новость</a:t>
+              <a:t>Рассылки -&gt; Получатели</a:t>
             </a:r>
           </a:p>
         </p:txBody>
@@ -7821,8 +8357,8 @@
         </p:nvSpPr>
         <p:spPr>
           <a:xfrm>
-            <a:off x="530352" y="2066543"/>
-            <a:ext cx="3822191" cy="4206240"/>
+            <a:off x="438912" y="2066543"/>
+            <a:ext cx="8321040" cy="4206240"/>
           </a:xfrm>
           <a:prstGeom prst="rect">
             <a:avLst/>
@@ -7866,8 +8402,8 @@
         </p:nvSpPr>
         <p:spPr>
           <a:xfrm>
-            <a:off x="530352" y="2066543"/>
-            <a:ext cx="3822191" cy="292608"/>
+            <a:off x="438912" y="2066543"/>
+            <a:ext cx="8321040" cy="292608"/>
           </a:xfrm>
           <a:prstGeom prst="rect">
             <a:avLst/>
@@ -7909,8 +8445,8 @@
         </p:nvSpPr>
         <p:spPr>
           <a:xfrm>
-            <a:off x="658368" y="2121408"/>
-            <a:ext cx="3566159" cy="182880"/>
+            <a:off x="566928" y="2121408"/>
+            <a:ext cx="8065008" cy="182880"/>
           </a:xfrm>
           <a:prstGeom prst="rect">
             <a:avLst/>
@@ -7941,7 +8477,7 @@
                 </a:solidFill>
                 <a:latin typeface="Arial"/>
               </a:rPr>
-              <a:t>Экран на телефоне</a:t>
+              <a:t>Экран приложения</a:t>
             </a:r>
           </a:p>
         </p:txBody>
@@ -7962,8 +8498,8 @@
         </p:blipFill>
         <p:spPr>
           <a:xfrm>
-            <a:off x="1513886" y="2432303"/>
-            <a:ext cx="1855123" cy="3767327"/>
+            <a:off x="1585569" y="2432303"/>
+            <a:ext cx="6027724" cy="3767327"/>
           </a:xfrm>
           <a:prstGeom prst="rect">
             <a:avLst/>
@@ -7978,7 +8514,7 @@
         </p:nvSpPr>
         <p:spPr>
           <a:xfrm>
-            <a:off x="2212848" y="4012021"/>
+            <a:off x="3225564" y="5029199"/>
             <a:ext cx="457200" cy="457200"/>
           </a:xfrm>
           <a:prstGeom prst="ellipse">
@@ -8021,7 +8557,7 @@
         </p:nvSpPr>
         <p:spPr>
           <a:xfrm>
-            <a:off x="2276856" y="4076029"/>
+            <a:off x="3289572" y="5093207"/>
             <a:ext cx="329184" cy="329184"/>
           </a:xfrm>
           <a:prstGeom prst="ellipse">
@@ -8060,7 +8596,7 @@
                 </a:solidFill>
                 <a:latin typeface="Arial"/>
               </a:rPr>
-              <a:t>2</a:t>
+              <a:t>3</a:t>
             </a:r>
           </a:p>
         </p:txBody>
@@ -8073,7 +8609,7 @@
         </p:nvSpPr>
         <p:spPr>
           <a:xfrm rot="18900000">
-            <a:off x="2532888" y="4350349"/>
+            <a:off x="3545604" y="5367527"/>
             <a:ext cx="256032" cy="365760"/>
           </a:xfrm>
           <a:prstGeom prst="upArrow">
@@ -8118,8 +8654,8 @@
         </p:nvSpPr>
         <p:spPr>
           <a:xfrm>
-            <a:off x="4645152" y="2066543"/>
-            <a:ext cx="6949440" cy="420624"/>
+            <a:off x="9015984" y="2066543"/>
+            <a:ext cx="2578608" cy="420624"/>
           </a:xfrm>
           <a:prstGeom prst="rect">
             <a:avLst/>
@@ -8161,8 +8697,8 @@
         </p:nvSpPr>
         <p:spPr>
           <a:xfrm>
-            <a:off x="4809744" y="2185416"/>
-            <a:ext cx="6620255" cy="164592"/>
+            <a:off x="9180576" y="2185416"/>
+            <a:ext cx="2249424" cy="164592"/>
           </a:xfrm>
           <a:prstGeom prst="rect">
             <a:avLst/>
@@ -8193,7 +8729,7 @@
                 </a:solidFill>
                 <a:latin typeface="Arial"/>
               </a:rPr>
-              <a:t>ШАГ 2 ИЗ 3</a:t>
+              <a:t>ШАГ 3 ИЗ 3</a:t>
             </a:r>
           </a:p>
         </p:txBody>
@@ -8206,8 +8742,8 @@
         </p:nvSpPr>
         <p:spPr>
           <a:xfrm>
-            <a:off x="4645152" y="2596896"/>
-            <a:ext cx="6949440" cy="1499616"/>
+            <a:off x="9015984" y="2596896"/>
+            <a:ext cx="2578608" cy="1499616"/>
           </a:xfrm>
           <a:prstGeom prst="rect">
             <a:avLst/>
@@ -8251,7 +8787,7 @@
         </p:nvSpPr>
         <p:spPr>
           <a:xfrm>
-            <a:off x="4645152" y="2596896"/>
+            <a:off x="9015984" y="2596896"/>
             <a:ext cx="54864" cy="1499616"/>
           </a:xfrm>
           <a:prstGeom prst="rect">
@@ -8294,7 +8830,7 @@
         </p:nvSpPr>
         <p:spPr>
           <a:xfrm>
-            <a:off x="4809744" y="2734056"/>
+            <a:off x="9180576" y="2734056"/>
             <a:ext cx="310896" cy="310896"/>
           </a:xfrm>
           <a:prstGeom prst="roundRect">
@@ -8337,7 +8873,7 @@
         </p:nvSpPr>
         <p:spPr>
           <a:xfrm>
-            <a:off x="4809744" y="2743200"/>
+            <a:off x="9180576" y="2743200"/>
             <a:ext cx="310896" cy="256032"/>
           </a:xfrm>
           <a:prstGeom prst="rect">
@@ -8369,7 +8905,7 @@
                 </a:solidFill>
                 <a:latin typeface="Arial"/>
               </a:rPr>
-              <a:t>2</a:t>
+              <a:t>3</a:t>
             </a:r>
           </a:p>
         </p:txBody>
@@ -8382,8 +8918,8 @@
         </p:nvSpPr>
         <p:spPr>
           <a:xfrm>
-            <a:off x="5230368" y="2688336"/>
-            <a:ext cx="6217920" cy="310896"/>
+            <a:off x="9601200" y="2688336"/>
+            <a:ext cx="1847087" cy="310896"/>
           </a:xfrm>
           <a:prstGeom prst="rect">
             <a:avLst/>
@@ -8414,7 +8950,7 @@
                 </a:solidFill>
                 <a:latin typeface="Arial"/>
               </a:rPr>
-              <a:t>Напишите сообщение</a:t>
+              <a:t>Уточните площадки</a:t>
             </a:r>
           </a:p>
         </p:txBody>
@@ -8427,8 +8963,8 @@
         </p:nvSpPr>
         <p:spPr>
           <a:xfrm>
-            <a:off x="5230368" y="3008376"/>
-            <a:ext cx="6217920" cy="1033271"/>
+            <a:off x="9601200" y="3008376"/>
+            <a:ext cx="1847087" cy="1033271"/>
           </a:xfrm>
           <a:prstGeom prst="rect">
             <a:avLst/>
@@ -8459,7 +8995,7 @@
                 </a:solidFill>
                 <a:latin typeface="Arial"/>
               </a:rPr>
-              <a:t>Укажите дату, место и действие получателя.</a:t>
+              <a:t>Выберите площадки и конкретные группы.</a:t>
             </a:r>
           </a:p>
         </p:txBody>
@@ -8472,8 +9008,8 @@
         </p:nvSpPr>
         <p:spPr>
           <a:xfrm>
-            <a:off x="4645152" y="4315968"/>
-            <a:ext cx="6949440" cy="877824"/>
+            <a:off x="9015984" y="4315968"/>
+            <a:ext cx="2578608" cy="877824"/>
           </a:xfrm>
           <a:prstGeom prst="rect">
             <a:avLst/>
@@ -8515,7 +9051,7 @@
         </p:nvSpPr>
         <p:spPr>
           <a:xfrm>
-            <a:off x="4645152" y="4315968"/>
+            <a:off x="9015984" y="4315968"/>
             <a:ext cx="54864" cy="877824"/>
           </a:xfrm>
           <a:prstGeom prst="rect">
@@ -8558,8 +9094,8 @@
         </p:nvSpPr>
         <p:spPr>
           <a:xfrm>
-            <a:off x="4846320" y="4425696"/>
-            <a:ext cx="6620255" cy="219456"/>
+            <a:off x="9217152" y="4425696"/>
+            <a:ext cx="2249424" cy="219456"/>
           </a:xfrm>
           <a:prstGeom prst="rect">
             <a:avLst/>
@@ -8603,8 +9139,8 @@
         </p:nvSpPr>
         <p:spPr>
           <a:xfrm>
-            <a:off x="4846320" y="4681728"/>
-            <a:ext cx="6620255" cy="402336"/>
+            <a:off x="9217152" y="4681728"/>
+            <a:ext cx="2249424" cy="402336"/>
           </a:xfrm>
           <a:prstGeom prst="rect">
             <a:avLst/>
@@ -8635,7 +9171,7 @@
                 </a:solidFill>
                 <a:latin typeface="Arial"/>
               </a:rPr>
-              <a:t>После нажатия дождитесь изменения экрана и переходите к следующему шагу.</a:t>
+              <a:t>Куратор видит только доступные ему группы и проверяет итоговое число получателей.</a:t>
             </a:r>
           </a:p>
         </p:txBody>
@@ -8648,8 +9184,8 @@
         </p:nvSpPr>
         <p:spPr>
           <a:xfrm>
-            <a:off x="4645152" y="5413248"/>
-            <a:ext cx="6949440" cy="603504"/>
+            <a:off x="9015984" y="5413248"/>
+            <a:ext cx="2578608" cy="603504"/>
           </a:xfrm>
           <a:prstGeom prst="rect">
             <a:avLst/>
@@ -8691,8 +9227,8 @@
         </p:nvSpPr>
         <p:spPr>
           <a:xfrm>
-            <a:off x="4809744" y="5559552"/>
-            <a:ext cx="6620255" cy="292608"/>
+            <a:off x="9180576" y="5559552"/>
+            <a:ext cx="2249424" cy="292608"/>
           </a:xfrm>
           <a:prstGeom prst="rect">
             <a:avLst/>
@@ -9015,7 +9551,7 @@
                 </a:solidFill>
                 <a:latin typeface="Arial"/>
               </a:rPr>
-              <a:t>РАССЫЛКИ</a:t>
+              <a:t>ТИПИЧНАЯ СИТУАЦИЯ</a:t>
             </a:r>
           </a:p>
         </p:txBody>
@@ -9060,7 +9596,7 @@
                 </a:solidFill>
                 <a:latin typeface="Arial"/>
               </a:rPr>
-              <a:t>Текст новости и изображение</a:t>
+              <a:t>Аудитория пуста</a:t>
             </a:r>
           </a:p>
         </p:txBody>
@@ -9125,7 +9661,7 @@
             <a:avLst/>
           </a:prstGeom>
           <a:solidFill>
-            <a:srgbClr val="EEE7FF"/>
+            <a:srgbClr val="FCE7EC"/>
           </a:solidFill>
           <a:ln>
             <a:noFill/>
@@ -9161,8 +9697,8 @@
         </p:nvSpPr>
         <p:spPr>
           <a:xfrm>
-            <a:off x="603504" y="1746504"/>
-            <a:ext cx="420624" cy="137160"/>
+            <a:off x="603504" y="1737360"/>
+            <a:ext cx="2926080" cy="155448"/>
           </a:xfrm>
           <a:prstGeom prst="rect">
             <a:avLst/>
@@ -9189,70 +9725,25 @@
             <a:r>
               <a:rPr sz="850" b="1">
                 <a:solidFill>
-                  <a:srgbClr val="6F35D4"/>
-                </a:solidFill>
-                <a:latin typeface="Arial"/>
-              </a:rPr>
-              <a:t>ПУТЬ</a:t>
-            </a:r>
-          </a:p>
-        </p:txBody>
-      </p:sp>
-      <p:sp>
-        <p:nvSpPr>
-          <p:cNvPr id="10" name="TextBox 9"/>
-          <p:cNvSpPr txBox="1"/>
-          <p:nvPr/>
-        </p:nvSpPr>
-        <p:spPr>
-          <a:xfrm>
-            <a:off x="1097280" y="1700784"/>
-            <a:ext cx="10287000" cy="201168"/>
-          </a:xfrm>
-          <a:prstGeom prst="rect">
-            <a:avLst/>
-          </a:prstGeom>
-          <a:noFill/>
-        </p:spPr>
-        <p:txBody>
-          <a:bodyPr wrap="square" anchor="t" lIns="0" rIns="0" tIns="0" bIns="0">
-            <a:spAutoFit/>
-          </a:bodyPr>
-          <a:lstStyle/>
-          <a:p>
-            <a:pPr algn="l">
-              <a:lnSpc>
-                <a:spcPct val="100000"/>
-              </a:lnSpc>
-              <a:spcBef>
-                <a:spcPts val="0"/>
-              </a:spcBef>
-              <a:spcAft>
-                <a:spcPts val="0"/>
-              </a:spcAft>
-            </a:pPr>
-            <a:r>
-              <a:rPr sz="1150" b="1">
-                <a:solidFill>
-                  <a:srgbClr val="21172F"/>
-                </a:solidFill>
-                <a:latin typeface="Arial"/>
-              </a:rPr>
-              <a:t>Рассылки -&gt; Новость</a:t>
-            </a:r>
-          </a:p>
-        </p:txBody>
-      </p:sp>
-      <p:sp>
-        <p:nvSpPr>
-          <p:cNvPr id="11" name="Rectangle 10"/>
+                  <a:srgbClr val="D94261"/>
+                </a:solidFill>
+                <a:latin typeface="Arial"/>
+              </a:rPr>
+              <a:t>ВОСПРОИЗВЕДЕННАЯ ОШИБКА</a:t>
+            </a:r>
+          </a:p>
+        </p:txBody>
+      </p:sp>
+      <p:sp>
+        <p:nvSpPr>
+          <p:cNvPr id="10" name="Rectangle 9"/>
           <p:cNvSpPr/>
           <p:nvPr/>
         </p:nvSpPr>
         <p:spPr>
           <a:xfrm>
-            <a:off x="530352" y="2066543"/>
-            <a:ext cx="3822191" cy="4206240"/>
+            <a:off x="438912" y="2066543"/>
+            <a:ext cx="8321040" cy="4206240"/>
           </a:xfrm>
           <a:prstGeom prst="rect">
             <a:avLst/>
@@ -9290,14 +9781,14 @@
       </p:sp>
       <p:sp>
         <p:nvSpPr>
-          <p:cNvPr id="12" name="Rectangle 11"/>
+          <p:cNvPr id="11" name="Rectangle 10"/>
           <p:cNvSpPr/>
           <p:nvPr/>
         </p:nvSpPr>
         <p:spPr>
           <a:xfrm>
-            <a:off x="530352" y="2066543"/>
-            <a:ext cx="3822191" cy="292608"/>
+            <a:off x="438912" y="2066543"/>
+            <a:ext cx="8321040" cy="292608"/>
           </a:xfrm>
           <a:prstGeom prst="rect">
             <a:avLst/>
@@ -9333,14 +9824,14 @@
       </p:sp>
       <p:sp>
         <p:nvSpPr>
-          <p:cNvPr id="13" name="TextBox 12"/>
-          <p:cNvSpPr txBox="1"/>
-          <p:nvPr/>
-        </p:nvSpPr>
-        <p:spPr>
-          <a:xfrm>
-            <a:off x="658368" y="2121408"/>
-            <a:ext cx="3566159" cy="182880"/>
+          <p:cNvPr id="12" name="TextBox 11"/>
+          <p:cNvSpPr txBox="1"/>
+          <p:nvPr/>
+        </p:nvSpPr>
+        <p:spPr>
+          <a:xfrm>
+            <a:off x="566928" y="2121408"/>
+            <a:ext cx="8065008" cy="182880"/>
           </a:xfrm>
           <a:prstGeom prst="rect">
             <a:avLst/>
@@ -9371,14 +9862,14 @@
                 </a:solidFill>
                 <a:latin typeface="Arial"/>
               </a:rPr>
-              <a:t>Экран на телефоне</a:t>
+              <a:t>Экран приложения</a:t>
             </a:r>
           </a:p>
         </p:txBody>
       </p:sp>
       <p:pic>
         <p:nvPicPr>
-          <p:cNvPr id="14" name="Picture 13" descr="image.png"/>
+          <p:cNvPr id="13" name="Picture 12" descr="image.png"/>
           <p:cNvPicPr>
             <a:picLocks noChangeAspect="1"/>
           </p:cNvPicPr>
@@ -9392,8 +9883,8 @@
         </p:blipFill>
         <p:spPr>
           <a:xfrm>
-            <a:off x="1513886" y="2432303"/>
-            <a:ext cx="1855123" cy="3767327"/>
+            <a:off x="1585569" y="2432303"/>
+            <a:ext cx="6027724" cy="3767327"/>
           </a:xfrm>
           <a:prstGeom prst="rect">
             <a:avLst/>
@@ -9402,20 +9893,22 @@
       </p:pic>
       <p:sp>
         <p:nvSpPr>
-          <p:cNvPr id="15" name="Oval 14"/>
+          <p:cNvPr id="14" name="Rectangle 13"/>
           <p:cNvSpPr/>
           <p:nvPr/>
         </p:nvSpPr>
         <p:spPr>
           <a:xfrm>
-            <a:off x="2212848" y="5066873"/>
-            <a:ext cx="457200" cy="457200"/>
-          </a:xfrm>
-          <a:prstGeom prst="ellipse">
-            <a:avLst/>
-          </a:prstGeom>
-          <a:noFill/>
-          <a:ln w="27940">
+            <a:off x="9015984" y="2066543"/>
+            <a:ext cx="2578608" cy="1499616"/>
+          </a:xfrm>
+          <a:prstGeom prst="rect">
+            <a:avLst/>
+          </a:prstGeom>
+          <a:solidFill>
+            <a:srgbClr val="FCE7EC"/>
+          </a:solidFill>
+          <a:ln w="10160">
             <a:solidFill>
               <a:srgbClr val="D94261"/>
             </a:solidFill>
@@ -9445,23 +9938,115 @@
       </p:sp>
       <p:sp>
         <p:nvSpPr>
-          <p:cNvPr id="16" name="Oval 15"/>
+          <p:cNvPr id="15" name="TextBox 14"/>
+          <p:cNvSpPr txBox="1"/>
+          <p:nvPr/>
+        </p:nvSpPr>
+        <p:spPr>
+          <a:xfrm>
+            <a:off x="9198863" y="2267712"/>
+            <a:ext cx="2212848" cy="274320"/>
+          </a:xfrm>
+          <a:prstGeom prst="rect">
+            <a:avLst/>
+          </a:prstGeom>
+          <a:noFill/>
+        </p:spPr>
+        <p:txBody>
+          <a:bodyPr wrap="square" anchor="t" lIns="0" rIns="0" tIns="0" bIns="0">
+            <a:spAutoFit/>
+          </a:bodyPr>
+          <a:lstStyle/>
+          <a:p>
+            <a:pPr algn="l">
+              <a:lnSpc>
+                <a:spcPct val="100000"/>
+              </a:lnSpc>
+              <a:spcBef>
+                <a:spcPts val="0"/>
+              </a:spcBef>
+              <a:spcAft>
+                <a:spcPts val="0"/>
+              </a:spcAft>
+            </a:pPr>
+            <a:r>
+              <a:rPr sz="1200" b="1">
+                <a:solidFill>
+                  <a:srgbClr val="21172F"/>
+                </a:solidFill>
+                <a:latin typeface="Arial"/>
+              </a:rPr>
+              <a:t>Что произошло</a:t>
+            </a:r>
+          </a:p>
+        </p:txBody>
+      </p:sp>
+      <p:sp>
+        <p:nvSpPr>
+          <p:cNvPr id="16" name="TextBox 15"/>
+          <p:cNvSpPr txBox="1"/>
+          <p:nvPr/>
+        </p:nvSpPr>
+        <p:spPr>
+          <a:xfrm>
+            <a:off x="9198863" y="2651760"/>
+            <a:ext cx="2212848" cy="713232"/>
+          </a:xfrm>
+          <a:prstGeom prst="rect">
+            <a:avLst/>
+          </a:prstGeom>
+          <a:noFill/>
+        </p:spPr>
+        <p:txBody>
+          <a:bodyPr wrap="square" anchor="t" lIns="0" rIns="0" tIns="0" bIns="0">
+            <a:spAutoFit/>
+          </a:bodyPr>
+          <a:lstStyle/>
+          <a:p>
+            <a:pPr algn="l">
+              <a:lnSpc>
+                <a:spcPct val="100000"/>
+              </a:lnSpc>
+              <a:spcBef>
+                <a:spcPts val="0"/>
+              </a:spcBef>
+              <a:spcAft>
+                <a:spcPts val="0"/>
+              </a:spcAft>
+            </a:pPr>
+            <a:r>
+              <a:rPr sz="1019" b="0">
+                <a:solidFill>
+                  <a:srgbClr val="6E687D"/>
+                </a:solidFill>
+                <a:latin typeface="Arial"/>
+              </a:rPr>
+              <a:t>Выбранная группа недоступна или фильтры исключили всех получателей.</a:t>
+            </a:r>
+          </a:p>
+        </p:txBody>
+      </p:sp>
+      <p:sp>
+        <p:nvSpPr>
+          <p:cNvPr id="17" name="Rectangle 16"/>
           <p:cNvSpPr/>
           <p:nvPr/>
         </p:nvSpPr>
         <p:spPr>
           <a:xfrm>
-            <a:off x="2276856" y="5130881"/>
-            <a:ext cx="329184" cy="329184"/>
-          </a:xfrm>
-          <a:prstGeom prst="ellipse">
+            <a:off x="9015984" y="3822191"/>
+            <a:ext cx="2578608" cy="1627632"/>
+          </a:xfrm>
+          <a:prstGeom prst="rect">
             <a:avLst/>
           </a:prstGeom>
           <a:solidFill>
-            <a:srgbClr val="D94261"/>
+            <a:srgbClr val="E1F6F3"/>
           </a:solidFill>
-          <a:ln>
-            <a:noFill/>
+          <a:ln w="10160">
+            <a:solidFill>
+              <a:srgbClr val="149B91"/>
+            </a:solidFill>
           </a:ln>
         </p:spPr>
         <p:style>
@@ -9479,107 +10064,55 @@
           </a:fontRef>
         </p:style>
         <p:txBody>
-          <a:bodyPr rtlCol="0" anchor="ctr" lIns="0" rIns="0" tIns="0" bIns="0"/>
+          <a:bodyPr rtlCol="0" anchor="ctr"/>
           <a:lstStyle/>
           <a:p>
             <a:pPr algn="ctr"/>
+          </a:p>
+        </p:txBody>
+      </p:sp>
+      <p:sp>
+        <p:nvSpPr>
+          <p:cNvPr id="18" name="TextBox 17"/>
+          <p:cNvSpPr txBox="1"/>
+          <p:nvPr/>
+        </p:nvSpPr>
+        <p:spPr>
+          <a:xfrm>
+            <a:off x="9198863" y="4023360"/>
+            <a:ext cx="2212848" cy="274320"/>
+          </a:xfrm>
+          <a:prstGeom prst="rect">
+            <a:avLst/>
+          </a:prstGeom>
+          <a:noFill/>
+        </p:spPr>
+        <p:txBody>
+          <a:bodyPr wrap="square" anchor="t" lIns="0" rIns="0" tIns="0" bIns="0">
+            <a:spAutoFit/>
+          </a:bodyPr>
+          <a:lstStyle/>
+          <a:p>
+            <a:pPr algn="l">
+              <a:lnSpc>
+                <a:spcPct val="100000"/>
+              </a:lnSpc>
+              <a:spcBef>
+                <a:spcPts val="0"/>
+              </a:spcBef>
+              <a:spcAft>
+                <a:spcPts val="0"/>
+              </a:spcAft>
+            </a:pPr>
             <a:r>
               <a:rPr sz="1200" b="1">
                 <a:solidFill>
-                  <a:srgbClr val="FFFFFF"/>
-                </a:solidFill>
-                <a:latin typeface="Arial"/>
-              </a:rPr>
-              <a:t>3</a:t>
-            </a:r>
-          </a:p>
-        </p:txBody>
-      </p:sp>
-      <p:sp>
-        <p:nvSpPr>
-          <p:cNvPr id="17" name="Up Arrow 16"/>
-          <p:cNvSpPr/>
-          <p:nvPr/>
-        </p:nvSpPr>
-        <p:spPr>
-          <a:xfrm rot="18900000">
-            <a:off x="2532888" y="5405201"/>
-            <a:ext cx="256032" cy="365760"/>
-          </a:xfrm>
-          <a:prstGeom prst="upArrow">
-            <a:avLst/>
-          </a:prstGeom>
-          <a:solidFill>
-            <a:srgbClr val="FFFFFF"/>
-          </a:solidFill>
-          <a:ln w="17780">
-            <a:solidFill>
-              <a:srgbClr val="3B1F68"/>
-            </a:solidFill>
-          </a:ln>
-        </p:spPr>
-        <p:style>
-          <a:lnRef idx="1">
-            <a:schemeClr val="accent1"/>
-          </a:lnRef>
-          <a:fillRef idx="3">
-            <a:schemeClr val="accent1"/>
-          </a:fillRef>
-          <a:effectRef idx="2">
-            <a:schemeClr val="accent1"/>
-          </a:effectRef>
-          <a:fontRef idx="minor">
-            <a:schemeClr val="lt1"/>
-          </a:fontRef>
-        </p:style>
-        <p:txBody>
-          <a:bodyPr rtlCol="0" anchor="ctr"/>
-          <a:lstStyle/>
-          <a:p>
-            <a:pPr algn="ctr"/>
-          </a:p>
-        </p:txBody>
-      </p:sp>
-      <p:sp>
-        <p:nvSpPr>
-          <p:cNvPr id="18" name="Rectangle 17"/>
-          <p:cNvSpPr/>
-          <p:nvPr/>
-        </p:nvSpPr>
-        <p:spPr>
-          <a:xfrm>
-            <a:off x="4645152" y="2066543"/>
-            <a:ext cx="6949440" cy="420624"/>
-          </a:xfrm>
-          <a:prstGeom prst="rect">
-            <a:avLst/>
-          </a:prstGeom>
-          <a:solidFill>
-            <a:srgbClr val="3B1F68"/>
-          </a:solidFill>
-          <a:ln>
-            <a:noFill/>
-          </a:ln>
-        </p:spPr>
-        <p:style>
-          <a:lnRef idx="1">
-            <a:schemeClr val="accent1"/>
-          </a:lnRef>
-          <a:fillRef idx="3">
-            <a:schemeClr val="accent1"/>
-          </a:fillRef>
-          <a:effectRef idx="2">
-            <a:schemeClr val="accent1"/>
-          </a:effectRef>
-          <a:fontRef idx="minor">
-            <a:schemeClr val="lt1"/>
-          </a:fontRef>
-        </p:style>
-        <p:txBody>
-          <a:bodyPr rtlCol="0" anchor="ctr"/>
-          <a:lstStyle/>
-          <a:p>
-            <a:pPr algn="ctr"/>
+                  <a:srgbClr val="21172F"/>
+                </a:solidFill>
+                <a:latin typeface="Arial"/>
+              </a:rPr>
+              <a:t>Как исправить</a:t>
+            </a:r>
           </a:p>
         </p:txBody>
       </p:sp>
@@ -9591,8 +10124,8 @@
         </p:nvSpPr>
         <p:spPr>
           <a:xfrm>
-            <a:off x="4809744" y="2185416"/>
-            <a:ext cx="6620255" cy="164592"/>
+            <a:off x="9198863" y="4407408"/>
+            <a:ext cx="2212848" cy="822960"/>
           </a:xfrm>
           <a:prstGeom prst="rect">
             <a:avLst/>
@@ -9617,13 +10150,13 @@
               </a:spcAft>
             </a:pPr>
             <a:r>
-              <a:rPr sz="950" b="1">
-                <a:solidFill>
-                  <a:srgbClr val="FFFFFF"/>
-                </a:solidFill>
-                <a:latin typeface="Arial"/>
-              </a:rPr>
-              <a:t>ШАГ 3 ИЗ 3</a:t>
+              <a:rPr sz="1019" b="0">
+                <a:solidFill>
+                  <a:srgbClr val="6E687D"/>
+                </a:solidFill>
+                <a:latin typeface="Arial"/>
+              </a:rPr>
+              <a:t>Сбросьте лишние условия, выберите доступную группу и снова рассчитайте аудиторию.</a:t>
             </a:r>
           </a:p>
         </p:txBody>
@@ -9631,536 +10164,6 @@
       <p:sp>
         <p:nvSpPr>
           <p:cNvPr id="20" name="Rectangle 19"/>
-          <p:cNvSpPr/>
-          <p:nvPr/>
-        </p:nvSpPr>
-        <p:spPr>
-          <a:xfrm>
-            <a:off x="4645152" y="2596896"/>
-            <a:ext cx="6949440" cy="1499616"/>
-          </a:xfrm>
-          <a:prstGeom prst="rect">
-            <a:avLst/>
-          </a:prstGeom>
-          <a:solidFill>
-            <a:srgbClr val="FFFFFF"/>
-          </a:solidFill>
-          <a:ln w="10160">
-            <a:solidFill>
-              <a:srgbClr val="DED9E8"/>
-            </a:solidFill>
-          </a:ln>
-        </p:spPr>
-        <p:style>
-          <a:lnRef idx="1">
-            <a:schemeClr val="accent1"/>
-          </a:lnRef>
-          <a:fillRef idx="3">
-            <a:schemeClr val="accent1"/>
-          </a:fillRef>
-          <a:effectRef idx="2">
-            <a:schemeClr val="accent1"/>
-          </a:effectRef>
-          <a:fontRef idx="minor">
-            <a:schemeClr val="lt1"/>
-          </a:fontRef>
-        </p:style>
-        <p:txBody>
-          <a:bodyPr rtlCol="0" anchor="ctr"/>
-          <a:lstStyle/>
-          <a:p>
-            <a:pPr algn="ctr"/>
-          </a:p>
-        </p:txBody>
-      </p:sp>
-      <p:sp>
-        <p:nvSpPr>
-          <p:cNvPr id="21" name="Rectangle 20"/>
-          <p:cNvSpPr/>
-          <p:nvPr/>
-        </p:nvSpPr>
-        <p:spPr>
-          <a:xfrm>
-            <a:off x="4645152" y="2596896"/>
-            <a:ext cx="54864" cy="1499616"/>
-          </a:xfrm>
-          <a:prstGeom prst="rect">
-            <a:avLst/>
-          </a:prstGeom>
-          <a:solidFill>
-            <a:srgbClr val="D94261"/>
-          </a:solidFill>
-          <a:ln>
-            <a:noFill/>
-          </a:ln>
-        </p:spPr>
-        <p:style>
-          <a:lnRef idx="1">
-            <a:schemeClr val="accent1"/>
-          </a:lnRef>
-          <a:fillRef idx="3">
-            <a:schemeClr val="accent1"/>
-          </a:fillRef>
-          <a:effectRef idx="2">
-            <a:schemeClr val="accent1"/>
-          </a:effectRef>
-          <a:fontRef idx="minor">
-            <a:schemeClr val="lt1"/>
-          </a:fontRef>
-        </p:style>
-        <p:txBody>
-          <a:bodyPr rtlCol="0" anchor="ctr"/>
-          <a:lstStyle/>
-          <a:p>
-            <a:pPr algn="ctr"/>
-          </a:p>
-        </p:txBody>
-      </p:sp>
-      <p:sp>
-        <p:nvSpPr>
-          <p:cNvPr id="22" name="Rounded Rectangle 21"/>
-          <p:cNvSpPr/>
-          <p:nvPr/>
-        </p:nvSpPr>
-        <p:spPr>
-          <a:xfrm>
-            <a:off x="4809744" y="2734056"/>
-            <a:ext cx="310896" cy="310896"/>
-          </a:xfrm>
-          <a:prstGeom prst="roundRect">
-            <a:avLst/>
-          </a:prstGeom>
-          <a:solidFill>
-            <a:srgbClr val="D94261"/>
-          </a:solidFill>
-          <a:ln>
-            <a:noFill/>
-          </a:ln>
-        </p:spPr>
-        <p:style>
-          <a:lnRef idx="1">
-            <a:schemeClr val="accent1"/>
-          </a:lnRef>
-          <a:fillRef idx="3">
-            <a:schemeClr val="accent1"/>
-          </a:fillRef>
-          <a:effectRef idx="2">
-            <a:schemeClr val="accent1"/>
-          </a:effectRef>
-          <a:fontRef idx="minor">
-            <a:schemeClr val="lt1"/>
-          </a:fontRef>
-        </p:style>
-        <p:txBody>
-          <a:bodyPr rtlCol="0" anchor="ctr"/>
-          <a:lstStyle/>
-          <a:p>
-            <a:pPr algn="ctr"/>
-          </a:p>
-        </p:txBody>
-      </p:sp>
-      <p:sp>
-        <p:nvSpPr>
-          <p:cNvPr id="23" name="TextBox 22"/>
-          <p:cNvSpPr txBox="1"/>
-          <p:nvPr/>
-        </p:nvSpPr>
-        <p:spPr>
-          <a:xfrm>
-            <a:off x="4809744" y="2743200"/>
-            <a:ext cx="310896" cy="256032"/>
-          </a:xfrm>
-          <a:prstGeom prst="rect">
-            <a:avLst/>
-          </a:prstGeom>
-          <a:noFill/>
-        </p:spPr>
-        <p:txBody>
-          <a:bodyPr wrap="square" anchor="ctr" lIns="0" rIns="0" tIns="0" bIns="0">
-            <a:spAutoFit/>
-          </a:bodyPr>
-          <a:lstStyle/>
-          <a:p>
-            <a:pPr algn="ctr">
-              <a:lnSpc>
-                <a:spcPct val="100000"/>
-              </a:lnSpc>
-              <a:spcBef>
-                <a:spcPts val="0"/>
-              </a:spcBef>
-              <a:spcAft>
-                <a:spcPts val="0"/>
-              </a:spcAft>
-            </a:pPr>
-            <a:r>
-              <a:rPr sz="1100" b="1">
-                <a:solidFill>
-                  <a:srgbClr val="FFFFFF"/>
-                </a:solidFill>
-                <a:latin typeface="Arial"/>
-              </a:rPr>
-              <a:t>3</a:t>
-            </a:r>
-          </a:p>
-        </p:txBody>
-      </p:sp>
-      <p:sp>
-        <p:nvSpPr>
-          <p:cNvPr id="24" name="TextBox 23"/>
-          <p:cNvSpPr txBox="1"/>
-          <p:nvPr/>
-        </p:nvSpPr>
-        <p:spPr>
-          <a:xfrm>
-            <a:off x="5230368" y="2688336"/>
-            <a:ext cx="6217920" cy="310896"/>
-          </a:xfrm>
-          <a:prstGeom prst="rect">
-            <a:avLst/>
-          </a:prstGeom>
-          <a:noFill/>
-        </p:spPr>
-        <p:txBody>
-          <a:bodyPr wrap="square" anchor="t" lIns="0" rIns="0" tIns="0" bIns="0">
-            <a:spAutoFit/>
-          </a:bodyPr>
-          <a:lstStyle/>
-          <a:p>
-            <a:pPr algn="l">
-              <a:lnSpc>
-                <a:spcPct val="100000"/>
-              </a:lnSpc>
-              <a:spcBef>
-                <a:spcPts val="0"/>
-              </a:spcBef>
-              <a:spcAft>
-                <a:spcPts val="0"/>
-              </a:spcAft>
-            </a:pPr>
-            <a:r>
-              <a:rPr sz="1180" b="1">
-                <a:solidFill>
-                  <a:srgbClr val="21172F"/>
-                </a:solidFill>
-                <a:latin typeface="Arial"/>
-              </a:rPr>
-              <a:t>Добавьте фото</a:t>
-            </a:r>
-          </a:p>
-        </p:txBody>
-      </p:sp>
-      <p:sp>
-        <p:nvSpPr>
-          <p:cNvPr id="25" name="TextBox 24"/>
-          <p:cNvSpPr txBox="1"/>
-          <p:nvPr/>
-        </p:nvSpPr>
-        <p:spPr>
-          <a:xfrm>
-            <a:off x="5230368" y="3008376"/>
-            <a:ext cx="6217920" cy="1033271"/>
-          </a:xfrm>
-          <a:prstGeom prst="rect">
-            <a:avLst/>
-          </a:prstGeom>
-          <a:noFill/>
-        </p:spPr>
-        <p:txBody>
-          <a:bodyPr wrap="square" anchor="t" lIns="0" rIns="0" tIns="0" bIns="0">
-            <a:spAutoFit/>
-          </a:bodyPr>
-          <a:lstStyle/>
-          <a:p>
-            <a:pPr algn="l">
-              <a:lnSpc>
-                <a:spcPct val="100000"/>
-              </a:lnSpc>
-              <a:spcBef>
-                <a:spcPts val="0"/>
-              </a:spcBef>
-              <a:spcAft>
-                <a:spcPts val="0"/>
-              </a:spcAft>
-            </a:pPr>
-            <a:r>
-              <a:rPr sz="1000" b="0">
-                <a:solidFill>
-                  <a:srgbClr val="6E687D"/>
-                </a:solidFill>
-                <a:latin typeface="Arial"/>
-              </a:rPr>
-              <a:t>Поддерживаются JPEG, PNG и WebP.</a:t>
-            </a:r>
-          </a:p>
-        </p:txBody>
-      </p:sp>
-      <p:sp>
-        <p:nvSpPr>
-          <p:cNvPr id="26" name="Rectangle 25"/>
-          <p:cNvSpPr/>
-          <p:nvPr/>
-        </p:nvSpPr>
-        <p:spPr>
-          <a:xfrm>
-            <a:off x="4645152" y="4315968"/>
-            <a:ext cx="6949440" cy="877824"/>
-          </a:xfrm>
-          <a:prstGeom prst="rect">
-            <a:avLst/>
-          </a:prstGeom>
-          <a:solidFill>
-            <a:srgbClr val="E1F6F3"/>
-          </a:solidFill>
-          <a:ln>
-            <a:noFill/>
-          </a:ln>
-        </p:spPr>
-        <p:style>
-          <a:lnRef idx="1">
-            <a:schemeClr val="accent1"/>
-          </a:lnRef>
-          <a:fillRef idx="3">
-            <a:schemeClr val="accent1"/>
-          </a:fillRef>
-          <a:effectRef idx="2">
-            <a:schemeClr val="accent1"/>
-          </a:effectRef>
-          <a:fontRef idx="minor">
-            <a:schemeClr val="lt1"/>
-          </a:fontRef>
-        </p:style>
-        <p:txBody>
-          <a:bodyPr rtlCol="0" anchor="ctr"/>
-          <a:lstStyle/>
-          <a:p>
-            <a:pPr algn="ctr"/>
-          </a:p>
-        </p:txBody>
-      </p:sp>
-      <p:sp>
-        <p:nvSpPr>
-          <p:cNvPr id="27" name="Rectangle 26"/>
-          <p:cNvSpPr/>
-          <p:nvPr/>
-        </p:nvSpPr>
-        <p:spPr>
-          <a:xfrm>
-            <a:off x="4645152" y="4315968"/>
-            <a:ext cx="54864" cy="877824"/>
-          </a:xfrm>
-          <a:prstGeom prst="rect">
-            <a:avLst/>
-          </a:prstGeom>
-          <a:solidFill>
-            <a:srgbClr val="149B91"/>
-          </a:solidFill>
-          <a:ln>
-            <a:noFill/>
-          </a:ln>
-        </p:spPr>
-        <p:style>
-          <a:lnRef idx="1">
-            <a:schemeClr val="accent1"/>
-          </a:lnRef>
-          <a:fillRef idx="3">
-            <a:schemeClr val="accent1"/>
-          </a:fillRef>
-          <a:effectRef idx="2">
-            <a:schemeClr val="accent1"/>
-          </a:effectRef>
-          <a:fontRef idx="minor">
-            <a:schemeClr val="lt1"/>
-          </a:fontRef>
-        </p:style>
-        <p:txBody>
-          <a:bodyPr rtlCol="0" anchor="ctr"/>
-          <a:lstStyle/>
-          <a:p>
-            <a:pPr algn="ctr"/>
-          </a:p>
-        </p:txBody>
-      </p:sp>
-      <p:sp>
-        <p:nvSpPr>
-          <p:cNvPr id="28" name="TextBox 27"/>
-          <p:cNvSpPr txBox="1"/>
-          <p:nvPr/>
-        </p:nvSpPr>
-        <p:spPr>
-          <a:xfrm>
-            <a:off x="4846320" y="4425696"/>
-            <a:ext cx="6620255" cy="219456"/>
-          </a:xfrm>
-          <a:prstGeom prst="rect">
-            <a:avLst/>
-          </a:prstGeom>
-          <a:noFill/>
-        </p:spPr>
-        <p:txBody>
-          <a:bodyPr wrap="square" anchor="t" lIns="0" rIns="0" tIns="0" bIns="0">
-            <a:spAutoFit/>
-          </a:bodyPr>
-          <a:lstStyle/>
-          <a:p>
-            <a:pPr algn="l">
-              <a:lnSpc>
-                <a:spcPct val="100000"/>
-              </a:lnSpc>
-              <a:spcBef>
-                <a:spcPts val="0"/>
-              </a:spcBef>
-              <a:spcAft>
-                <a:spcPts val="0"/>
-              </a:spcAft>
-            </a:pPr>
-            <a:r>
-              <a:rPr sz="1150" b="1">
-                <a:solidFill>
-                  <a:srgbClr val="21172F"/>
-                </a:solidFill>
-                <a:latin typeface="Arial"/>
-              </a:rPr>
-              <a:t>Проверка результата</a:t>
-            </a:r>
-          </a:p>
-        </p:txBody>
-      </p:sp>
-      <p:sp>
-        <p:nvSpPr>
-          <p:cNvPr id="29" name="TextBox 28"/>
-          <p:cNvSpPr txBox="1"/>
-          <p:nvPr/>
-        </p:nvSpPr>
-        <p:spPr>
-          <a:xfrm>
-            <a:off x="4846320" y="4681728"/>
-            <a:ext cx="6620255" cy="402336"/>
-          </a:xfrm>
-          <a:prstGeom prst="rect">
-            <a:avLst/>
-          </a:prstGeom>
-          <a:noFill/>
-        </p:spPr>
-        <p:txBody>
-          <a:bodyPr wrap="square" anchor="t" lIns="0" rIns="0" tIns="0" bIns="0">
-            <a:spAutoFit/>
-          </a:bodyPr>
-          <a:lstStyle/>
-          <a:p>
-            <a:pPr algn="l">
-              <a:lnSpc>
-                <a:spcPct val="100000"/>
-              </a:lnSpc>
-              <a:spcBef>
-                <a:spcPts val="0"/>
-              </a:spcBef>
-              <a:spcAft>
-                <a:spcPts val="0"/>
-              </a:spcAft>
-            </a:pPr>
-            <a:r>
-              <a:rPr sz="1000" b="0">
-                <a:solidFill>
-                  <a:srgbClr val="6E687D"/>
-                </a:solidFill>
-                <a:latin typeface="Arial"/>
-              </a:rPr>
-              <a:t>Черновик сохраняется автоматически до финальной отправки.</a:t>
-            </a:r>
-          </a:p>
-        </p:txBody>
-      </p:sp>
-      <p:sp>
-        <p:nvSpPr>
-          <p:cNvPr id="30" name="Rectangle 29"/>
-          <p:cNvSpPr/>
-          <p:nvPr/>
-        </p:nvSpPr>
-        <p:spPr>
-          <a:xfrm>
-            <a:off x="4645152" y="5413248"/>
-            <a:ext cx="6949440" cy="603504"/>
-          </a:xfrm>
-          <a:prstGeom prst="rect">
-            <a:avLst/>
-          </a:prstGeom>
-          <a:solidFill>
-            <a:srgbClr val="FFF5C9"/>
-          </a:solidFill>
-          <a:ln>
-            <a:noFill/>
-          </a:ln>
-        </p:spPr>
-        <p:style>
-          <a:lnRef idx="1">
-            <a:schemeClr val="accent1"/>
-          </a:lnRef>
-          <a:fillRef idx="3">
-            <a:schemeClr val="accent1"/>
-          </a:fillRef>
-          <a:effectRef idx="2">
-            <a:schemeClr val="accent1"/>
-          </a:effectRef>
-          <a:fontRef idx="minor">
-            <a:schemeClr val="lt1"/>
-          </a:fontRef>
-        </p:style>
-        <p:txBody>
-          <a:bodyPr rtlCol="0" anchor="ctr"/>
-          <a:lstStyle/>
-          <a:p>
-            <a:pPr algn="ctr"/>
-          </a:p>
-        </p:txBody>
-      </p:sp>
-      <p:sp>
-        <p:nvSpPr>
-          <p:cNvPr id="31" name="TextBox 30"/>
-          <p:cNvSpPr txBox="1"/>
-          <p:nvPr/>
-        </p:nvSpPr>
-        <p:spPr>
-          <a:xfrm>
-            <a:off x="4809744" y="5559552"/>
-            <a:ext cx="6620255" cy="292608"/>
-          </a:xfrm>
-          <a:prstGeom prst="rect">
-            <a:avLst/>
-          </a:prstGeom>
-          <a:noFill/>
-        </p:spPr>
-        <p:txBody>
-          <a:bodyPr wrap="square" anchor="t" lIns="0" rIns="0" tIns="0" bIns="0">
-            <a:spAutoFit/>
-          </a:bodyPr>
-          <a:lstStyle/>
-          <a:p>
-            <a:pPr algn="l">
-              <a:lnSpc>
-                <a:spcPct val="100000"/>
-              </a:lnSpc>
-              <a:spcBef>
-                <a:spcPts val="0"/>
-              </a:spcBef>
-              <a:spcAft>
-                <a:spcPts val="0"/>
-              </a:spcAft>
-            </a:pPr>
-            <a:r>
-              <a:rPr sz="919" b="0">
-                <a:solidFill>
-                  <a:srgbClr val="6E687D"/>
-                </a:solidFill>
-                <a:latin typeface="Arial"/>
-              </a:rPr>
-              <a:t>Курсор и номер показывают единственное действие этого кадра.</a:t>
-            </a:r>
-          </a:p>
-        </p:txBody>
-      </p:sp>
-      <p:sp>
-        <p:nvSpPr>
-          <p:cNvPr id="32" name="Rectangle 31"/>
           <p:cNvSpPr/>
           <p:nvPr/>
         </p:nvSpPr>
@@ -10203,7 +10206,7 @@
       </p:sp>
       <p:sp>
         <p:nvSpPr>
-          <p:cNvPr id="33" name="TextBox 32"/>
+          <p:cNvPr id="21" name="TextBox 20"/>
           <p:cNvSpPr txBox="1"/>
           <p:nvPr/>
         </p:nvSpPr>
@@ -10490,7 +10493,7 @@
                 </a:solidFill>
                 <a:latin typeface="Arial"/>
               </a:rPr>
-              <a:t>Добавление эмодзи</a:t>
+              <a:t>Текст новости и изображение</a:t>
             </a:r>
           </a:p>
         </p:txBody>
@@ -10668,7 +10671,7 @@
                 </a:solidFill>
                 <a:latin typeface="Arial"/>
               </a:rPr>
-              <a:t>Рассылки -&gt; Новость -&gt; кнопка эмодзи</a:t>
+              <a:t>Рассылки -&gt; Новость</a:t>
             </a:r>
           </a:p>
         </p:txBody>
@@ -10822,8 +10825,8 @@
         </p:blipFill>
         <p:spPr>
           <a:xfrm>
-            <a:off x="1570002" y="2432303"/>
-            <a:ext cx="1742891" cy="3767327"/>
+            <a:off x="1513886" y="2432303"/>
+            <a:ext cx="1855123" cy="3767327"/>
           </a:xfrm>
           <a:prstGeom prst="rect">
             <a:avLst/>
@@ -10838,7 +10841,7 @@
         </p:nvSpPr>
         <p:spPr>
           <a:xfrm>
-            <a:off x="2212848" y="3936674"/>
+            <a:off x="2212848" y="3145535"/>
             <a:ext cx="457200" cy="457200"/>
           </a:xfrm>
           <a:prstGeom prst="ellipse">
@@ -10881,7 +10884,7 @@
         </p:nvSpPr>
         <p:spPr>
           <a:xfrm>
-            <a:off x="2276856" y="4000682"/>
+            <a:off x="2276856" y="3209543"/>
             <a:ext cx="329184" cy="329184"/>
           </a:xfrm>
           <a:prstGeom prst="ellipse">
@@ -10933,7 +10936,7 @@
         </p:nvSpPr>
         <p:spPr>
           <a:xfrm rot="18900000">
-            <a:off x="2532888" y="4275002"/>
+            <a:off x="2532888" y="3483863"/>
             <a:ext cx="256032" cy="365760"/>
           </a:xfrm>
           <a:prstGeom prst="upArrow">
@@ -11274,7 +11277,7 @@
                 </a:solidFill>
                 <a:latin typeface="Arial"/>
               </a:rPr>
-              <a:t>Откройте набор</a:t>
+              <a:t>Введите заголовок</a:t>
             </a:r>
           </a:p>
         </p:txBody>
@@ -11319,7 +11322,7 @@
                 </a:solidFill>
                 <a:latin typeface="Arial"/>
               </a:rPr>
-              <a:t>Кнопка показывает доступные эмодзи.</a:t>
+              <a:t>Он должен кратко объяснять тему.</a:t>
             </a:r>
           </a:p>
         </p:txBody>
@@ -11920,7 +11923,7 @@
                 </a:solidFill>
                 <a:latin typeface="Arial"/>
               </a:rPr>
-              <a:t>Добавление эмодзи</a:t>
+              <a:t>Текст новости и изображение</a:t>
             </a:r>
           </a:p>
         </p:txBody>
@@ -12098,7 +12101,7 @@
                 </a:solidFill>
                 <a:latin typeface="Arial"/>
               </a:rPr>
-              <a:t>Рассылки -&gt; Новость -&gt; кнопка эмодзи</a:t>
+              <a:t>Рассылки -&gt; Новость</a:t>
             </a:r>
           </a:p>
         </p:txBody>
@@ -12252,8 +12255,8 @@
         </p:blipFill>
         <p:spPr>
           <a:xfrm>
-            <a:off x="1570002" y="2432303"/>
-            <a:ext cx="1742891" cy="3767327"/>
+            <a:off x="1513886" y="2432303"/>
+            <a:ext cx="1855123" cy="3767327"/>
           </a:xfrm>
           <a:prstGeom prst="rect">
             <a:avLst/>
@@ -12268,7 +12271,7 @@
         </p:nvSpPr>
         <p:spPr>
           <a:xfrm>
-            <a:off x="2212848" y="4539447"/>
+            <a:off x="2212848" y="4012021"/>
             <a:ext cx="457200" cy="457200"/>
           </a:xfrm>
           <a:prstGeom prst="ellipse">
@@ -12311,7 +12314,7 @@
         </p:nvSpPr>
         <p:spPr>
           <a:xfrm>
-            <a:off x="2276856" y="4603455"/>
+            <a:off x="2276856" y="4076029"/>
             <a:ext cx="329184" cy="329184"/>
           </a:xfrm>
           <a:prstGeom prst="ellipse">
@@ -12363,7 +12366,7 @@
         </p:nvSpPr>
         <p:spPr>
           <a:xfrm rot="18900000">
-            <a:off x="2532888" y="4877775"/>
+            <a:off x="2532888" y="4350349"/>
             <a:ext cx="256032" cy="365760"/>
           </a:xfrm>
           <a:prstGeom prst="upArrow">
@@ -12704,7 +12707,7 @@
                 </a:solidFill>
                 <a:latin typeface="Arial"/>
               </a:rPr>
-              <a:t>Выберите символ</a:t>
+              <a:t>Напишите сообщение</a:t>
             </a:r>
           </a:p>
         </p:txBody>
@@ -12749,7 +12752,7 @@
                 </a:solidFill>
                 <a:latin typeface="Arial"/>
               </a:rPr>
-              <a:t>Он вставится в позицию курсора.</a:t>
+              <a:t>Укажите дату, место и действие получателя.</a:t>
             </a:r>
           </a:p>
         </p:txBody>
@@ -13350,7 +13353,7 @@
                 </a:solidFill>
                 <a:latin typeface="Arial"/>
               </a:rPr>
-              <a:t>Добавление эмодзи</a:t>
+              <a:t>Текст новости и изображение</a:t>
             </a:r>
           </a:p>
         </p:txBody>
@@ -13528,7 +13531,7 @@
                 </a:solidFill>
                 <a:latin typeface="Arial"/>
               </a:rPr>
-              <a:t>Рассылки -&gt; Новость -&gt; кнопка эмодзи</a:t>
+              <a:t>Рассылки -&gt; Новость</a:t>
             </a:r>
           </a:p>
         </p:txBody>
@@ -13682,8 +13685,8 @@
         </p:blipFill>
         <p:spPr>
           <a:xfrm>
-            <a:off x="1570002" y="2432303"/>
-            <a:ext cx="1742891" cy="3767327"/>
+            <a:off x="1513886" y="2432303"/>
+            <a:ext cx="1855123" cy="3767327"/>
           </a:xfrm>
           <a:prstGeom prst="rect">
             <a:avLst/>
@@ -13698,7 +13701,7 @@
         </p:nvSpPr>
         <p:spPr>
           <a:xfrm>
-            <a:off x="2212848" y="5142219"/>
+            <a:off x="2212848" y="5066873"/>
             <a:ext cx="457200" cy="457200"/>
           </a:xfrm>
           <a:prstGeom prst="ellipse">
@@ -13741,7 +13744,7 @@
         </p:nvSpPr>
         <p:spPr>
           <a:xfrm>
-            <a:off x="2276856" y="5206227"/>
+            <a:off x="2276856" y="5130881"/>
             <a:ext cx="329184" cy="329184"/>
           </a:xfrm>
           <a:prstGeom prst="ellipse">
@@ -13793,7 +13796,7 @@
         </p:nvSpPr>
         <p:spPr>
           <a:xfrm rot="18900000">
-            <a:off x="2532888" y="5480547"/>
+            <a:off x="2532888" y="5405201"/>
             <a:ext cx="256032" cy="365760"/>
           </a:xfrm>
           <a:prstGeom prst="upArrow">
@@ -14134,7 +14137,7 @@
                 </a:solidFill>
                 <a:latin typeface="Arial"/>
               </a:rPr>
-              <a:t>Закройте набор</a:t>
+              <a:t>Добавьте фото</a:t>
             </a:r>
           </a:p>
         </p:txBody>
@@ -14179,7 +14182,7 @@
                 </a:solidFill>
                 <a:latin typeface="Arial"/>
               </a:rPr>
-              <a:t>Текст сообщения сохранится.</a:t>
+              <a:t>Поддерживаются JPEG, PNG и WebP.</a:t>
             </a:r>
           </a:p>
         </p:txBody>
@@ -14355,7 +14358,7 @@
                 </a:solidFill>
                 <a:latin typeface="Arial"/>
               </a:rPr>
-              <a:t>Не требуется системная клавиатура: эмодзи доступны внутри редактора.</a:t>
+              <a:t>Черновик сохраняется автоматически до финальной отправки.</a:t>
             </a:r>
           </a:p>
         </p:txBody>
@@ -14780,7 +14783,7 @@
                 </a:solidFill>
                 <a:latin typeface="Arial"/>
               </a:rPr>
-              <a:t>Финальная проверка</a:t>
+              <a:t>Добавление эмодзи</a:t>
             </a:r>
           </a:p>
         </p:txBody>
@@ -14958,7 +14961,7 @@
                 </a:solidFill>
                 <a:latin typeface="Arial"/>
               </a:rPr>
-              <a:t>Рассылки -&gt; Проверка</a:t>
+              <a:t>Рассылки -&gt; Новость -&gt; кнопка эмодзи</a:t>
             </a:r>
           </a:p>
         </p:txBody>
@@ -15112,8 +15115,8 @@
         </p:blipFill>
         <p:spPr>
           <a:xfrm>
-            <a:off x="1318162" y="2432303"/>
-            <a:ext cx="2246571" cy="3767327"/>
+            <a:off x="1570002" y="2432303"/>
+            <a:ext cx="1742891" cy="3767327"/>
           </a:xfrm>
           <a:prstGeom prst="rect">
             <a:avLst/>
@@ -15128,7 +15131,7 @@
         </p:nvSpPr>
         <p:spPr>
           <a:xfrm>
-            <a:off x="2212848" y="3107862"/>
+            <a:off x="2212848" y="3936674"/>
             <a:ext cx="457200" cy="457200"/>
           </a:xfrm>
           <a:prstGeom prst="ellipse">
@@ -15171,7 +15174,7 @@
         </p:nvSpPr>
         <p:spPr>
           <a:xfrm>
-            <a:off x="2276856" y="3171870"/>
+            <a:off x="2276856" y="4000682"/>
             <a:ext cx="329184" cy="329184"/>
           </a:xfrm>
           <a:prstGeom prst="ellipse">
@@ -15223,7 +15226,7 @@
         </p:nvSpPr>
         <p:spPr>
           <a:xfrm rot="18900000">
-            <a:off x="2532888" y="3446190"/>
+            <a:off x="2532888" y="4275002"/>
             <a:ext cx="256032" cy="365760"/>
           </a:xfrm>
           <a:prstGeom prst="upArrow">
@@ -15564,7 +15567,7 @@
                 </a:solidFill>
                 <a:latin typeface="Arial"/>
               </a:rPr>
-              <a:t>Сверьте аудиторию</a:t>
+              <a:t>Откройте набор</a:t>
             </a:r>
           </a:p>
         </p:txBody>
@@ -15609,7 +15612,7 @@
                 </a:solidFill>
                 <a:latin typeface="Arial"/>
               </a:rPr>
-              <a:t>Проверьте роли, площадки, группы и количество.</a:t>
+              <a:t>Кнопка показывает доступные эмодзи.</a:t>
             </a:r>
           </a:p>
         </p:txBody>
@@ -16210,7 +16213,7 @@
                 </a:solidFill>
                 <a:latin typeface="Arial"/>
               </a:rPr>
-              <a:t>Финальная проверка</a:t>
+              <a:t>Добавление эмодзи</a:t>
             </a:r>
           </a:p>
         </p:txBody>
@@ -16388,7 +16391,7 @@
                 </a:solidFill>
                 <a:latin typeface="Arial"/>
               </a:rPr>
-              <a:t>Рассылки -&gt; Проверка</a:t>
+              <a:t>Рассылки -&gt; Новость -&gt; кнопка эмодзи</a:t>
             </a:r>
           </a:p>
         </p:txBody>
@@ -16542,8 +16545,8 @@
         </p:blipFill>
         <p:spPr>
           <a:xfrm>
-            <a:off x="1318162" y="2432303"/>
-            <a:ext cx="2246571" cy="3767327"/>
+            <a:off x="1570002" y="2432303"/>
+            <a:ext cx="1742891" cy="3767327"/>
           </a:xfrm>
           <a:prstGeom prst="rect">
             <a:avLst/>
@@ -16558,7 +16561,7 @@
         </p:nvSpPr>
         <p:spPr>
           <a:xfrm>
-            <a:off x="2212848" y="4162714"/>
+            <a:off x="2212848" y="4539447"/>
             <a:ext cx="457200" cy="457200"/>
           </a:xfrm>
           <a:prstGeom prst="ellipse">
@@ -16601,7 +16604,7 @@
         </p:nvSpPr>
         <p:spPr>
           <a:xfrm>
-            <a:off x="2276856" y="4226722"/>
+            <a:off x="2276856" y="4603455"/>
             <a:ext cx="329184" cy="329184"/>
           </a:xfrm>
           <a:prstGeom prst="ellipse">
@@ -16653,7 +16656,7 @@
         </p:nvSpPr>
         <p:spPr>
           <a:xfrm rot="18900000">
-            <a:off x="2532888" y="4501042"/>
+            <a:off x="2532888" y="4877775"/>
             <a:ext cx="256032" cy="365760"/>
           </a:xfrm>
           <a:prstGeom prst="upArrow">
@@ -16994,7 +16997,7 @@
                 </a:solidFill>
                 <a:latin typeface="Arial"/>
               </a:rPr>
-              <a:t>Сверьте сообщение</a:t>
+              <a:t>Выберите символ</a:t>
             </a:r>
           </a:p>
         </p:txBody>
@@ -17039,7 +17042,7 @@
                 </a:solidFill>
                 <a:latin typeface="Arial"/>
               </a:rPr>
-              <a:t>Проверьте текст, ссылку и изображение.</a:t>
+              <a:t>Он вставится в позицию курсора.</a:t>
             </a:r>
           </a:p>
         </p:txBody>
@@ -19070,7 +19073,7 @@
                 </a:solidFill>
                 <a:latin typeface="Arial"/>
               </a:rPr>
-              <a:t>Финальная проверка</a:t>
+              <a:t>Добавление эмодзи</a:t>
             </a:r>
           </a:p>
         </p:txBody>
@@ -19248,7 +19251,7 @@
                 </a:solidFill>
                 <a:latin typeface="Arial"/>
               </a:rPr>
-              <a:t>Рассылки -&gt; Проверка</a:t>
+              <a:t>Рассылки -&gt; Новость -&gt; кнопка эмодзи</a:t>
             </a:r>
           </a:p>
         </p:txBody>
@@ -19402,8 +19405,8 @@
         </p:blipFill>
         <p:spPr>
           <a:xfrm>
-            <a:off x="1318162" y="2432303"/>
-            <a:ext cx="2246571" cy="3767327"/>
+            <a:off x="1570002" y="2432303"/>
+            <a:ext cx="1742891" cy="3767327"/>
           </a:xfrm>
           <a:prstGeom prst="rect">
             <a:avLst/>
@@ -19418,7 +19421,7 @@
         </p:nvSpPr>
         <p:spPr>
           <a:xfrm>
-            <a:off x="2212848" y="5217566"/>
+            <a:off x="2212848" y="5142219"/>
             <a:ext cx="457200" cy="457200"/>
           </a:xfrm>
           <a:prstGeom prst="ellipse">
@@ -19461,7 +19464,7 @@
         </p:nvSpPr>
         <p:spPr>
           <a:xfrm>
-            <a:off x="2276856" y="5281574"/>
+            <a:off x="2276856" y="5206227"/>
             <a:ext cx="329184" cy="329184"/>
           </a:xfrm>
           <a:prstGeom prst="ellipse">
@@ -19513,7 +19516,7 @@
         </p:nvSpPr>
         <p:spPr>
           <a:xfrm rot="18900000">
-            <a:off x="2532888" y="5555894"/>
+            <a:off x="2532888" y="5480547"/>
             <a:ext cx="256032" cy="365760"/>
           </a:xfrm>
           <a:prstGeom prst="upArrow">
@@ -19854,7 +19857,7 @@
                 </a:solidFill>
                 <a:latin typeface="Arial"/>
               </a:rPr>
-              <a:t>Отправьте один раз</a:t>
+              <a:t>Закройте набор</a:t>
             </a:r>
           </a:p>
         </p:txBody>
@@ -19899,7 +19902,7 @@
                 </a:solidFill>
                 <a:latin typeface="Arial"/>
               </a:rPr>
-              <a:t>Дождитесь итоговой статистики.</a:t>
+              <a:t>Текст сообщения сохранится.</a:t>
             </a:r>
           </a:p>
         </p:txBody>
@@ -20075,7 +20078,7 @@
                 </a:solidFill>
                 <a:latin typeface="Arial"/>
               </a:rPr>
-              <a:t>После отправки текст не редактируется; исправление отправляется новой рассылкой.</a:t>
+              <a:t>Не требуется системная клавиатура: эмодзи доступны внутри редактора.</a:t>
             </a:r>
           </a:p>
         </p:txBody>
@@ -20265,6 +20268,4296 @@
 </file>
 
 <file path=ppt/slides/slide21.xml><?xml version="1.0" encoding="utf-8"?>
+<p:sld xmlns:a="http://schemas.openxmlformats.org/drawingml/2006/main" xmlns:p="http://schemas.openxmlformats.org/presentationml/2006/main" xmlns:r="http://schemas.openxmlformats.org/officeDocument/2006/relationships">
+  <p:cSld>
+    <p:bg>
+      <p:bgPr>
+        <a:solidFill>
+          <a:srgbClr val="F7F6FA"/>
+        </a:solidFill>
+        <a:effectLst/>
+      </p:bgPr>
+    </p:bg>
+    <p:spTree>
+      <p:nvGrpSpPr>
+        <p:cNvPr id="1" name=""/>
+        <p:cNvGrpSpPr/>
+        <p:nvPr/>
+      </p:nvGrpSpPr>
+      <p:grpSpPr/>
+      <p:sp>
+        <p:nvSpPr>
+          <p:cNvPr id="2" name="Rounded Rectangle 1"/>
+          <p:cNvSpPr/>
+          <p:nvPr/>
+        </p:nvSpPr>
+        <p:spPr>
+          <a:xfrm>
+            <a:off x="411480" y="274320"/>
+            <a:ext cx="384048" cy="384048"/>
+          </a:xfrm>
+          <a:prstGeom prst="roundRect">
+            <a:avLst/>
+          </a:prstGeom>
+          <a:solidFill>
+            <a:srgbClr val="6F35D4"/>
+          </a:solidFill>
+          <a:ln>
+            <a:noFill/>
+          </a:ln>
+        </p:spPr>
+        <p:style>
+          <a:lnRef idx="1">
+            <a:schemeClr val="accent1"/>
+          </a:lnRef>
+          <a:fillRef idx="3">
+            <a:schemeClr val="accent1"/>
+          </a:fillRef>
+          <a:effectRef idx="2">
+            <a:schemeClr val="accent1"/>
+          </a:effectRef>
+          <a:fontRef idx="minor">
+            <a:schemeClr val="lt1"/>
+          </a:fontRef>
+        </p:style>
+        <p:txBody>
+          <a:bodyPr rtlCol="0" anchor="ctr"/>
+          <a:lstStyle/>
+          <a:p>
+            <a:pPr algn="ctr"/>
+          </a:p>
+        </p:txBody>
+      </p:sp>
+      <p:sp>
+        <p:nvSpPr>
+          <p:cNvPr id="3" name="TextBox 2"/>
+          <p:cNvSpPr txBox="1"/>
+          <p:nvPr/>
+        </p:nvSpPr>
+        <p:spPr>
+          <a:xfrm>
+            <a:off x="411480" y="283464"/>
+            <a:ext cx="384048" cy="347472"/>
+          </a:xfrm>
+          <a:prstGeom prst="rect">
+            <a:avLst/>
+          </a:prstGeom>
+          <a:noFill/>
+        </p:spPr>
+        <p:txBody>
+          <a:bodyPr wrap="square" anchor="ctr" lIns="0" rIns="0" tIns="0" bIns="0">
+            <a:spAutoFit/>
+          </a:bodyPr>
+          <a:lstStyle/>
+          <a:p>
+            <a:pPr algn="ctr">
+              <a:lnSpc>
+                <a:spcPct val="100000"/>
+              </a:lnSpc>
+              <a:spcBef>
+                <a:spcPts val="0"/>
+              </a:spcBef>
+              <a:spcAft>
+                <a:spcPts val="0"/>
+              </a:spcAft>
+            </a:pPr>
+            <a:r>
+              <a:rPr sz="1600" b="1">
+                <a:solidFill>
+                  <a:srgbClr val="FFFFFF"/>
+                </a:solidFill>
+                <a:latin typeface="Arial"/>
+              </a:rPr>
+              <a:t>A</a:t>
+            </a:r>
+          </a:p>
+        </p:txBody>
+      </p:sp>
+      <p:sp>
+        <p:nvSpPr>
+          <p:cNvPr id="4" name="TextBox 3"/>
+          <p:cNvSpPr txBox="1"/>
+          <p:nvPr/>
+        </p:nvSpPr>
+        <p:spPr>
+          <a:xfrm>
+            <a:off x="896112" y="301752"/>
+            <a:ext cx="1508760" cy="292608"/>
+          </a:xfrm>
+          <a:prstGeom prst="rect">
+            <a:avLst/>
+          </a:prstGeom>
+          <a:noFill/>
+        </p:spPr>
+        <p:txBody>
+          <a:bodyPr wrap="square" anchor="t" lIns="0" rIns="0" tIns="0" bIns="0">
+            <a:spAutoFit/>
+          </a:bodyPr>
+          <a:lstStyle/>
+          <a:p>
+            <a:pPr algn="l">
+              <a:lnSpc>
+                <a:spcPct val="100000"/>
+              </a:lnSpc>
+              <a:spcBef>
+                <a:spcPts val="0"/>
+              </a:spcBef>
+              <a:spcAft>
+                <a:spcPts val="0"/>
+              </a:spcAft>
+            </a:pPr>
+            <a:r>
+              <a:rPr sz="1700" b="1">
+                <a:solidFill>
+                  <a:srgbClr val="21172F"/>
+                </a:solidFill>
+                <a:latin typeface="Arial"/>
+              </a:rPr>
+              <a:t>Algo MAX</a:t>
+            </a:r>
+          </a:p>
+        </p:txBody>
+      </p:sp>
+      <p:sp>
+        <p:nvSpPr>
+          <p:cNvPr id="5" name="TextBox 4"/>
+          <p:cNvSpPr txBox="1"/>
+          <p:nvPr/>
+        </p:nvSpPr>
+        <p:spPr>
+          <a:xfrm>
+            <a:off x="438912" y="896112"/>
+            <a:ext cx="3657600" cy="219456"/>
+          </a:xfrm>
+          <a:prstGeom prst="rect">
+            <a:avLst/>
+          </a:prstGeom>
+          <a:noFill/>
+        </p:spPr>
+        <p:txBody>
+          <a:bodyPr wrap="square" anchor="t" lIns="0" rIns="0" tIns="0" bIns="0">
+            <a:spAutoFit/>
+          </a:bodyPr>
+          <a:lstStyle/>
+          <a:p>
+            <a:pPr algn="l">
+              <a:lnSpc>
+                <a:spcPct val="100000"/>
+              </a:lnSpc>
+              <a:spcBef>
+                <a:spcPts val="0"/>
+              </a:spcBef>
+              <a:spcAft>
+                <a:spcPts val="0"/>
+              </a:spcAft>
+            </a:pPr>
+            <a:r>
+              <a:rPr sz="1000" b="1">
+                <a:solidFill>
+                  <a:srgbClr val="6F35D4"/>
+                </a:solidFill>
+                <a:latin typeface="Arial"/>
+              </a:rPr>
+              <a:t>РАССЫЛКИ</a:t>
+            </a:r>
+          </a:p>
+        </p:txBody>
+      </p:sp>
+      <p:sp>
+        <p:nvSpPr>
+          <p:cNvPr id="6" name="TextBox 5"/>
+          <p:cNvSpPr txBox="1"/>
+          <p:nvPr/>
+        </p:nvSpPr>
+        <p:spPr>
+          <a:xfrm>
+            <a:off x="438912" y="1097280"/>
+            <a:ext cx="11018520" cy="512064"/>
+          </a:xfrm>
+          <a:prstGeom prst="rect">
+            <a:avLst/>
+          </a:prstGeom>
+          <a:noFill/>
+        </p:spPr>
+        <p:txBody>
+          <a:bodyPr wrap="square" anchor="t" lIns="0" rIns="0" tIns="0" bIns="0">
+            <a:spAutoFit/>
+          </a:bodyPr>
+          <a:lstStyle/>
+          <a:p>
+            <a:pPr algn="l">
+              <a:lnSpc>
+                <a:spcPct val="100000"/>
+              </a:lnSpc>
+              <a:spcBef>
+                <a:spcPts val="0"/>
+              </a:spcBef>
+              <a:spcAft>
+                <a:spcPts val="0"/>
+              </a:spcAft>
+            </a:pPr>
+            <a:r>
+              <a:rPr sz="2800" b="1">
+                <a:solidFill>
+                  <a:srgbClr val="21172F"/>
+                </a:solidFill>
+                <a:latin typeface="Arial"/>
+              </a:rPr>
+              <a:t>Финальная проверка</a:t>
+            </a:r>
+          </a:p>
+        </p:txBody>
+      </p:sp>
+      <p:sp>
+        <p:nvSpPr>
+          <p:cNvPr id="7" name="TextBox 6"/>
+          <p:cNvSpPr txBox="1"/>
+          <p:nvPr/>
+        </p:nvSpPr>
+        <p:spPr>
+          <a:xfrm>
+            <a:off x="11137392" y="310896"/>
+            <a:ext cx="548640" cy="256032"/>
+          </a:xfrm>
+          <a:prstGeom prst="rect">
+            <a:avLst/>
+          </a:prstGeom>
+          <a:noFill/>
+        </p:spPr>
+        <p:txBody>
+          <a:bodyPr wrap="square" anchor="t" lIns="0" rIns="0" tIns="0" bIns="0">
+            <a:spAutoFit/>
+          </a:bodyPr>
+          <a:lstStyle/>
+          <a:p>
+            <a:pPr algn="r">
+              <a:lnSpc>
+                <a:spcPct val="100000"/>
+              </a:lnSpc>
+              <a:spcBef>
+                <a:spcPts val="0"/>
+              </a:spcBef>
+              <a:spcAft>
+                <a:spcPts val="0"/>
+              </a:spcAft>
+            </a:pPr>
+            <a:r>
+              <a:rPr sz="1100" b="0">
+                <a:solidFill>
+                  <a:srgbClr val="6E687D"/>
+                </a:solidFill>
+                <a:latin typeface="Arial"/>
+              </a:rPr>
+              <a:t>21</a:t>
+            </a:r>
+          </a:p>
+        </p:txBody>
+      </p:sp>
+      <p:sp>
+        <p:nvSpPr>
+          <p:cNvPr id="8" name="Rectangle 7"/>
+          <p:cNvSpPr/>
+          <p:nvPr/>
+        </p:nvSpPr>
+        <p:spPr>
+          <a:xfrm>
+            <a:off x="438912" y="1645920"/>
+            <a:ext cx="11228832" cy="329184"/>
+          </a:xfrm>
+          <a:prstGeom prst="rect">
+            <a:avLst/>
+          </a:prstGeom>
+          <a:solidFill>
+            <a:srgbClr val="EEE7FF"/>
+          </a:solidFill>
+          <a:ln>
+            <a:noFill/>
+          </a:ln>
+        </p:spPr>
+        <p:style>
+          <a:lnRef idx="1">
+            <a:schemeClr val="accent1"/>
+          </a:lnRef>
+          <a:fillRef idx="3">
+            <a:schemeClr val="accent1"/>
+          </a:fillRef>
+          <a:effectRef idx="2">
+            <a:schemeClr val="accent1"/>
+          </a:effectRef>
+          <a:fontRef idx="minor">
+            <a:schemeClr val="lt1"/>
+          </a:fontRef>
+        </p:style>
+        <p:txBody>
+          <a:bodyPr rtlCol="0" anchor="ctr"/>
+          <a:lstStyle/>
+          <a:p>
+            <a:pPr algn="ctr"/>
+          </a:p>
+        </p:txBody>
+      </p:sp>
+      <p:sp>
+        <p:nvSpPr>
+          <p:cNvPr id="9" name="TextBox 8"/>
+          <p:cNvSpPr txBox="1"/>
+          <p:nvPr/>
+        </p:nvSpPr>
+        <p:spPr>
+          <a:xfrm>
+            <a:off x="603504" y="1746504"/>
+            <a:ext cx="420624" cy="137160"/>
+          </a:xfrm>
+          <a:prstGeom prst="rect">
+            <a:avLst/>
+          </a:prstGeom>
+          <a:noFill/>
+        </p:spPr>
+        <p:txBody>
+          <a:bodyPr wrap="square" anchor="t" lIns="0" rIns="0" tIns="0" bIns="0">
+            <a:spAutoFit/>
+          </a:bodyPr>
+          <a:lstStyle/>
+          <a:p>
+            <a:pPr algn="l">
+              <a:lnSpc>
+                <a:spcPct val="100000"/>
+              </a:lnSpc>
+              <a:spcBef>
+                <a:spcPts val="0"/>
+              </a:spcBef>
+              <a:spcAft>
+                <a:spcPts val="0"/>
+              </a:spcAft>
+            </a:pPr>
+            <a:r>
+              <a:rPr sz="850" b="1">
+                <a:solidFill>
+                  <a:srgbClr val="6F35D4"/>
+                </a:solidFill>
+                <a:latin typeface="Arial"/>
+              </a:rPr>
+              <a:t>ПУТЬ</a:t>
+            </a:r>
+          </a:p>
+        </p:txBody>
+      </p:sp>
+      <p:sp>
+        <p:nvSpPr>
+          <p:cNvPr id="10" name="TextBox 9"/>
+          <p:cNvSpPr txBox="1"/>
+          <p:nvPr/>
+        </p:nvSpPr>
+        <p:spPr>
+          <a:xfrm>
+            <a:off x="1097280" y="1700784"/>
+            <a:ext cx="10287000" cy="201168"/>
+          </a:xfrm>
+          <a:prstGeom prst="rect">
+            <a:avLst/>
+          </a:prstGeom>
+          <a:noFill/>
+        </p:spPr>
+        <p:txBody>
+          <a:bodyPr wrap="square" anchor="t" lIns="0" rIns="0" tIns="0" bIns="0">
+            <a:spAutoFit/>
+          </a:bodyPr>
+          <a:lstStyle/>
+          <a:p>
+            <a:pPr algn="l">
+              <a:lnSpc>
+                <a:spcPct val="100000"/>
+              </a:lnSpc>
+              <a:spcBef>
+                <a:spcPts val="0"/>
+              </a:spcBef>
+              <a:spcAft>
+                <a:spcPts val="0"/>
+              </a:spcAft>
+            </a:pPr>
+            <a:r>
+              <a:rPr sz="1150" b="1">
+                <a:solidFill>
+                  <a:srgbClr val="21172F"/>
+                </a:solidFill>
+                <a:latin typeface="Arial"/>
+              </a:rPr>
+              <a:t>Рассылки -&gt; Проверка</a:t>
+            </a:r>
+          </a:p>
+        </p:txBody>
+      </p:sp>
+      <p:sp>
+        <p:nvSpPr>
+          <p:cNvPr id="11" name="Rectangle 10"/>
+          <p:cNvSpPr/>
+          <p:nvPr/>
+        </p:nvSpPr>
+        <p:spPr>
+          <a:xfrm>
+            <a:off x="530352" y="2066543"/>
+            <a:ext cx="3822191" cy="4206240"/>
+          </a:xfrm>
+          <a:prstGeom prst="rect">
+            <a:avLst/>
+          </a:prstGeom>
+          <a:solidFill>
+            <a:srgbClr val="FFFFFF"/>
+          </a:solidFill>
+          <a:ln w="10160">
+            <a:solidFill>
+              <a:srgbClr val="DED9E8"/>
+            </a:solidFill>
+          </a:ln>
+        </p:spPr>
+        <p:style>
+          <a:lnRef idx="1">
+            <a:schemeClr val="accent1"/>
+          </a:lnRef>
+          <a:fillRef idx="3">
+            <a:schemeClr val="accent1"/>
+          </a:fillRef>
+          <a:effectRef idx="2">
+            <a:schemeClr val="accent1"/>
+          </a:effectRef>
+          <a:fontRef idx="minor">
+            <a:schemeClr val="lt1"/>
+          </a:fontRef>
+        </p:style>
+        <p:txBody>
+          <a:bodyPr rtlCol="0" anchor="ctr"/>
+          <a:lstStyle/>
+          <a:p>
+            <a:pPr algn="ctr"/>
+          </a:p>
+        </p:txBody>
+      </p:sp>
+      <p:sp>
+        <p:nvSpPr>
+          <p:cNvPr id="12" name="Rectangle 11"/>
+          <p:cNvSpPr/>
+          <p:nvPr/>
+        </p:nvSpPr>
+        <p:spPr>
+          <a:xfrm>
+            <a:off x="530352" y="2066543"/>
+            <a:ext cx="3822191" cy="292608"/>
+          </a:xfrm>
+          <a:prstGeom prst="rect">
+            <a:avLst/>
+          </a:prstGeom>
+          <a:solidFill>
+            <a:srgbClr val="3B1F68"/>
+          </a:solidFill>
+          <a:ln>
+            <a:noFill/>
+          </a:ln>
+        </p:spPr>
+        <p:style>
+          <a:lnRef idx="1">
+            <a:schemeClr val="accent1"/>
+          </a:lnRef>
+          <a:fillRef idx="3">
+            <a:schemeClr val="accent1"/>
+          </a:fillRef>
+          <a:effectRef idx="2">
+            <a:schemeClr val="accent1"/>
+          </a:effectRef>
+          <a:fontRef idx="minor">
+            <a:schemeClr val="lt1"/>
+          </a:fontRef>
+        </p:style>
+        <p:txBody>
+          <a:bodyPr rtlCol="0" anchor="ctr"/>
+          <a:lstStyle/>
+          <a:p>
+            <a:pPr algn="ctr"/>
+          </a:p>
+        </p:txBody>
+      </p:sp>
+      <p:sp>
+        <p:nvSpPr>
+          <p:cNvPr id="13" name="TextBox 12"/>
+          <p:cNvSpPr txBox="1"/>
+          <p:nvPr/>
+        </p:nvSpPr>
+        <p:spPr>
+          <a:xfrm>
+            <a:off x="658368" y="2121408"/>
+            <a:ext cx="3566159" cy="182880"/>
+          </a:xfrm>
+          <a:prstGeom prst="rect">
+            <a:avLst/>
+          </a:prstGeom>
+          <a:noFill/>
+        </p:spPr>
+        <p:txBody>
+          <a:bodyPr wrap="square" anchor="t" lIns="0" rIns="0" tIns="0" bIns="0">
+            <a:spAutoFit/>
+          </a:bodyPr>
+          <a:lstStyle/>
+          <a:p>
+            <a:pPr algn="l">
+              <a:lnSpc>
+                <a:spcPct val="100000"/>
+              </a:lnSpc>
+              <a:spcBef>
+                <a:spcPts val="0"/>
+              </a:spcBef>
+              <a:spcAft>
+                <a:spcPts val="0"/>
+              </a:spcAft>
+            </a:pPr>
+            <a:r>
+              <a:rPr sz="950" b="1">
+                <a:solidFill>
+                  <a:srgbClr val="FFFFFF"/>
+                </a:solidFill>
+                <a:latin typeface="Arial"/>
+              </a:rPr>
+              <a:t>Экран на телефоне</a:t>
+            </a:r>
+          </a:p>
+        </p:txBody>
+      </p:sp>
+      <p:pic>
+        <p:nvPicPr>
+          <p:cNvPr id="14" name="Picture 13" descr="image.png"/>
+          <p:cNvPicPr>
+            <a:picLocks noChangeAspect="1"/>
+          </p:cNvPicPr>
+          <p:nvPr/>
+        </p:nvPicPr>
+        <p:blipFill>
+          <a:blip r:embed="rId2"/>
+          <a:stretch>
+            <a:fillRect/>
+          </a:stretch>
+        </p:blipFill>
+        <p:spPr>
+          <a:xfrm>
+            <a:off x="1318162" y="2432303"/>
+            <a:ext cx="2246571" cy="3767327"/>
+          </a:xfrm>
+          <a:prstGeom prst="rect">
+            <a:avLst/>
+          </a:prstGeom>
+        </p:spPr>
+      </p:pic>
+      <p:sp>
+        <p:nvSpPr>
+          <p:cNvPr id="15" name="Oval 14"/>
+          <p:cNvSpPr/>
+          <p:nvPr/>
+        </p:nvSpPr>
+        <p:spPr>
+          <a:xfrm>
+            <a:off x="2212848" y="3107862"/>
+            <a:ext cx="457200" cy="457200"/>
+          </a:xfrm>
+          <a:prstGeom prst="ellipse">
+            <a:avLst/>
+          </a:prstGeom>
+          <a:noFill/>
+          <a:ln w="27940">
+            <a:solidFill>
+              <a:srgbClr val="D94261"/>
+            </a:solidFill>
+          </a:ln>
+        </p:spPr>
+        <p:style>
+          <a:lnRef idx="1">
+            <a:schemeClr val="accent1"/>
+          </a:lnRef>
+          <a:fillRef idx="3">
+            <a:schemeClr val="accent1"/>
+          </a:fillRef>
+          <a:effectRef idx="2">
+            <a:schemeClr val="accent1"/>
+          </a:effectRef>
+          <a:fontRef idx="minor">
+            <a:schemeClr val="lt1"/>
+          </a:fontRef>
+        </p:style>
+        <p:txBody>
+          <a:bodyPr rtlCol="0" anchor="ctr"/>
+          <a:lstStyle/>
+          <a:p>
+            <a:pPr algn="ctr"/>
+          </a:p>
+        </p:txBody>
+      </p:sp>
+      <p:sp>
+        <p:nvSpPr>
+          <p:cNvPr id="16" name="Oval 15"/>
+          <p:cNvSpPr/>
+          <p:nvPr/>
+        </p:nvSpPr>
+        <p:spPr>
+          <a:xfrm>
+            <a:off x="2276856" y="3171870"/>
+            <a:ext cx="329184" cy="329184"/>
+          </a:xfrm>
+          <a:prstGeom prst="ellipse">
+            <a:avLst/>
+          </a:prstGeom>
+          <a:solidFill>
+            <a:srgbClr val="D94261"/>
+          </a:solidFill>
+          <a:ln>
+            <a:noFill/>
+          </a:ln>
+        </p:spPr>
+        <p:style>
+          <a:lnRef idx="1">
+            <a:schemeClr val="accent1"/>
+          </a:lnRef>
+          <a:fillRef idx="3">
+            <a:schemeClr val="accent1"/>
+          </a:fillRef>
+          <a:effectRef idx="2">
+            <a:schemeClr val="accent1"/>
+          </a:effectRef>
+          <a:fontRef idx="minor">
+            <a:schemeClr val="lt1"/>
+          </a:fontRef>
+        </p:style>
+        <p:txBody>
+          <a:bodyPr rtlCol="0" anchor="ctr" lIns="0" rIns="0" tIns="0" bIns="0"/>
+          <a:lstStyle/>
+          <a:p>
+            <a:pPr algn="ctr"/>
+            <a:r>
+              <a:rPr sz="1200" b="1">
+                <a:solidFill>
+                  <a:srgbClr val="FFFFFF"/>
+                </a:solidFill>
+                <a:latin typeface="Arial"/>
+              </a:rPr>
+              <a:t>1</a:t>
+            </a:r>
+          </a:p>
+        </p:txBody>
+      </p:sp>
+      <p:sp>
+        <p:nvSpPr>
+          <p:cNvPr id="17" name="Up Arrow 16"/>
+          <p:cNvSpPr/>
+          <p:nvPr/>
+        </p:nvSpPr>
+        <p:spPr>
+          <a:xfrm rot="18900000">
+            <a:off x="2532888" y="3446190"/>
+            <a:ext cx="256032" cy="365760"/>
+          </a:xfrm>
+          <a:prstGeom prst="upArrow">
+            <a:avLst/>
+          </a:prstGeom>
+          <a:solidFill>
+            <a:srgbClr val="FFFFFF"/>
+          </a:solidFill>
+          <a:ln w="17780">
+            <a:solidFill>
+              <a:srgbClr val="3B1F68"/>
+            </a:solidFill>
+          </a:ln>
+        </p:spPr>
+        <p:style>
+          <a:lnRef idx="1">
+            <a:schemeClr val="accent1"/>
+          </a:lnRef>
+          <a:fillRef idx="3">
+            <a:schemeClr val="accent1"/>
+          </a:fillRef>
+          <a:effectRef idx="2">
+            <a:schemeClr val="accent1"/>
+          </a:effectRef>
+          <a:fontRef idx="minor">
+            <a:schemeClr val="lt1"/>
+          </a:fontRef>
+        </p:style>
+        <p:txBody>
+          <a:bodyPr rtlCol="0" anchor="ctr"/>
+          <a:lstStyle/>
+          <a:p>
+            <a:pPr algn="ctr"/>
+          </a:p>
+        </p:txBody>
+      </p:sp>
+      <p:sp>
+        <p:nvSpPr>
+          <p:cNvPr id="18" name="Rectangle 17"/>
+          <p:cNvSpPr/>
+          <p:nvPr/>
+        </p:nvSpPr>
+        <p:spPr>
+          <a:xfrm>
+            <a:off x="4645152" y="2066543"/>
+            <a:ext cx="6949440" cy="420624"/>
+          </a:xfrm>
+          <a:prstGeom prst="rect">
+            <a:avLst/>
+          </a:prstGeom>
+          <a:solidFill>
+            <a:srgbClr val="3B1F68"/>
+          </a:solidFill>
+          <a:ln>
+            <a:noFill/>
+          </a:ln>
+        </p:spPr>
+        <p:style>
+          <a:lnRef idx="1">
+            <a:schemeClr val="accent1"/>
+          </a:lnRef>
+          <a:fillRef idx="3">
+            <a:schemeClr val="accent1"/>
+          </a:fillRef>
+          <a:effectRef idx="2">
+            <a:schemeClr val="accent1"/>
+          </a:effectRef>
+          <a:fontRef idx="minor">
+            <a:schemeClr val="lt1"/>
+          </a:fontRef>
+        </p:style>
+        <p:txBody>
+          <a:bodyPr rtlCol="0" anchor="ctr"/>
+          <a:lstStyle/>
+          <a:p>
+            <a:pPr algn="ctr"/>
+          </a:p>
+        </p:txBody>
+      </p:sp>
+      <p:sp>
+        <p:nvSpPr>
+          <p:cNvPr id="19" name="TextBox 18"/>
+          <p:cNvSpPr txBox="1"/>
+          <p:nvPr/>
+        </p:nvSpPr>
+        <p:spPr>
+          <a:xfrm>
+            <a:off x="4809744" y="2185416"/>
+            <a:ext cx="6620255" cy="164592"/>
+          </a:xfrm>
+          <a:prstGeom prst="rect">
+            <a:avLst/>
+          </a:prstGeom>
+          <a:noFill/>
+        </p:spPr>
+        <p:txBody>
+          <a:bodyPr wrap="square" anchor="t" lIns="0" rIns="0" tIns="0" bIns="0">
+            <a:spAutoFit/>
+          </a:bodyPr>
+          <a:lstStyle/>
+          <a:p>
+            <a:pPr algn="l">
+              <a:lnSpc>
+                <a:spcPct val="100000"/>
+              </a:lnSpc>
+              <a:spcBef>
+                <a:spcPts val="0"/>
+              </a:spcBef>
+              <a:spcAft>
+                <a:spcPts val="0"/>
+              </a:spcAft>
+            </a:pPr>
+            <a:r>
+              <a:rPr sz="950" b="1">
+                <a:solidFill>
+                  <a:srgbClr val="FFFFFF"/>
+                </a:solidFill>
+                <a:latin typeface="Arial"/>
+              </a:rPr>
+              <a:t>ШАГ 1 ИЗ 3</a:t>
+            </a:r>
+          </a:p>
+        </p:txBody>
+      </p:sp>
+      <p:sp>
+        <p:nvSpPr>
+          <p:cNvPr id="20" name="Rectangle 19"/>
+          <p:cNvSpPr/>
+          <p:nvPr/>
+        </p:nvSpPr>
+        <p:spPr>
+          <a:xfrm>
+            <a:off x="4645152" y="2596896"/>
+            <a:ext cx="6949440" cy="1499616"/>
+          </a:xfrm>
+          <a:prstGeom prst="rect">
+            <a:avLst/>
+          </a:prstGeom>
+          <a:solidFill>
+            <a:srgbClr val="FFFFFF"/>
+          </a:solidFill>
+          <a:ln w="10160">
+            <a:solidFill>
+              <a:srgbClr val="DED9E8"/>
+            </a:solidFill>
+          </a:ln>
+        </p:spPr>
+        <p:style>
+          <a:lnRef idx="1">
+            <a:schemeClr val="accent1"/>
+          </a:lnRef>
+          <a:fillRef idx="3">
+            <a:schemeClr val="accent1"/>
+          </a:fillRef>
+          <a:effectRef idx="2">
+            <a:schemeClr val="accent1"/>
+          </a:effectRef>
+          <a:fontRef idx="minor">
+            <a:schemeClr val="lt1"/>
+          </a:fontRef>
+        </p:style>
+        <p:txBody>
+          <a:bodyPr rtlCol="0" anchor="ctr"/>
+          <a:lstStyle/>
+          <a:p>
+            <a:pPr algn="ctr"/>
+          </a:p>
+        </p:txBody>
+      </p:sp>
+      <p:sp>
+        <p:nvSpPr>
+          <p:cNvPr id="21" name="Rectangle 20"/>
+          <p:cNvSpPr/>
+          <p:nvPr/>
+        </p:nvSpPr>
+        <p:spPr>
+          <a:xfrm>
+            <a:off x="4645152" y="2596896"/>
+            <a:ext cx="54864" cy="1499616"/>
+          </a:xfrm>
+          <a:prstGeom prst="rect">
+            <a:avLst/>
+          </a:prstGeom>
+          <a:solidFill>
+            <a:srgbClr val="D94261"/>
+          </a:solidFill>
+          <a:ln>
+            <a:noFill/>
+          </a:ln>
+        </p:spPr>
+        <p:style>
+          <a:lnRef idx="1">
+            <a:schemeClr val="accent1"/>
+          </a:lnRef>
+          <a:fillRef idx="3">
+            <a:schemeClr val="accent1"/>
+          </a:fillRef>
+          <a:effectRef idx="2">
+            <a:schemeClr val="accent1"/>
+          </a:effectRef>
+          <a:fontRef idx="minor">
+            <a:schemeClr val="lt1"/>
+          </a:fontRef>
+        </p:style>
+        <p:txBody>
+          <a:bodyPr rtlCol="0" anchor="ctr"/>
+          <a:lstStyle/>
+          <a:p>
+            <a:pPr algn="ctr"/>
+          </a:p>
+        </p:txBody>
+      </p:sp>
+      <p:sp>
+        <p:nvSpPr>
+          <p:cNvPr id="22" name="Rounded Rectangle 21"/>
+          <p:cNvSpPr/>
+          <p:nvPr/>
+        </p:nvSpPr>
+        <p:spPr>
+          <a:xfrm>
+            <a:off x="4809744" y="2734056"/>
+            <a:ext cx="310896" cy="310896"/>
+          </a:xfrm>
+          <a:prstGeom prst="roundRect">
+            <a:avLst/>
+          </a:prstGeom>
+          <a:solidFill>
+            <a:srgbClr val="D94261"/>
+          </a:solidFill>
+          <a:ln>
+            <a:noFill/>
+          </a:ln>
+        </p:spPr>
+        <p:style>
+          <a:lnRef idx="1">
+            <a:schemeClr val="accent1"/>
+          </a:lnRef>
+          <a:fillRef idx="3">
+            <a:schemeClr val="accent1"/>
+          </a:fillRef>
+          <a:effectRef idx="2">
+            <a:schemeClr val="accent1"/>
+          </a:effectRef>
+          <a:fontRef idx="minor">
+            <a:schemeClr val="lt1"/>
+          </a:fontRef>
+        </p:style>
+        <p:txBody>
+          <a:bodyPr rtlCol="0" anchor="ctr"/>
+          <a:lstStyle/>
+          <a:p>
+            <a:pPr algn="ctr"/>
+          </a:p>
+        </p:txBody>
+      </p:sp>
+      <p:sp>
+        <p:nvSpPr>
+          <p:cNvPr id="23" name="TextBox 22"/>
+          <p:cNvSpPr txBox="1"/>
+          <p:nvPr/>
+        </p:nvSpPr>
+        <p:spPr>
+          <a:xfrm>
+            <a:off x="4809744" y="2743200"/>
+            <a:ext cx="310896" cy="256032"/>
+          </a:xfrm>
+          <a:prstGeom prst="rect">
+            <a:avLst/>
+          </a:prstGeom>
+          <a:noFill/>
+        </p:spPr>
+        <p:txBody>
+          <a:bodyPr wrap="square" anchor="ctr" lIns="0" rIns="0" tIns="0" bIns="0">
+            <a:spAutoFit/>
+          </a:bodyPr>
+          <a:lstStyle/>
+          <a:p>
+            <a:pPr algn="ctr">
+              <a:lnSpc>
+                <a:spcPct val="100000"/>
+              </a:lnSpc>
+              <a:spcBef>
+                <a:spcPts val="0"/>
+              </a:spcBef>
+              <a:spcAft>
+                <a:spcPts val="0"/>
+              </a:spcAft>
+            </a:pPr>
+            <a:r>
+              <a:rPr sz="1100" b="1">
+                <a:solidFill>
+                  <a:srgbClr val="FFFFFF"/>
+                </a:solidFill>
+                <a:latin typeface="Arial"/>
+              </a:rPr>
+              <a:t>1</a:t>
+            </a:r>
+          </a:p>
+        </p:txBody>
+      </p:sp>
+      <p:sp>
+        <p:nvSpPr>
+          <p:cNvPr id="24" name="TextBox 23"/>
+          <p:cNvSpPr txBox="1"/>
+          <p:nvPr/>
+        </p:nvSpPr>
+        <p:spPr>
+          <a:xfrm>
+            <a:off x="5230368" y="2688336"/>
+            <a:ext cx="6217920" cy="310896"/>
+          </a:xfrm>
+          <a:prstGeom prst="rect">
+            <a:avLst/>
+          </a:prstGeom>
+          <a:noFill/>
+        </p:spPr>
+        <p:txBody>
+          <a:bodyPr wrap="square" anchor="t" lIns="0" rIns="0" tIns="0" bIns="0">
+            <a:spAutoFit/>
+          </a:bodyPr>
+          <a:lstStyle/>
+          <a:p>
+            <a:pPr algn="l">
+              <a:lnSpc>
+                <a:spcPct val="100000"/>
+              </a:lnSpc>
+              <a:spcBef>
+                <a:spcPts val="0"/>
+              </a:spcBef>
+              <a:spcAft>
+                <a:spcPts val="0"/>
+              </a:spcAft>
+            </a:pPr>
+            <a:r>
+              <a:rPr sz="1180" b="1">
+                <a:solidFill>
+                  <a:srgbClr val="21172F"/>
+                </a:solidFill>
+                <a:latin typeface="Arial"/>
+              </a:rPr>
+              <a:t>Сверьте аудиторию</a:t>
+            </a:r>
+          </a:p>
+        </p:txBody>
+      </p:sp>
+      <p:sp>
+        <p:nvSpPr>
+          <p:cNvPr id="25" name="TextBox 24"/>
+          <p:cNvSpPr txBox="1"/>
+          <p:nvPr/>
+        </p:nvSpPr>
+        <p:spPr>
+          <a:xfrm>
+            <a:off x="5230368" y="3008376"/>
+            <a:ext cx="6217920" cy="1033271"/>
+          </a:xfrm>
+          <a:prstGeom prst="rect">
+            <a:avLst/>
+          </a:prstGeom>
+          <a:noFill/>
+        </p:spPr>
+        <p:txBody>
+          <a:bodyPr wrap="square" anchor="t" lIns="0" rIns="0" tIns="0" bIns="0">
+            <a:spAutoFit/>
+          </a:bodyPr>
+          <a:lstStyle/>
+          <a:p>
+            <a:pPr algn="l">
+              <a:lnSpc>
+                <a:spcPct val="100000"/>
+              </a:lnSpc>
+              <a:spcBef>
+                <a:spcPts val="0"/>
+              </a:spcBef>
+              <a:spcAft>
+                <a:spcPts val="0"/>
+              </a:spcAft>
+            </a:pPr>
+            <a:r>
+              <a:rPr sz="1000" b="0">
+                <a:solidFill>
+                  <a:srgbClr val="6E687D"/>
+                </a:solidFill>
+                <a:latin typeface="Arial"/>
+              </a:rPr>
+              <a:t>Проверьте роли, площадки, группы и количество.</a:t>
+            </a:r>
+          </a:p>
+        </p:txBody>
+      </p:sp>
+      <p:sp>
+        <p:nvSpPr>
+          <p:cNvPr id="26" name="Rectangle 25"/>
+          <p:cNvSpPr/>
+          <p:nvPr/>
+        </p:nvSpPr>
+        <p:spPr>
+          <a:xfrm>
+            <a:off x="4645152" y="4315968"/>
+            <a:ext cx="6949440" cy="877824"/>
+          </a:xfrm>
+          <a:prstGeom prst="rect">
+            <a:avLst/>
+          </a:prstGeom>
+          <a:solidFill>
+            <a:srgbClr val="E1F6F3"/>
+          </a:solidFill>
+          <a:ln>
+            <a:noFill/>
+          </a:ln>
+        </p:spPr>
+        <p:style>
+          <a:lnRef idx="1">
+            <a:schemeClr val="accent1"/>
+          </a:lnRef>
+          <a:fillRef idx="3">
+            <a:schemeClr val="accent1"/>
+          </a:fillRef>
+          <a:effectRef idx="2">
+            <a:schemeClr val="accent1"/>
+          </a:effectRef>
+          <a:fontRef idx="minor">
+            <a:schemeClr val="lt1"/>
+          </a:fontRef>
+        </p:style>
+        <p:txBody>
+          <a:bodyPr rtlCol="0" anchor="ctr"/>
+          <a:lstStyle/>
+          <a:p>
+            <a:pPr algn="ctr"/>
+          </a:p>
+        </p:txBody>
+      </p:sp>
+      <p:sp>
+        <p:nvSpPr>
+          <p:cNvPr id="27" name="Rectangle 26"/>
+          <p:cNvSpPr/>
+          <p:nvPr/>
+        </p:nvSpPr>
+        <p:spPr>
+          <a:xfrm>
+            <a:off x="4645152" y="4315968"/>
+            <a:ext cx="54864" cy="877824"/>
+          </a:xfrm>
+          <a:prstGeom prst="rect">
+            <a:avLst/>
+          </a:prstGeom>
+          <a:solidFill>
+            <a:srgbClr val="149B91"/>
+          </a:solidFill>
+          <a:ln>
+            <a:noFill/>
+          </a:ln>
+        </p:spPr>
+        <p:style>
+          <a:lnRef idx="1">
+            <a:schemeClr val="accent1"/>
+          </a:lnRef>
+          <a:fillRef idx="3">
+            <a:schemeClr val="accent1"/>
+          </a:fillRef>
+          <a:effectRef idx="2">
+            <a:schemeClr val="accent1"/>
+          </a:effectRef>
+          <a:fontRef idx="minor">
+            <a:schemeClr val="lt1"/>
+          </a:fontRef>
+        </p:style>
+        <p:txBody>
+          <a:bodyPr rtlCol="0" anchor="ctr"/>
+          <a:lstStyle/>
+          <a:p>
+            <a:pPr algn="ctr"/>
+          </a:p>
+        </p:txBody>
+      </p:sp>
+      <p:sp>
+        <p:nvSpPr>
+          <p:cNvPr id="28" name="TextBox 27"/>
+          <p:cNvSpPr txBox="1"/>
+          <p:nvPr/>
+        </p:nvSpPr>
+        <p:spPr>
+          <a:xfrm>
+            <a:off x="4846320" y="4425696"/>
+            <a:ext cx="6620255" cy="219456"/>
+          </a:xfrm>
+          <a:prstGeom prst="rect">
+            <a:avLst/>
+          </a:prstGeom>
+          <a:noFill/>
+        </p:spPr>
+        <p:txBody>
+          <a:bodyPr wrap="square" anchor="t" lIns="0" rIns="0" tIns="0" bIns="0">
+            <a:spAutoFit/>
+          </a:bodyPr>
+          <a:lstStyle/>
+          <a:p>
+            <a:pPr algn="l">
+              <a:lnSpc>
+                <a:spcPct val="100000"/>
+              </a:lnSpc>
+              <a:spcBef>
+                <a:spcPts val="0"/>
+              </a:spcBef>
+              <a:spcAft>
+                <a:spcPts val="0"/>
+              </a:spcAft>
+            </a:pPr>
+            <a:r>
+              <a:rPr sz="1150" b="1">
+                <a:solidFill>
+                  <a:srgbClr val="21172F"/>
+                </a:solidFill>
+                <a:latin typeface="Arial"/>
+              </a:rPr>
+              <a:t>Проверка результата</a:t>
+            </a:r>
+          </a:p>
+        </p:txBody>
+      </p:sp>
+      <p:sp>
+        <p:nvSpPr>
+          <p:cNvPr id="29" name="TextBox 28"/>
+          <p:cNvSpPr txBox="1"/>
+          <p:nvPr/>
+        </p:nvSpPr>
+        <p:spPr>
+          <a:xfrm>
+            <a:off x="4846320" y="4681728"/>
+            <a:ext cx="6620255" cy="402336"/>
+          </a:xfrm>
+          <a:prstGeom prst="rect">
+            <a:avLst/>
+          </a:prstGeom>
+          <a:noFill/>
+        </p:spPr>
+        <p:txBody>
+          <a:bodyPr wrap="square" anchor="t" lIns="0" rIns="0" tIns="0" bIns="0">
+            <a:spAutoFit/>
+          </a:bodyPr>
+          <a:lstStyle/>
+          <a:p>
+            <a:pPr algn="l">
+              <a:lnSpc>
+                <a:spcPct val="100000"/>
+              </a:lnSpc>
+              <a:spcBef>
+                <a:spcPts val="0"/>
+              </a:spcBef>
+              <a:spcAft>
+                <a:spcPts val="0"/>
+              </a:spcAft>
+            </a:pPr>
+            <a:r>
+              <a:rPr sz="1000" b="0">
+                <a:solidFill>
+                  <a:srgbClr val="6E687D"/>
+                </a:solidFill>
+                <a:latin typeface="Arial"/>
+              </a:rPr>
+              <a:t>После нажатия дождитесь изменения экрана и переходите к следующему шагу.</a:t>
+            </a:r>
+          </a:p>
+        </p:txBody>
+      </p:sp>
+      <p:sp>
+        <p:nvSpPr>
+          <p:cNvPr id="30" name="Rectangle 29"/>
+          <p:cNvSpPr/>
+          <p:nvPr/>
+        </p:nvSpPr>
+        <p:spPr>
+          <a:xfrm>
+            <a:off x="4645152" y="5413248"/>
+            <a:ext cx="6949440" cy="603504"/>
+          </a:xfrm>
+          <a:prstGeom prst="rect">
+            <a:avLst/>
+          </a:prstGeom>
+          <a:solidFill>
+            <a:srgbClr val="FFF5C9"/>
+          </a:solidFill>
+          <a:ln>
+            <a:noFill/>
+          </a:ln>
+        </p:spPr>
+        <p:style>
+          <a:lnRef idx="1">
+            <a:schemeClr val="accent1"/>
+          </a:lnRef>
+          <a:fillRef idx="3">
+            <a:schemeClr val="accent1"/>
+          </a:fillRef>
+          <a:effectRef idx="2">
+            <a:schemeClr val="accent1"/>
+          </a:effectRef>
+          <a:fontRef idx="minor">
+            <a:schemeClr val="lt1"/>
+          </a:fontRef>
+        </p:style>
+        <p:txBody>
+          <a:bodyPr rtlCol="0" anchor="ctr"/>
+          <a:lstStyle/>
+          <a:p>
+            <a:pPr algn="ctr"/>
+          </a:p>
+        </p:txBody>
+      </p:sp>
+      <p:sp>
+        <p:nvSpPr>
+          <p:cNvPr id="31" name="TextBox 30"/>
+          <p:cNvSpPr txBox="1"/>
+          <p:nvPr/>
+        </p:nvSpPr>
+        <p:spPr>
+          <a:xfrm>
+            <a:off x="4809744" y="5559552"/>
+            <a:ext cx="6620255" cy="292608"/>
+          </a:xfrm>
+          <a:prstGeom prst="rect">
+            <a:avLst/>
+          </a:prstGeom>
+          <a:noFill/>
+        </p:spPr>
+        <p:txBody>
+          <a:bodyPr wrap="square" anchor="t" lIns="0" rIns="0" tIns="0" bIns="0">
+            <a:spAutoFit/>
+          </a:bodyPr>
+          <a:lstStyle/>
+          <a:p>
+            <a:pPr algn="l">
+              <a:lnSpc>
+                <a:spcPct val="100000"/>
+              </a:lnSpc>
+              <a:spcBef>
+                <a:spcPts val="0"/>
+              </a:spcBef>
+              <a:spcAft>
+                <a:spcPts val="0"/>
+              </a:spcAft>
+            </a:pPr>
+            <a:r>
+              <a:rPr sz="919" b="0">
+                <a:solidFill>
+                  <a:srgbClr val="6E687D"/>
+                </a:solidFill>
+                <a:latin typeface="Arial"/>
+              </a:rPr>
+              <a:t>Курсор и номер показывают единственное действие этого кадра.</a:t>
+            </a:r>
+          </a:p>
+        </p:txBody>
+      </p:sp>
+      <p:sp>
+        <p:nvSpPr>
+          <p:cNvPr id="32" name="Rectangle 31"/>
+          <p:cNvSpPr/>
+          <p:nvPr/>
+        </p:nvSpPr>
+        <p:spPr>
+          <a:xfrm>
+            <a:off x="438912" y="6537960"/>
+            <a:ext cx="11247120" cy="9144"/>
+          </a:xfrm>
+          <a:prstGeom prst="rect">
+            <a:avLst/>
+          </a:prstGeom>
+          <a:solidFill>
+            <a:srgbClr val="DED9E8"/>
+          </a:solidFill>
+          <a:ln>
+            <a:noFill/>
+          </a:ln>
+        </p:spPr>
+        <p:style>
+          <a:lnRef idx="1">
+            <a:schemeClr val="accent1"/>
+          </a:lnRef>
+          <a:fillRef idx="3">
+            <a:schemeClr val="accent1"/>
+          </a:fillRef>
+          <a:effectRef idx="2">
+            <a:schemeClr val="accent1"/>
+          </a:effectRef>
+          <a:fontRef idx="minor">
+            <a:schemeClr val="lt1"/>
+          </a:fontRef>
+        </p:style>
+        <p:txBody>
+          <a:bodyPr rtlCol="0" anchor="ctr"/>
+          <a:lstStyle/>
+          <a:p>
+            <a:pPr algn="ctr"/>
+          </a:p>
+        </p:txBody>
+      </p:sp>
+      <p:sp>
+        <p:nvSpPr>
+          <p:cNvPr id="33" name="TextBox 32"/>
+          <p:cNvSpPr txBox="1"/>
+          <p:nvPr/>
+        </p:nvSpPr>
+        <p:spPr>
+          <a:xfrm>
+            <a:off x="438912" y="6601968"/>
+            <a:ext cx="7315200" cy="182880"/>
+          </a:xfrm>
+          <a:prstGeom prst="rect">
+            <a:avLst/>
+          </a:prstGeom>
+          <a:noFill/>
+        </p:spPr>
+        <p:txBody>
+          <a:bodyPr wrap="square" anchor="t" lIns="0" rIns="0" tIns="0" bIns="0">
+            <a:spAutoFit/>
+          </a:bodyPr>
+          <a:lstStyle/>
+          <a:p>
+            <a:pPr algn="l">
+              <a:lnSpc>
+                <a:spcPct val="100000"/>
+              </a:lnSpc>
+              <a:spcBef>
+                <a:spcPts val="0"/>
+              </a:spcBef>
+              <a:spcAft>
+                <a:spcPts val="0"/>
+              </a:spcAft>
+            </a:pPr>
+            <a:r>
+              <a:rPr sz="900" b="0">
+                <a:solidFill>
+                  <a:srgbClr val="6E687D"/>
+                </a:solidFill>
+                <a:latin typeface="Arial"/>
+              </a:rPr>
+              <a:t>Роль: Куратор · Algo MAX</a:t>
+            </a:r>
+          </a:p>
+        </p:txBody>
+      </p:sp>
+    </p:spTree>
+  </p:cSld>
+  <p:clrMapOvr>
+    <a:masterClrMapping/>
+  </p:clrMapOvr>
+</p:sld>
+</file>
+
+<file path=ppt/slides/slide22.xml><?xml version="1.0" encoding="utf-8"?>
+<p:sld xmlns:a="http://schemas.openxmlformats.org/drawingml/2006/main" xmlns:p="http://schemas.openxmlformats.org/presentationml/2006/main" xmlns:r="http://schemas.openxmlformats.org/officeDocument/2006/relationships">
+  <p:cSld>
+    <p:bg>
+      <p:bgPr>
+        <a:solidFill>
+          <a:srgbClr val="F7F6FA"/>
+        </a:solidFill>
+        <a:effectLst/>
+      </p:bgPr>
+    </p:bg>
+    <p:spTree>
+      <p:nvGrpSpPr>
+        <p:cNvPr id="1" name=""/>
+        <p:cNvGrpSpPr/>
+        <p:nvPr/>
+      </p:nvGrpSpPr>
+      <p:grpSpPr/>
+      <p:sp>
+        <p:nvSpPr>
+          <p:cNvPr id="2" name="Rounded Rectangle 1"/>
+          <p:cNvSpPr/>
+          <p:nvPr/>
+        </p:nvSpPr>
+        <p:spPr>
+          <a:xfrm>
+            <a:off x="411480" y="274320"/>
+            <a:ext cx="384048" cy="384048"/>
+          </a:xfrm>
+          <a:prstGeom prst="roundRect">
+            <a:avLst/>
+          </a:prstGeom>
+          <a:solidFill>
+            <a:srgbClr val="6F35D4"/>
+          </a:solidFill>
+          <a:ln>
+            <a:noFill/>
+          </a:ln>
+        </p:spPr>
+        <p:style>
+          <a:lnRef idx="1">
+            <a:schemeClr val="accent1"/>
+          </a:lnRef>
+          <a:fillRef idx="3">
+            <a:schemeClr val="accent1"/>
+          </a:fillRef>
+          <a:effectRef idx="2">
+            <a:schemeClr val="accent1"/>
+          </a:effectRef>
+          <a:fontRef idx="minor">
+            <a:schemeClr val="lt1"/>
+          </a:fontRef>
+        </p:style>
+        <p:txBody>
+          <a:bodyPr rtlCol="0" anchor="ctr"/>
+          <a:lstStyle/>
+          <a:p>
+            <a:pPr algn="ctr"/>
+          </a:p>
+        </p:txBody>
+      </p:sp>
+      <p:sp>
+        <p:nvSpPr>
+          <p:cNvPr id="3" name="TextBox 2"/>
+          <p:cNvSpPr txBox="1"/>
+          <p:nvPr/>
+        </p:nvSpPr>
+        <p:spPr>
+          <a:xfrm>
+            <a:off x="411480" y="283464"/>
+            <a:ext cx="384048" cy="347472"/>
+          </a:xfrm>
+          <a:prstGeom prst="rect">
+            <a:avLst/>
+          </a:prstGeom>
+          <a:noFill/>
+        </p:spPr>
+        <p:txBody>
+          <a:bodyPr wrap="square" anchor="ctr" lIns="0" rIns="0" tIns="0" bIns="0">
+            <a:spAutoFit/>
+          </a:bodyPr>
+          <a:lstStyle/>
+          <a:p>
+            <a:pPr algn="ctr">
+              <a:lnSpc>
+                <a:spcPct val="100000"/>
+              </a:lnSpc>
+              <a:spcBef>
+                <a:spcPts val="0"/>
+              </a:spcBef>
+              <a:spcAft>
+                <a:spcPts val="0"/>
+              </a:spcAft>
+            </a:pPr>
+            <a:r>
+              <a:rPr sz="1600" b="1">
+                <a:solidFill>
+                  <a:srgbClr val="FFFFFF"/>
+                </a:solidFill>
+                <a:latin typeface="Arial"/>
+              </a:rPr>
+              <a:t>A</a:t>
+            </a:r>
+          </a:p>
+        </p:txBody>
+      </p:sp>
+      <p:sp>
+        <p:nvSpPr>
+          <p:cNvPr id="4" name="TextBox 3"/>
+          <p:cNvSpPr txBox="1"/>
+          <p:nvPr/>
+        </p:nvSpPr>
+        <p:spPr>
+          <a:xfrm>
+            <a:off x="896112" y="301752"/>
+            <a:ext cx="1508760" cy="292608"/>
+          </a:xfrm>
+          <a:prstGeom prst="rect">
+            <a:avLst/>
+          </a:prstGeom>
+          <a:noFill/>
+        </p:spPr>
+        <p:txBody>
+          <a:bodyPr wrap="square" anchor="t" lIns="0" rIns="0" tIns="0" bIns="0">
+            <a:spAutoFit/>
+          </a:bodyPr>
+          <a:lstStyle/>
+          <a:p>
+            <a:pPr algn="l">
+              <a:lnSpc>
+                <a:spcPct val="100000"/>
+              </a:lnSpc>
+              <a:spcBef>
+                <a:spcPts val="0"/>
+              </a:spcBef>
+              <a:spcAft>
+                <a:spcPts val="0"/>
+              </a:spcAft>
+            </a:pPr>
+            <a:r>
+              <a:rPr sz="1700" b="1">
+                <a:solidFill>
+                  <a:srgbClr val="21172F"/>
+                </a:solidFill>
+                <a:latin typeface="Arial"/>
+              </a:rPr>
+              <a:t>Algo MAX</a:t>
+            </a:r>
+          </a:p>
+        </p:txBody>
+      </p:sp>
+      <p:sp>
+        <p:nvSpPr>
+          <p:cNvPr id="5" name="TextBox 4"/>
+          <p:cNvSpPr txBox="1"/>
+          <p:nvPr/>
+        </p:nvSpPr>
+        <p:spPr>
+          <a:xfrm>
+            <a:off x="438912" y="896112"/>
+            <a:ext cx="3657600" cy="219456"/>
+          </a:xfrm>
+          <a:prstGeom prst="rect">
+            <a:avLst/>
+          </a:prstGeom>
+          <a:noFill/>
+        </p:spPr>
+        <p:txBody>
+          <a:bodyPr wrap="square" anchor="t" lIns="0" rIns="0" tIns="0" bIns="0">
+            <a:spAutoFit/>
+          </a:bodyPr>
+          <a:lstStyle/>
+          <a:p>
+            <a:pPr algn="l">
+              <a:lnSpc>
+                <a:spcPct val="100000"/>
+              </a:lnSpc>
+              <a:spcBef>
+                <a:spcPts val="0"/>
+              </a:spcBef>
+              <a:spcAft>
+                <a:spcPts val="0"/>
+              </a:spcAft>
+            </a:pPr>
+            <a:r>
+              <a:rPr sz="1000" b="1">
+                <a:solidFill>
+                  <a:srgbClr val="6F35D4"/>
+                </a:solidFill>
+                <a:latin typeface="Arial"/>
+              </a:rPr>
+              <a:t>РАССЫЛКИ</a:t>
+            </a:r>
+          </a:p>
+        </p:txBody>
+      </p:sp>
+      <p:sp>
+        <p:nvSpPr>
+          <p:cNvPr id="6" name="TextBox 5"/>
+          <p:cNvSpPr txBox="1"/>
+          <p:nvPr/>
+        </p:nvSpPr>
+        <p:spPr>
+          <a:xfrm>
+            <a:off x="438912" y="1097280"/>
+            <a:ext cx="11018520" cy="512064"/>
+          </a:xfrm>
+          <a:prstGeom prst="rect">
+            <a:avLst/>
+          </a:prstGeom>
+          <a:noFill/>
+        </p:spPr>
+        <p:txBody>
+          <a:bodyPr wrap="square" anchor="t" lIns="0" rIns="0" tIns="0" bIns="0">
+            <a:spAutoFit/>
+          </a:bodyPr>
+          <a:lstStyle/>
+          <a:p>
+            <a:pPr algn="l">
+              <a:lnSpc>
+                <a:spcPct val="100000"/>
+              </a:lnSpc>
+              <a:spcBef>
+                <a:spcPts val="0"/>
+              </a:spcBef>
+              <a:spcAft>
+                <a:spcPts val="0"/>
+              </a:spcAft>
+            </a:pPr>
+            <a:r>
+              <a:rPr sz="2800" b="1">
+                <a:solidFill>
+                  <a:srgbClr val="21172F"/>
+                </a:solidFill>
+                <a:latin typeface="Arial"/>
+              </a:rPr>
+              <a:t>Финальная проверка</a:t>
+            </a:r>
+          </a:p>
+        </p:txBody>
+      </p:sp>
+      <p:sp>
+        <p:nvSpPr>
+          <p:cNvPr id="7" name="TextBox 6"/>
+          <p:cNvSpPr txBox="1"/>
+          <p:nvPr/>
+        </p:nvSpPr>
+        <p:spPr>
+          <a:xfrm>
+            <a:off x="11137392" y="310896"/>
+            <a:ext cx="548640" cy="256032"/>
+          </a:xfrm>
+          <a:prstGeom prst="rect">
+            <a:avLst/>
+          </a:prstGeom>
+          <a:noFill/>
+        </p:spPr>
+        <p:txBody>
+          <a:bodyPr wrap="square" anchor="t" lIns="0" rIns="0" tIns="0" bIns="0">
+            <a:spAutoFit/>
+          </a:bodyPr>
+          <a:lstStyle/>
+          <a:p>
+            <a:pPr algn="r">
+              <a:lnSpc>
+                <a:spcPct val="100000"/>
+              </a:lnSpc>
+              <a:spcBef>
+                <a:spcPts val="0"/>
+              </a:spcBef>
+              <a:spcAft>
+                <a:spcPts val="0"/>
+              </a:spcAft>
+            </a:pPr>
+            <a:r>
+              <a:rPr sz="1100" b="0">
+                <a:solidFill>
+                  <a:srgbClr val="6E687D"/>
+                </a:solidFill>
+                <a:latin typeface="Arial"/>
+              </a:rPr>
+              <a:t>22</a:t>
+            </a:r>
+          </a:p>
+        </p:txBody>
+      </p:sp>
+      <p:sp>
+        <p:nvSpPr>
+          <p:cNvPr id="8" name="Rectangle 7"/>
+          <p:cNvSpPr/>
+          <p:nvPr/>
+        </p:nvSpPr>
+        <p:spPr>
+          <a:xfrm>
+            <a:off x="438912" y="1645920"/>
+            <a:ext cx="11228832" cy="329184"/>
+          </a:xfrm>
+          <a:prstGeom prst="rect">
+            <a:avLst/>
+          </a:prstGeom>
+          <a:solidFill>
+            <a:srgbClr val="EEE7FF"/>
+          </a:solidFill>
+          <a:ln>
+            <a:noFill/>
+          </a:ln>
+        </p:spPr>
+        <p:style>
+          <a:lnRef idx="1">
+            <a:schemeClr val="accent1"/>
+          </a:lnRef>
+          <a:fillRef idx="3">
+            <a:schemeClr val="accent1"/>
+          </a:fillRef>
+          <a:effectRef idx="2">
+            <a:schemeClr val="accent1"/>
+          </a:effectRef>
+          <a:fontRef idx="minor">
+            <a:schemeClr val="lt1"/>
+          </a:fontRef>
+        </p:style>
+        <p:txBody>
+          <a:bodyPr rtlCol="0" anchor="ctr"/>
+          <a:lstStyle/>
+          <a:p>
+            <a:pPr algn="ctr"/>
+          </a:p>
+        </p:txBody>
+      </p:sp>
+      <p:sp>
+        <p:nvSpPr>
+          <p:cNvPr id="9" name="TextBox 8"/>
+          <p:cNvSpPr txBox="1"/>
+          <p:nvPr/>
+        </p:nvSpPr>
+        <p:spPr>
+          <a:xfrm>
+            <a:off x="603504" y="1746504"/>
+            <a:ext cx="420624" cy="137160"/>
+          </a:xfrm>
+          <a:prstGeom prst="rect">
+            <a:avLst/>
+          </a:prstGeom>
+          <a:noFill/>
+        </p:spPr>
+        <p:txBody>
+          <a:bodyPr wrap="square" anchor="t" lIns="0" rIns="0" tIns="0" bIns="0">
+            <a:spAutoFit/>
+          </a:bodyPr>
+          <a:lstStyle/>
+          <a:p>
+            <a:pPr algn="l">
+              <a:lnSpc>
+                <a:spcPct val="100000"/>
+              </a:lnSpc>
+              <a:spcBef>
+                <a:spcPts val="0"/>
+              </a:spcBef>
+              <a:spcAft>
+                <a:spcPts val="0"/>
+              </a:spcAft>
+            </a:pPr>
+            <a:r>
+              <a:rPr sz="850" b="1">
+                <a:solidFill>
+                  <a:srgbClr val="6F35D4"/>
+                </a:solidFill>
+                <a:latin typeface="Arial"/>
+              </a:rPr>
+              <a:t>ПУТЬ</a:t>
+            </a:r>
+          </a:p>
+        </p:txBody>
+      </p:sp>
+      <p:sp>
+        <p:nvSpPr>
+          <p:cNvPr id="10" name="TextBox 9"/>
+          <p:cNvSpPr txBox="1"/>
+          <p:nvPr/>
+        </p:nvSpPr>
+        <p:spPr>
+          <a:xfrm>
+            <a:off x="1097280" y="1700784"/>
+            <a:ext cx="10287000" cy="201168"/>
+          </a:xfrm>
+          <a:prstGeom prst="rect">
+            <a:avLst/>
+          </a:prstGeom>
+          <a:noFill/>
+        </p:spPr>
+        <p:txBody>
+          <a:bodyPr wrap="square" anchor="t" lIns="0" rIns="0" tIns="0" bIns="0">
+            <a:spAutoFit/>
+          </a:bodyPr>
+          <a:lstStyle/>
+          <a:p>
+            <a:pPr algn="l">
+              <a:lnSpc>
+                <a:spcPct val="100000"/>
+              </a:lnSpc>
+              <a:spcBef>
+                <a:spcPts val="0"/>
+              </a:spcBef>
+              <a:spcAft>
+                <a:spcPts val="0"/>
+              </a:spcAft>
+            </a:pPr>
+            <a:r>
+              <a:rPr sz="1150" b="1">
+                <a:solidFill>
+                  <a:srgbClr val="21172F"/>
+                </a:solidFill>
+                <a:latin typeface="Arial"/>
+              </a:rPr>
+              <a:t>Рассылки -&gt; Проверка</a:t>
+            </a:r>
+          </a:p>
+        </p:txBody>
+      </p:sp>
+      <p:sp>
+        <p:nvSpPr>
+          <p:cNvPr id="11" name="Rectangle 10"/>
+          <p:cNvSpPr/>
+          <p:nvPr/>
+        </p:nvSpPr>
+        <p:spPr>
+          <a:xfrm>
+            <a:off x="530352" y="2066543"/>
+            <a:ext cx="3822191" cy="4206240"/>
+          </a:xfrm>
+          <a:prstGeom prst="rect">
+            <a:avLst/>
+          </a:prstGeom>
+          <a:solidFill>
+            <a:srgbClr val="FFFFFF"/>
+          </a:solidFill>
+          <a:ln w="10160">
+            <a:solidFill>
+              <a:srgbClr val="DED9E8"/>
+            </a:solidFill>
+          </a:ln>
+        </p:spPr>
+        <p:style>
+          <a:lnRef idx="1">
+            <a:schemeClr val="accent1"/>
+          </a:lnRef>
+          <a:fillRef idx="3">
+            <a:schemeClr val="accent1"/>
+          </a:fillRef>
+          <a:effectRef idx="2">
+            <a:schemeClr val="accent1"/>
+          </a:effectRef>
+          <a:fontRef idx="minor">
+            <a:schemeClr val="lt1"/>
+          </a:fontRef>
+        </p:style>
+        <p:txBody>
+          <a:bodyPr rtlCol="0" anchor="ctr"/>
+          <a:lstStyle/>
+          <a:p>
+            <a:pPr algn="ctr"/>
+          </a:p>
+        </p:txBody>
+      </p:sp>
+      <p:sp>
+        <p:nvSpPr>
+          <p:cNvPr id="12" name="Rectangle 11"/>
+          <p:cNvSpPr/>
+          <p:nvPr/>
+        </p:nvSpPr>
+        <p:spPr>
+          <a:xfrm>
+            <a:off x="530352" y="2066543"/>
+            <a:ext cx="3822191" cy="292608"/>
+          </a:xfrm>
+          <a:prstGeom prst="rect">
+            <a:avLst/>
+          </a:prstGeom>
+          <a:solidFill>
+            <a:srgbClr val="3B1F68"/>
+          </a:solidFill>
+          <a:ln>
+            <a:noFill/>
+          </a:ln>
+        </p:spPr>
+        <p:style>
+          <a:lnRef idx="1">
+            <a:schemeClr val="accent1"/>
+          </a:lnRef>
+          <a:fillRef idx="3">
+            <a:schemeClr val="accent1"/>
+          </a:fillRef>
+          <a:effectRef idx="2">
+            <a:schemeClr val="accent1"/>
+          </a:effectRef>
+          <a:fontRef idx="minor">
+            <a:schemeClr val="lt1"/>
+          </a:fontRef>
+        </p:style>
+        <p:txBody>
+          <a:bodyPr rtlCol="0" anchor="ctr"/>
+          <a:lstStyle/>
+          <a:p>
+            <a:pPr algn="ctr"/>
+          </a:p>
+        </p:txBody>
+      </p:sp>
+      <p:sp>
+        <p:nvSpPr>
+          <p:cNvPr id="13" name="TextBox 12"/>
+          <p:cNvSpPr txBox="1"/>
+          <p:nvPr/>
+        </p:nvSpPr>
+        <p:spPr>
+          <a:xfrm>
+            <a:off x="658368" y="2121408"/>
+            <a:ext cx="3566159" cy="182880"/>
+          </a:xfrm>
+          <a:prstGeom prst="rect">
+            <a:avLst/>
+          </a:prstGeom>
+          <a:noFill/>
+        </p:spPr>
+        <p:txBody>
+          <a:bodyPr wrap="square" anchor="t" lIns="0" rIns="0" tIns="0" bIns="0">
+            <a:spAutoFit/>
+          </a:bodyPr>
+          <a:lstStyle/>
+          <a:p>
+            <a:pPr algn="l">
+              <a:lnSpc>
+                <a:spcPct val="100000"/>
+              </a:lnSpc>
+              <a:spcBef>
+                <a:spcPts val="0"/>
+              </a:spcBef>
+              <a:spcAft>
+                <a:spcPts val="0"/>
+              </a:spcAft>
+            </a:pPr>
+            <a:r>
+              <a:rPr sz="950" b="1">
+                <a:solidFill>
+                  <a:srgbClr val="FFFFFF"/>
+                </a:solidFill>
+                <a:latin typeface="Arial"/>
+              </a:rPr>
+              <a:t>Экран на телефоне</a:t>
+            </a:r>
+          </a:p>
+        </p:txBody>
+      </p:sp>
+      <p:pic>
+        <p:nvPicPr>
+          <p:cNvPr id="14" name="Picture 13" descr="image.png"/>
+          <p:cNvPicPr>
+            <a:picLocks noChangeAspect="1"/>
+          </p:cNvPicPr>
+          <p:nvPr/>
+        </p:nvPicPr>
+        <p:blipFill>
+          <a:blip r:embed="rId2"/>
+          <a:stretch>
+            <a:fillRect/>
+          </a:stretch>
+        </p:blipFill>
+        <p:spPr>
+          <a:xfrm>
+            <a:off x="1318162" y="2432303"/>
+            <a:ext cx="2246571" cy="3767327"/>
+          </a:xfrm>
+          <a:prstGeom prst="rect">
+            <a:avLst/>
+          </a:prstGeom>
+        </p:spPr>
+      </p:pic>
+      <p:sp>
+        <p:nvSpPr>
+          <p:cNvPr id="15" name="Oval 14"/>
+          <p:cNvSpPr/>
+          <p:nvPr/>
+        </p:nvSpPr>
+        <p:spPr>
+          <a:xfrm>
+            <a:off x="2212848" y="4162714"/>
+            <a:ext cx="457200" cy="457200"/>
+          </a:xfrm>
+          <a:prstGeom prst="ellipse">
+            <a:avLst/>
+          </a:prstGeom>
+          <a:noFill/>
+          <a:ln w="27940">
+            <a:solidFill>
+              <a:srgbClr val="D94261"/>
+            </a:solidFill>
+          </a:ln>
+        </p:spPr>
+        <p:style>
+          <a:lnRef idx="1">
+            <a:schemeClr val="accent1"/>
+          </a:lnRef>
+          <a:fillRef idx="3">
+            <a:schemeClr val="accent1"/>
+          </a:fillRef>
+          <a:effectRef idx="2">
+            <a:schemeClr val="accent1"/>
+          </a:effectRef>
+          <a:fontRef idx="minor">
+            <a:schemeClr val="lt1"/>
+          </a:fontRef>
+        </p:style>
+        <p:txBody>
+          <a:bodyPr rtlCol="0" anchor="ctr"/>
+          <a:lstStyle/>
+          <a:p>
+            <a:pPr algn="ctr"/>
+          </a:p>
+        </p:txBody>
+      </p:sp>
+      <p:sp>
+        <p:nvSpPr>
+          <p:cNvPr id="16" name="Oval 15"/>
+          <p:cNvSpPr/>
+          <p:nvPr/>
+        </p:nvSpPr>
+        <p:spPr>
+          <a:xfrm>
+            <a:off x="2276856" y="4226722"/>
+            <a:ext cx="329184" cy="329184"/>
+          </a:xfrm>
+          <a:prstGeom prst="ellipse">
+            <a:avLst/>
+          </a:prstGeom>
+          <a:solidFill>
+            <a:srgbClr val="D94261"/>
+          </a:solidFill>
+          <a:ln>
+            <a:noFill/>
+          </a:ln>
+        </p:spPr>
+        <p:style>
+          <a:lnRef idx="1">
+            <a:schemeClr val="accent1"/>
+          </a:lnRef>
+          <a:fillRef idx="3">
+            <a:schemeClr val="accent1"/>
+          </a:fillRef>
+          <a:effectRef idx="2">
+            <a:schemeClr val="accent1"/>
+          </a:effectRef>
+          <a:fontRef idx="minor">
+            <a:schemeClr val="lt1"/>
+          </a:fontRef>
+        </p:style>
+        <p:txBody>
+          <a:bodyPr rtlCol="0" anchor="ctr" lIns="0" rIns="0" tIns="0" bIns="0"/>
+          <a:lstStyle/>
+          <a:p>
+            <a:pPr algn="ctr"/>
+            <a:r>
+              <a:rPr sz="1200" b="1">
+                <a:solidFill>
+                  <a:srgbClr val="FFFFFF"/>
+                </a:solidFill>
+                <a:latin typeface="Arial"/>
+              </a:rPr>
+              <a:t>2</a:t>
+            </a:r>
+          </a:p>
+        </p:txBody>
+      </p:sp>
+      <p:sp>
+        <p:nvSpPr>
+          <p:cNvPr id="17" name="Up Arrow 16"/>
+          <p:cNvSpPr/>
+          <p:nvPr/>
+        </p:nvSpPr>
+        <p:spPr>
+          <a:xfrm rot="18900000">
+            <a:off x="2532888" y="4501042"/>
+            <a:ext cx="256032" cy="365760"/>
+          </a:xfrm>
+          <a:prstGeom prst="upArrow">
+            <a:avLst/>
+          </a:prstGeom>
+          <a:solidFill>
+            <a:srgbClr val="FFFFFF"/>
+          </a:solidFill>
+          <a:ln w="17780">
+            <a:solidFill>
+              <a:srgbClr val="3B1F68"/>
+            </a:solidFill>
+          </a:ln>
+        </p:spPr>
+        <p:style>
+          <a:lnRef idx="1">
+            <a:schemeClr val="accent1"/>
+          </a:lnRef>
+          <a:fillRef idx="3">
+            <a:schemeClr val="accent1"/>
+          </a:fillRef>
+          <a:effectRef idx="2">
+            <a:schemeClr val="accent1"/>
+          </a:effectRef>
+          <a:fontRef idx="minor">
+            <a:schemeClr val="lt1"/>
+          </a:fontRef>
+        </p:style>
+        <p:txBody>
+          <a:bodyPr rtlCol="0" anchor="ctr"/>
+          <a:lstStyle/>
+          <a:p>
+            <a:pPr algn="ctr"/>
+          </a:p>
+        </p:txBody>
+      </p:sp>
+      <p:sp>
+        <p:nvSpPr>
+          <p:cNvPr id="18" name="Rectangle 17"/>
+          <p:cNvSpPr/>
+          <p:nvPr/>
+        </p:nvSpPr>
+        <p:spPr>
+          <a:xfrm>
+            <a:off x="4645152" y="2066543"/>
+            <a:ext cx="6949440" cy="420624"/>
+          </a:xfrm>
+          <a:prstGeom prst="rect">
+            <a:avLst/>
+          </a:prstGeom>
+          <a:solidFill>
+            <a:srgbClr val="3B1F68"/>
+          </a:solidFill>
+          <a:ln>
+            <a:noFill/>
+          </a:ln>
+        </p:spPr>
+        <p:style>
+          <a:lnRef idx="1">
+            <a:schemeClr val="accent1"/>
+          </a:lnRef>
+          <a:fillRef idx="3">
+            <a:schemeClr val="accent1"/>
+          </a:fillRef>
+          <a:effectRef idx="2">
+            <a:schemeClr val="accent1"/>
+          </a:effectRef>
+          <a:fontRef idx="minor">
+            <a:schemeClr val="lt1"/>
+          </a:fontRef>
+        </p:style>
+        <p:txBody>
+          <a:bodyPr rtlCol="0" anchor="ctr"/>
+          <a:lstStyle/>
+          <a:p>
+            <a:pPr algn="ctr"/>
+          </a:p>
+        </p:txBody>
+      </p:sp>
+      <p:sp>
+        <p:nvSpPr>
+          <p:cNvPr id="19" name="TextBox 18"/>
+          <p:cNvSpPr txBox="1"/>
+          <p:nvPr/>
+        </p:nvSpPr>
+        <p:spPr>
+          <a:xfrm>
+            <a:off x="4809744" y="2185416"/>
+            <a:ext cx="6620255" cy="164592"/>
+          </a:xfrm>
+          <a:prstGeom prst="rect">
+            <a:avLst/>
+          </a:prstGeom>
+          <a:noFill/>
+        </p:spPr>
+        <p:txBody>
+          <a:bodyPr wrap="square" anchor="t" lIns="0" rIns="0" tIns="0" bIns="0">
+            <a:spAutoFit/>
+          </a:bodyPr>
+          <a:lstStyle/>
+          <a:p>
+            <a:pPr algn="l">
+              <a:lnSpc>
+                <a:spcPct val="100000"/>
+              </a:lnSpc>
+              <a:spcBef>
+                <a:spcPts val="0"/>
+              </a:spcBef>
+              <a:spcAft>
+                <a:spcPts val="0"/>
+              </a:spcAft>
+            </a:pPr>
+            <a:r>
+              <a:rPr sz="950" b="1">
+                <a:solidFill>
+                  <a:srgbClr val="FFFFFF"/>
+                </a:solidFill>
+                <a:latin typeface="Arial"/>
+              </a:rPr>
+              <a:t>ШАГ 2 ИЗ 3</a:t>
+            </a:r>
+          </a:p>
+        </p:txBody>
+      </p:sp>
+      <p:sp>
+        <p:nvSpPr>
+          <p:cNvPr id="20" name="Rectangle 19"/>
+          <p:cNvSpPr/>
+          <p:nvPr/>
+        </p:nvSpPr>
+        <p:spPr>
+          <a:xfrm>
+            <a:off x="4645152" y="2596896"/>
+            <a:ext cx="6949440" cy="1499616"/>
+          </a:xfrm>
+          <a:prstGeom prst="rect">
+            <a:avLst/>
+          </a:prstGeom>
+          <a:solidFill>
+            <a:srgbClr val="FFFFFF"/>
+          </a:solidFill>
+          <a:ln w="10160">
+            <a:solidFill>
+              <a:srgbClr val="DED9E8"/>
+            </a:solidFill>
+          </a:ln>
+        </p:spPr>
+        <p:style>
+          <a:lnRef idx="1">
+            <a:schemeClr val="accent1"/>
+          </a:lnRef>
+          <a:fillRef idx="3">
+            <a:schemeClr val="accent1"/>
+          </a:fillRef>
+          <a:effectRef idx="2">
+            <a:schemeClr val="accent1"/>
+          </a:effectRef>
+          <a:fontRef idx="minor">
+            <a:schemeClr val="lt1"/>
+          </a:fontRef>
+        </p:style>
+        <p:txBody>
+          <a:bodyPr rtlCol="0" anchor="ctr"/>
+          <a:lstStyle/>
+          <a:p>
+            <a:pPr algn="ctr"/>
+          </a:p>
+        </p:txBody>
+      </p:sp>
+      <p:sp>
+        <p:nvSpPr>
+          <p:cNvPr id="21" name="Rectangle 20"/>
+          <p:cNvSpPr/>
+          <p:nvPr/>
+        </p:nvSpPr>
+        <p:spPr>
+          <a:xfrm>
+            <a:off x="4645152" y="2596896"/>
+            <a:ext cx="54864" cy="1499616"/>
+          </a:xfrm>
+          <a:prstGeom prst="rect">
+            <a:avLst/>
+          </a:prstGeom>
+          <a:solidFill>
+            <a:srgbClr val="D94261"/>
+          </a:solidFill>
+          <a:ln>
+            <a:noFill/>
+          </a:ln>
+        </p:spPr>
+        <p:style>
+          <a:lnRef idx="1">
+            <a:schemeClr val="accent1"/>
+          </a:lnRef>
+          <a:fillRef idx="3">
+            <a:schemeClr val="accent1"/>
+          </a:fillRef>
+          <a:effectRef idx="2">
+            <a:schemeClr val="accent1"/>
+          </a:effectRef>
+          <a:fontRef idx="minor">
+            <a:schemeClr val="lt1"/>
+          </a:fontRef>
+        </p:style>
+        <p:txBody>
+          <a:bodyPr rtlCol="0" anchor="ctr"/>
+          <a:lstStyle/>
+          <a:p>
+            <a:pPr algn="ctr"/>
+          </a:p>
+        </p:txBody>
+      </p:sp>
+      <p:sp>
+        <p:nvSpPr>
+          <p:cNvPr id="22" name="Rounded Rectangle 21"/>
+          <p:cNvSpPr/>
+          <p:nvPr/>
+        </p:nvSpPr>
+        <p:spPr>
+          <a:xfrm>
+            <a:off x="4809744" y="2734056"/>
+            <a:ext cx="310896" cy="310896"/>
+          </a:xfrm>
+          <a:prstGeom prst="roundRect">
+            <a:avLst/>
+          </a:prstGeom>
+          <a:solidFill>
+            <a:srgbClr val="D94261"/>
+          </a:solidFill>
+          <a:ln>
+            <a:noFill/>
+          </a:ln>
+        </p:spPr>
+        <p:style>
+          <a:lnRef idx="1">
+            <a:schemeClr val="accent1"/>
+          </a:lnRef>
+          <a:fillRef idx="3">
+            <a:schemeClr val="accent1"/>
+          </a:fillRef>
+          <a:effectRef idx="2">
+            <a:schemeClr val="accent1"/>
+          </a:effectRef>
+          <a:fontRef idx="minor">
+            <a:schemeClr val="lt1"/>
+          </a:fontRef>
+        </p:style>
+        <p:txBody>
+          <a:bodyPr rtlCol="0" anchor="ctr"/>
+          <a:lstStyle/>
+          <a:p>
+            <a:pPr algn="ctr"/>
+          </a:p>
+        </p:txBody>
+      </p:sp>
+      <p:sp>
+        <p:nvSpPr>
+          <p:cNvPr id="23" name="TextBox 22"/>
+          <p:cNvSpPr txBox="1"/>
+          <p:nvPr/>
+        </p:nvSpPr>
+        <p:spPr>
+          <a:xfrm>
+            <a:off x="4809744" y="2743200"/>
+            <a:ext cx="310896" cy="256032"/>
+          </a:xfrm>
+          <a:prstGeom prst="rect">
+            <a:avLst/>
+          </a:prstGeom>
+          <a:noFill/>
+        </p:spPr>
+        <p:txBody>
+          <a:bodyPr wrap="square" anchor="ctr" lIns="0" rIns="0" tIns="0" bIns="0">
+            <a:spAutoFit/>
+          </a:bodyPr>
+          <a:lstStyle/>
+          <a:p>
+            <a:pPr algn="ctr">
+              <a:lnSpc>
+                <a:spcPct val="100000"/>
+              </a:lnSpc>
+              <a:spcBef>
+                <a:spcPts val="0"/>
+              </a:spcBef>
+              <a:spcAft>
+                <a:spcPts val="0"/>
+              </a:spcAft>
+            </a:pPr>
+            <a:r>
+              <a:rPr sz="1100" b="1">
+                <a:solidFill>
+                  <a:srgbClr val="FFFFFF"/>
+                </a:solidFill>
+                <a:latin typeface="Arial"/>
+              </a:rPr>
+              <a:t>2</a:t>
+            </a:r>
+          </a:p>
+        </p:txBody>
+      </p:sp>
+      <p:sp>
+        <p:nvSpPr>
+          <p:cNvPr id="24" name="TextBox 23"/>
+          <p:cNvSpPr txBox="1"/>
+          <p:nvPr/>
+        </p:nvSpPr>
+        <p:spPr>
+          <a:xfrm>
+            <a:off x="5230368" y="2688336"/>
+            <a:ext cx="6217920" cy="310896"/>
+          </a:xfrm>
+          <a:prstGeom prst="rect">
+            <a:avLst/>
+          </a:prstGeom>
+          <a:noFill/>
+        </p:spPr>
+        <p:txBody>
+          <a:bodyPr wrap="square" anchor="t" lIns="0" rIns="0" tIns="0" bIns="0">
+            <a:spAutoFit/>
+          </a:bodyPr>
+          <a:lstStyle/>
+          <a:p>
+            <a:pPr algn="l">
+              <a:lnSpc>
+                <a:spcPct val="100000"/>
+              </a:lnSpc>
+              <a:spcBef>
+                <a:spcPts val="0"/>
+              </a:spcBef>
+              <a:spcAft>
+                <a:spcPts val="0"/>
+              </a:spcAft>
+            </a:pPr>
+            <a:r>
+              <a:rPr sz="1180" b="1">
+                <a:solidFill>
+                  <a:srgbClr val="21172F"/>
+                </a:solidFill>
+                <a:latin typeface="Arial"/>
+              </a:rPr>
+              <a:t>Сверьте сообщение</a:t>
+            </a:r>
+          </a:p>
+        </p:txBody>
+      </p:sp>
+      <p:sp>
+        <p:nvSpPr>
+          <p:cNvPr id="25" name="TextBox 24"/>
+          <p:cNvSpPr txBox="1"/>
+          <p:nvPr/>
+        </p:nvSpPr>
+        <p:spPr>
+          <a:xfrm>
+            <a:off x="5230368" y="3008376"/>
+            <a:ext cx="6217920" cy="1033271"/>
+          </a:xfrm>
+          <a:prstGeom prst="rect">
+            <a:avLst/>
+          </a:prstGeom>
+          <a:noFill/>
+        </p:spPr>
+        <p:txBody>
+          <a:bodyPr wrap="square" anchor="t" lIns="0" rIns="0" tIns="0" bIns="0">
+            <a:spAutoFit/>
+          </a:bodyPr>
+          <a:lstStyle/>
+          <a:p>
+            <a:pPr algn="l">
+              <a:lnSpc>
+                <a:spcPct val="100000"/>
+              </a:lnSpc>
+              <a:spcBef>
+                <a:spcPts val="0"/>
+              </a:spcBef>
+              <a:spcAft>
+                <a:spcPts val="0"/>
+              </a:spcAft>
+            </a:pPr>
+            <a:r>
+              <a:rPr sz="1000" b="0">
+                <a:solidFill>
+                  <a:srgbClr val="6E687D"/>
+                </a:solidFill>
+                <a:latin typeface="Arial"/>
+              </a:rPr>
+              <a:t>Проверьте текст, ссылку и изображение.</a:t>
+            </a:r>
+          </a:p>
+        </p:txBody>
+      </p:sp>
+      <p:sp>
+        <p:nvSpPr>
+          <p:cNvPr id="26" name="Rectangle 25"/>
+          <p:cNvSpPr/>
+          <p:nvPr/>
+        </p:nvSpPr>
+        <p:spPr>
+          <a:xfrm>
+            <a:off x="4645152" y="4315968"/>
+            <a:ext cx="6949440" cy="877824"/>
+          </a:xfrm>
+          <a:prstGeom prst="rect">
+            <a:avLst/>
+          </a:prstGeom>
+          <a:solidFill>
+            <a:srgbClr val="E1F6F3"/>
+          </a:solidFill>
+          <a:ln>
+            <a:noFill/>
+          </a:ln>
+        </p:spPr>
+        <p:style>
+          <a:lnRef idx="1">
+            <a:schemeClr val="accent1"/>
+          </a:lnRef>
+          <a:fillRef idx="3">
+            <a:schemeClr val="accent1"/>
+          </a:fillRef>
+          <a:effectRef idx="2">
+            <a:schemeClr val="accent1"/>
+          </a:effectRef>
+          <a:fontRef idx="minor">
+            <a:schemeClr val="lt1"/>
+          </a:fontRef>
+        </p:style>
+        <p:txBody>
+          <a:bodyPr rtlCol="0" anchor="ctr"/>
+          <a:lstStyle/>
+          <a:p>
+            <a:pPr algn="ctr"/>
+          </a:p>
+        </p:txBody>
+      </p:sp>
+      <p:sp>
+        <p:nvSpPr>
+          <p:cNvPr id="27" name="Rectangle 26"/>
+          <p:cNvSpPr/>
+          <p:nvPr/>
+        </p:nvSpPr>
+        <p:spPr>
+          <a:xfrm>
+            <a:off x="4645152" y="4315968"/>
+            <a:ext cx="54864" cy="877824"/>
+          </a:xfrm>
+          <a:prstGeom prst="rect">
+            <a:avLst/>
+          </a:prstGeom>
+          <a:solidFill>
+            <a:srgbClr val="149B91"/>
+          </a:solidFill>
+          <a:ln>
+            <a:noFill/>
+          </a:ln>
+        </p:spPr>
+        <p:style>
+          <a:lnRef idx="1">
+            <a:schemeClr val="accent1"/>
+          </a:lnRef>
+          <a:fillRef idx="3">
+            <a:schemeClr val="accent1"/>
+          </a:fillRef>
+          <a:effectRef idx="2">
+            <a:schemeClr val="accent1"/>
+          </a:effectRef>
+          <a:fontRef idx="minor">
+            <a:schemeClr val="lt1"/>
+          </a:fontRef>
+        </p:style>
+        <p:txBody>
+          <a:bodyPr rtlCol="0" anchor="ctr"/>
+          <a:lstStyle/>
+          <a:p>
+            <a:pPr algn="ctr"/>
+          </a:p>
+        </p:txBody>
+      </p:sp>
+      <p:sp>
+        <p:nvSpPr>
+          <p:cNvPr id="28" name="TextBox 27"/>
+          <p:cNvSpPr txBox="1"/>
+          <p:nvPr/>
+        </p:nvSpPr>
+        <p:spPr>
+          <a:xfrm>
+            <a:off x="4846320" y="4425696"/>
+            <a:ext cx="6620255" cy="219456"/>
+          </a:xfrm>
+          <a:prstGeom prst="rect">
+            <a:avLst/>
+          </a:prstGeom>
+          <a:noFill/>
+        </p:spPr>
+        <p:txBody>
+          <a:bodyPr wrap="square" anchor="t" lIns="0" rIns="0" tIns="0" bIns="0">
+            <a:spAutoFit/>
+          </a:bodyPr>
+          <a:lstStyle/>
+          <a:p>
+            <a:pPr algn="l">
+              <a:lnSpc>
+                <a:spcPct val="100000"/>
+              </a:lnSpc>
+              <a:spcBef>
+                <a:spcPts val="0"/>
+              </a:spcBef>
+              <a:spcAft>
+                <a:spcPts val="0"/>
+              </a:spcAft>
+            </a:pPr>
+            <a:r>
+              <a:rPr sz="1150" b="1">
+                <a:solidFill>
+                  <a:srgbClr val="21172F"/>
+                </a:solidFill>
+                <a:latin typeface="Arial"/>
+              </a:rPr>
+              <a:t>Проверка результата</a:t>
+            </a:r>
+          </a:p>
+        </p:txBody>
+      </p:sp>
+      <p:sp>
+        <p:nvSpPr>
+          <p:cNvPr id="29" name="TextBox 28"/>
+          <p:cNvSpPr txBox="1"/>
+          <p:nvPr/>
+        </p:nvSpPr>
+        <p:spPr>
+          <a:xfrm>
+            <a:off x="4846320" y="4681728"/>
+            <a:ext cx="6620255" cy="402336"/>
+          </a:xfrm>
+          <a:prstGeom prst="rect">
+            <a:avLst/>
+          </a:prstGeom>
+          <a:noFill/>
+        </p:spPr>
+        <p:txBody>
+          <a:bodyPr wrap="square" anchor="t" lIns="0" rIns="0" tIns="0" bIns="0">
+            <a:spAutoFit/>
+          </a:bodyPr>
+          <a:lstStyle/>
+          <a:p>
+            <a:pPr algn="l">
+              <a:lnSpc>
+                <a:spcPct val="100000"/>
+              </a:lnSpc>
+              <a:spcBef>
+                <a:spcPts val="0"/>
+              </a:spcBef>
+              <a:spcAft>
+                <a:spcPts val="0"/>
+              </a:spcAft>
+            </a:pPr>
+            <a:r>
+              <a:rPr sz="1000" b="0">
+                <a:solidFill>
+                  <a:srgbClr val="6E687D"/>
+                </a:solidFill>
+                <a:latin typeface="Arial"/>
+              </a:rPr>
+              <a:t>После нажатия дождитесь изменения экрана и переходите к следующему шагу.</a:t>
+            </a:r>
+          </a:p>
+        </p:txBody>
+      </p:sp>
+      <p:sp>
+        <p:nvSpPr>
+          <p:cNvPr id="30" name="Rectangle 29"/>
+          <p:cNvSpPr/>
+          <p:nvPr/>
+        </p:nvSpPr>
+        <p:spPr>
+          <a:xfrm>
+            <a:off x="4645152" y="5413248"/>
+            <a:ext cx="6949440" cy="603504"/>
+          </a:xfrm>
+          <a:prstGeom prst="rect">
+            <a:avLst/>
+          </a:prstGeom>
+          <a:solidFill>
+            <a:srgbClr val="FFF5C9"/>
+          </a:solidFill>
+          <a:ln>
+            <a:noFill/>
+          </a:ln>
+        </p:spPr>
+        <p:style>
+          <a:lnRef idx="1">
+            <a:schemeClr val="accent1"/>
+          </a:lnRef>
+          <a:fillRef idx="3">
+            <a:schemeClr val="accent1"/>
+          </a:fillRef>
+          <a:effectRef idx="2">
+            <a:schemeClr val="accent1"/>
+          </a:effectRef>
+          <a:fontRef idx="minor">
+            <a:schemeClr val="lt1"/>
+          </a:fontRef>
+        </p:style>
+        <p:txBody>
+          <a:bodyPr rtlCol="0" anchor="ctr"/>
+          <a:lstStyle/>
+          <a:p>
+            <a:pPr algn="ctr"/>
+          </a:p>
+        </p:txBody>
+      </p:sp>
+      <p:sp>
+        <p:nvSpPr>
+          <p:cNvPr id="31" name="TextBox 30"/>
+          <p:cNvSpPr txBox="1"/>
+          <p:nvPr/>
+        </p:nvSpPr>
+        <p:spPr>
+          <a:xfrm>
+            <a:off x="4809744" y="5559552"/>
+            <a:ext cx="6620255" cy="292608"/>
+          </a:xfrm>
+          <a:prstGeom prst="rect">
+            <a:avLst/>
+          </a:prstGeom>
+          <a:noFill/>
+        </p:spPr>
+        <p:txBody>
+          <a:bodyPr wrap="square" anchor="t" lIns="0" rIns="0" tIns="0" bIns="0">
+            <a:spAutoFit/>
+          </a:bodyPr>
+          <a:lstStyle/>
+          <a:p>
+            <a:pPr algn="l">
+              <a:lnSpc>
+                <a:spcPct val="100000"/>
+              </a:lnSpc>
+              <a:spcBef>
+                <a:spcPts val="0"/>
+              </a:spcBef>
+              <a:spcAft>
+                <a:spcPts val="0"/>
+              </a:spcAft>
+            </a:pPr>
+            <a:r>
+              <a:rPr sz="919" b="0">
+                <a:solidFill>
+                  <a:srgbClr val="6E687D"/>
+                </a:solidFill>
+                <a:latin typeface="Arial"/>
+              </a:rPr>
+              <a:t>Курсор и номер показывают единственное действие этого кадра.</a:t>
+            </a:r>
+          </a:p>
+        </p:txBody>
+      </p:sp>
+      <p:sp>
+        <p:nvSpPr>
+          <p:cNvPr id="32" name="Rectangle 31"/>
+          <p:cNvSpPr/>
+          <p:nvPr/>
+        </p:nvSpPr>
+        <p:spPr>
+          <a:xfrm>
+            <a:off x="438912" y="6537960"/>
+            <a:ext cx="11247120" cy="9144"/>
+          </a:xfrm>
+          <a:prstGeom prst="rect">
+            <a:avLst/>
+          </a:prstGeom>
+          <a:solidFill>
+            <a:srgbClr val="DED9E8"/>
+          </a:solidFill>
+          <a:ln>
+            <a:noFill/>
+          </a:ln>
+        </p:spPr>
+        <p:style>
+          <a:lnRef idx="1">
+            <a:schemeClr val="accent1"/>
+          </a:lnRef>
+          <a:fillRef idx="3">
+            <a:schemeClr val="accent1"/>
+          </a:fillRef>
+          <a:effectRef idx="2">
+            <a:schemeClr val="accent1"/>
+          </a:effectRef>
+          <a:fontRef idx="minor">
+            <a:schemeClr val="lt1"/>
+          </a:fontRef>
+        </p:style>
+        <p:txBody>
+          <a:bodyPr rtlCol="0" anchor="ctr"/>
+          <a:lstStyle/>
+          <a:p>
+            <a:pPr algn="ctr"/>
+          </a:p>
+        </p:txBody>
+      </p:sp>
+      <p:sp>
+        <p:nvSpPr>
+          <p:cNvPr id="33" name="TextBox 32"/>
+          <p:cNvSpPr txBox="1"/>
+          <p:nvPr/>
+        </p:nvSpPr>
+        <p:spPr>
+          <a:xfrm>
+            <a:off x="438912" y="6601968"/>
+            <a:ext cx="7315200" cy="182880"/>
+          </a:xfrm>
+          <a:prstGeom prst="rect">
+            <a:avLst/>
+          </a:prstGeom>
+          <a:noFill/>
+        </p:spPr>
+        <p:txBody>
+          <a:bodyPr wrap="square" anchor="t" lIns="0" rIns="0" tIns="0" bIns="0">
+            <a:spAutoFit/>
+          </a:bodyPr>
+          <a:lstStyle/>
+          <a:p>
+            <a:pPr algn="l">
+              <a:lnSpc>
+                <a:spcPct val="100000"/>
+              </a:lnSpc>
+              <a:spcBef>
+                <a:spcPts val="0"/>
+              </a:spcBef>
+              <a:spcAft>
+                <a:spcPts val="0"/>
+              </a:spcAft>
+            </a:pPr>
+            <a:r>
+              <a:rPr sz="900" b="0">
+                <a:solidFill>
+                  <a:srgbClr val="6E687D"/>
+                </a:solidFill>
+                <a:latin typeface="Arial"/>
+              </a:rPr>
+              <a:t>Роль: Куратор · Algo MAX</a:t>
+            </a:r>
+          </a:p>
+        </p:txBody>
+      </p:sp>
+    </p:spTree>
+  </p:cSld>
+  <p:clrMapOvr>
+    <a:masterClrMapping/>
+  </p:clrMapOvr>
+</p:sld>
+</file>
+
+<file path=ppt/slides/slide23.xml><?xml version="1.0" encoding="utf-8"?>
+<p:sld xmlns:a="http://schemas.openxmlformats.org/drawingml/2006/main" xmlns:p="http://schemas.openxmlformats.org/presentationml/2006/main" xmlns:r="http://schemas.openxmlformats.org/officeDocument/2006/relationships">
+  <p:cSld>
+    <p:bg>
+      <p:bgPr>
+        <a:solidFill>
+          <a:srgbClr val="F7F6FA"/>
+        </a:solidFill>
+        <a:effectLst/>
+      </p:bgPr>
+    </p:bg>
+    <p:spTree>
+      <p:nvGrpSpPr>
+        <p:cNvPr id="1" name=""/>
+        <p:cNvGrpSpPr/>
+        <p:nvPr/>
+      </p:nvGrpSpPr>
+      <p:grpSpPr/>
+      <p:sp>
+        <p:nvSpPr>
+          <p:cNvPr id="2" name="Rounded Rectangle 1"/>
+          <p:cNvSpPr/>
+          <p:nvPr/>
+        </p:nvSpPr>
+        <p:spPr>
+          <a:xfrm>
+            <a:off x="411480" y="274320"/>
+            <a:ext cx="384048" cy="384048"/>
+          </a:xfrm>
+          <a:prstGeom prst="roundRect">
+            <a:avLst/>
+          </a:prstGeom>
+          <a:solidFill>
+            <a:srgbClr val="6F35D4"/>
+          </a:solidFill>
+          <a:ln>
+            <a:noFill/>
+          </a:ln>
+        </p:spPr>
+        <p:style>
+          <a:lnRef idx="1">
+            <a:schemeClr val="accent1"/>
+          </a:lnRef>
+          <a:fillRef idx="3">
+            <a:schemeClr val="accent1"/>
+          </a:fillRef>
+          <a:effectRef idx="2">
+            <a:schemeClr val="accent1"/>
+          </a:effectRef>
+          <a:fontRef idx="minor">
+            <a:schemeClr val="lt1"/>
+          </a:fontRef>
+        </p:style>
+        <p:txBody>
+          <a:bodyPr rtlCol="0" anchor="ctr"/>
+          <a:lstStyle/>
+          <a:p>
+            <a:pPr algn="ctr"/>
+          </a:p>
+        </p:txBody>
+      </p:sp>
+      <p:sp>
+        <p:nvSpPr>
+          <p:cNvPr id="3" name="TextBox 2"/>
+          <p:cNvSpPr txBox="1"/>
+          <p:nvPr/>
+        </p:nvSpPr>
+        <p:spPr>
+          <a:xfrm>
+            <a:off x="411480" y="283464"/>
+            <a:ext cx="384048" cy="347472"/>
+          </a:xfrm>
+          <a:prstGeom prst="rect">
+            <a:avLst/>
+          </a:prstGeom>
+          <a:noFill/>
+        </p:spPr>
+        <p:txBody>
+          <a:bodyPr wrap="square" anchor="ctr" lIns="0" rIns="0" tIns="0" bIns="0">
+            <a:spAutoFit/>
+          </a:bodyPr>
+          <a:lstStyle/>
+          <a:p>
+            <a:pPr algn="ctr">
+              <a:lnSpc>
+                <a:spcPct val="100000"/>
+              </a:lnSpc>
+              <a:spcBef>
+                <a:spcPts val="0"/>
+              </a:spcBef>
+              <a:spcAft>
+                <a:spcPts val="0"/>
+              </a:spcAft>
+            </a:pPr>
+            <a:r>
+              <a:rPr sz="1600" b="1">
+                <a:solidFill>
+                  <a:srgbClr val="FFFFFF"/>
+                </a:solidFill>
+                <a:latin typeface="Arial"/>
+              </a:rPr>
+              <a:t>A</a:t>
+            </a:r>
+          </a:p>
+        </p:txBody>
+      </p:sp>
+      <p:sp>
+        <p:nvSpPr>
+          <p:cNvPr id="4" name="TextBox 3"/>
+          <p:cNvSpPr txBox="1"/>
+          <p:nvPr/>
+        </p:nvSpPr>
+        <p:spPr>
+          <a:xfrm>
+            <a:off x="896112" y="301752"/>
+            <a:ext cx="1508760" cy="292608"/>
+          </a:xfrm>
+          <a:prstGeom prst="rect">
+            <a:avLst/>
+          </a:prstGeom>
+          <a:noFill/>
+        </p:spPr>
+        <p:txBody>
+          <a:bodyPr wrap="square" anchor="t" lIns="0" rIns="0" tIns="0" bIns="0">
+            <a:spAutoFit/>
+          </a:bodyPr>
+          <a:lstStyle/>
+          <a:p>
+            <a:pPr algn="l">
+              <a:lnSpc>
+                <a:spcPct val="100000"/>
+              </a:lnSpc>
+              <a:spcBef>
+                <a:spcPts val="0"/>
+              </a:spcBef>
+              <a:spcAft>
+                <a:spcPts val="0"/>
+              </a:spcAft>
+            </a:pPr>
+            <a:r>
+              <a:rPr sz="1700" b="1">
+                <a:solidFill>
+                  <a:srgbClr val="21172F"/>
+                </a:solidFill>
+                <a:latin typeface="Arial"/>
+              </a:rPr>
+              <a:t>Algo MAX</a:t>
+            </a:r>
+          </a:p>
+        </p:txBody>
+      </p:sp>
+      <p:sp>
+        <p:nvSpPr>
+          <p:cNvPr id="5" name="TextBox 4"/>
+          <p:cNvSpPr txBox="1"/>
+          <p:nvPr/>
+        </p:nvSpPr>
+        <p:spPr>
+          <a:xfrm>
+            <a:off x="438912" y="896112"/>
+            <a:ext cx="3657600" cy="219456"/>
+          </a:xfrm>
+          <a:prstGeom prst="rect">
+            <a:avLst/>
+          </a:prstGeom>
+          <a:noFill/>
+        </p:spPr>
+        <p:txBody>
+          <a:bodyPr wrap="square" anchor="t" lIns="0" rIns="0" tIns="0" bIns="0">
+            <a:spAutoFit/>
+          </a:bodyPr>
+          <a:lstStyle/>
+          <a:p>
+            <a:pPr algn="l">
+              <a:lnSpc>
+                <a:spcPct val="100000"/>
+              </a:lnSpc>
+              <a:spcBef>
+                <a:spcPts val="0"/>
+              </a:spcBef>
+              <a:spcAft>
+                <a:spcPts val="0"/>
+              </a:spcAft>
+            </a:pPr>
+            <a:r>
+              <a:rPr sz="1000" b="1">
+                <a:solidFill>
+                  <a:srgbClr val="6F35D4"/>
+                </a:solidFill>
+                <a:latin typeface="Arial"/>
+              </a:rPr>
+              <a:t>РАССЫЛКИ</a:t>
+            </a:r>
+          </a:p>
+        </p:txBody>
+      </p:sp>
+      <p:sp>
+        <p:nvSpPr>
+          <p:cNvPr id="6" name="TextBox 5"/>
+          <p:cNvSpPr txBox="1"/>
+          <p:nvPr/>
+        </p:nvSpPr>
+        <p:spPr>
+          <a:xfrm>
+            <a:off x="438912" y="1097280"/>
+            <a:ext cx="11018520" cy="512064"/>
+          </a:xfrm>
+          <a:prstGeom prst="rect">
+            <a:avLst/>
+          </a:prstGeom>
+          <a:noFill/>
+        </p:spPr>
+        <p:txBody>
+          <a:bodyPr wrap="square" anchor="t" lIns="0" rIns="0" tIns="0" bIns="0">
+            <a:spAutoFit/>
+          </a:bodyPr>
+          <a:lstStyle/>
+          <a:p>
+            <a:pPr algn="l">
+              <a:lnSpc>
+                <a:spcPct val="100000"/>
+              </a:lnSpc>
+              <a:spcBef>
+                <a:spcPts val="0"/>
+              </a:spcBef>
+              <a:spcAft>
+                <a:spcPts val="0"/>
+              </a:spcAft>
+            </a:pPr>
+            <a:r>
+              <a:rPr sz="2800" b="1">
+                <a:solidFill>
+                  <a:srgbClr val="21172F"/>
+                </a:solidFill>
+                <a:latin typeface="Arial"/>
+              </a:rPr>
+              <a:t>Финальная проверка</a:t>
+            </a:r>
+          </a:p>
+        </p:txBody>
+      </p:sp>
+      <p:sp>
+        <p:nvSpPr>
+          <p:cNvPr id="7" name="TextBox 6"/>
+          <p:cNvSpPr txBox="1"/>
+          <p:nvPr/>
+        </p:nvSpPr>
+        <p:spPr>
+          <a:xfrm>
+            <a:off x="11137392" y="310896"/>
+            <a:ext cx="548640" cy="256032"/>
+          </a:xfrm>
+          <a:prstGeom prst="rect">
+            <a:avLst/>
+          </a:prstGeom>
+          <a:noFill/>
+        </p:spPr>
+        <p:txBody>
+          <a:bodyPr wrap="square" anchor="t" lIns="0" rIns="0" tIns="0" bIns="0">
+            <a:spAutoFit/>
+          </a:bodyPr>
+          <a:lstStyle/>
+          <a:p>
+            <a:pPr algn="r">
+              <a:lnSpc>
+                <a:spcPct val="100000"/>
+              </a:lnSpc>
+              <a:spcBef>
+                <a:spcPts val="0"/>
+              </a:spcBef>
+              <a:spcAft>
+                <a:spcPts val="0"/>
+              </a:spcAft>
+            </a:pPr>
+            <a:r>
+              <a:rPr sz="1100" b="0">
+                <a:solidFill>
+                  <a:srgbClr val="6E687D"/>
+                </a:solidFill>
+                <a:latin typeface="Arial"/>
+              </a:rPr>
+              <a:t>23</a:t>
+            </a:r>
+          </a:p>
+        </p:txBody>
+      </p:sp>
+      <p:sp>
+        <p:nvSpPr>
+          <p:cNvPr id="8" name="Rectangle 7"/>
+          <p:cNvSpPr/>
+          <p:nvPr/>
+        </p:nvSpPr>
+        <p:spPr>
+          <a:xfrm>
+            <a:off x="438912" y="1645920"/>
+            <a:ext cx="11228832" cy="329184"/>
+          </a:xfrm>
+          <a:prstGeom prst="rect">
+            <a:avLst/>
+          </a:prstGeom>
+          <a:solidFill>
+            <a:srgbClr val="EEE7FF"/>
+          </a:solidFill>
+          <a:ln>
+            <a:noFill/>
+          </a:ln>
+        </p:spPr>
+        <p:style>
+          <a:lnRef idx="1">
+            <a:schemeClr val="accent1"/>
+          </a:lnRef>
+          <a:fillRef idx="3">
+            <a:schemeClr val="accent1"/>
+          </a:fillRef>
+          <a:effectRef idx="2">
+            <a:schemeClr val="accent1"/>
+          </a:effectRef>
+          <a:fontRef idx="minor">
+            <a:schemeClr val="lt1"/>
+          </a:fontRef>
+        </p:style>
+        <p:txBody>
+          <a:bodyPr rtlCol="0" anchor="ctr"/>
+          <a:lstStyle/>
+          <a:p>
+            <a:pPr algn="ctr"/>
+          </a:p>
+        </p:txBody>
+      </p:sp>
+      <p:sp>
+        <p:nvSpPr>
+          <p:cNvPr id="9" name="TextBox 8"/>
+          <p:cNvSpPr txBox="1"/>
+          <p:nvPr/>
+        </p:nvSpPr>
+        <p:spPr>
+          <a:xfrm>
+            <a:off x="603504" y="1746504"/>
+            <a:ext cx="420624" cy="137160"/>
+          </a:xfrm>
+          <a:prstGeom prst="rect">
+            <a:avLst/>
+          </a:prstGeom>
+          <a:noFill/>
+        </p:spPr>
+        <p:txBody>
+          <a:bodyPr wrap="square" anchor="t" lIns="0" rIns="0" tIns="0" bIns="0">
+            <a:spAutoFit/>
+          </a:bodyPr>
+          <a:lstStyle/>
+          <a:p>
+            <a:pPr algn="l">
+              <a:lnSpc>
+                <a:spcPct val="100000"/>
+              </a:lnSpc>
+              <a:spcBef>
+                <a:spcPts val="0"/>
+              </a:spcBef>
+              <a:spcAft>
+                <a:spcPts val="0"/>
+              </a:spcAft>
+            </a:pPr>
+            <a:r>
+              <a:rPr sz="850" b="1">
+                <a:solidFill>
+                  <a:srgbClr val="6F35D4"/>
+                </a:solidFill>
+                <a:latin typeface="Arial"/>
+              </a:rPr>
+              <a:t>ПУТЬ</a:t>
+            </a:r>
+          </a:p>
+        </p:txBody>
+      </p:sp>
+      <p:sp>
+        <p:nvSpPr>
+          <p:cNvPr id="10" name="TextBox 9"/>
+          <p:cNvSpPr txBox="1"/>
+          <p:nvPr/>
+        </p:nvSpPr>
+        <p:spPr>
+          <a:xfrm>
+            <a:off x="1097280" y="1700784"/>
+            <a:ext cx="10287000" cy="201168"/>
+          </a:xfrm>
+          <a:prstGeom prst="rect">
+            <a:avLst/>
+          </a:prstGeom>
+          <a:noFill/>
+        </p:spPr>
+        <p:txBody>
+          <a:bodyPr wrap="square" anchor="t" lIns="0" rIns="0" tIns="0" bIns="0">
+            <a:spAutoFit/>
+          </a:bodyPr>
+          <a:lstStyle/>
+          <a:p>
+            <a:pPr algn="l">
+              <a:lnSpc>
+                <a:spcPct val="100000"/>
+              </a:lnSpc>
+              <a:spcBef>
+                <a:spcPts val="0"/>
+              </a:spcBef>
+              <a:spcAft>
+                <a:spcPts val="0"/>
+              </a:spcAft>
+            </a:pPr>
+            <a:r>
+              <a:rPr sz="1150" b="1">
+                <a:solidFill>
+                  <a:srgbClr val="21172F"/>
+                </a:solidFill>
+                <a:latin typeface="Arial"/>
+              </a:rPr>
+              <a:t>Рассылки -&gt; Проверка</a:t>
+            </a:r>
+          </a:p>
+        </p:txBody>
+      </p:sp>
+      <p:sp>
+        <p:nvSpPr>
+          <p:cNvPr id="11" name="Rectangle 10"/>
+          <p:cNvSpPr/>
+          <p:nvPr/>
+        </p:nvSpPr>
+        <p:spPr>
+          <a:xfrm>
+            <a:off x="530352" y="2066543"/>
+            <a:ext cx="3822191" cy="4206240"/>
+          </a:xfrm>
+          <a:prstGeom prst="rect">
+            <a:avLst/>
+          </a:prstGeom>
+          <a:solidFill>
+            <a:srgbClr val="FFFFFF"/>
+          </a:solidFill>
+          <a:ln w="10160">
+            <a:solidFill>
+              <a:srgbClr val="DED9E8"/>
+            </a:solidFill>
+          </a:ln>
+        </p:spPr>
+        <p:style>
+          <a:lnRef idx="1">
+            <a:schemeClr val="accent1"/>
+          </a:lnRef>
+          <a:fillRef idx="3">
+            <a:schemeClr val="accent1"/>
+          </a:fillRef>
+          <a:effectRef idx="2">
+            <a:schemeClr val="accent1"/>
+          </a:effectRef>
+          <a:fontRef idx="minor">
+            <a:schemeClr val="lt1"/>
+          </a:fontRef>
+        </p:style>
+        <p:txBody>
+          <a:bodyPr rtlCol="0" anchor="ctr"/>
+          <a:lstStyle/>
+          <a:p>
+            <a:pPr algn="ctr"/>
+          </a:p>
+        </p:txBody>
+      </p:sp>
+      <p:sp>
+        <p:nvSpPr>
+          <p:cNvPr id="12" name="Rectangle 11"/>
+          <p:cNvSpPr/>
+          <p:nvPr/>
+        </p:nvSpPr>
+        <p:spPr>
+          <a:xfrm>
+            <a:off x="530352" y="2066543"/>
+            <a:ext cx="3822191" cy="292608"/>
+          </a:xfrm>
+          <a:prstGeom prst="rect">
+            <a:avLst/>
+          </a:prstGeom>
+          <a:solidFill>
+            <a:srgbClr val="3B1F68"/>
+          </a:solidFill>
+          <a:ln>
+            <a:noFill/>
+          </a:ln>
+        </p:spPr>
+        <p:style>
+          <a:lnRef idx="1">
+            <a:schemeClr val="accent1"/>
+          </a:lnRef>
+          <a:fillRef idx="3">
+            <a:schemeClr val="accent1"/>
+          </a:fillRef>
+          <a:effectRef idx="2">
+            <a:schemeClr val="accent1"/>
+          </a:effectRef>
+          <a:fontRef idx="minor">
+            <a:schemeClr val="lt1"/>
+          </a:fontRef>
+        </p:style>
+        <p:txBody>
+          <a:bodyPr rtlCol="0" anchor="ctr"/>
+          <a:lstStyle/>
+          <a:p>
+            <a:pPr algn="ctr"/>
+          </a:p>
+        </p:txBody>
+      </p:sp>
+      <p:sp>
+        <p:nvSpPr>
+          <p:cNvPr id="13" name="TextBox 12"/>
+          <p:cNvSpPr txBox="1"/>
+          <p:nvPr/>
+        </p:nvSpPr>
+        <p:spPr>
+          <a:xfrm>
+            <a:off x="658368" y="2121408"/>
+            <a:ext cx="3566159" cy="182880"/>
+          </a:xfrm>
+          <a:prstGeom prst="rect">
+            <a:avLst/>
+          </a:prstGeom>
+          <a:noFill/>
+        </p:spPr>
+        <p:txBody>
+          <a:bodyPr wrap="square" anchor="t" lIns="0" rIns="0" tIns="0" bIns="0">
+            <a:spAutoFit/>
+          </a:bodyPr>
+          <a:lstStyle/>
+          <a:p>
+            <a:pPr algn="l">
+              <a:lnSpc>
+                <a:spcPct val="100000"/>
+              </a:lnSpc>
+              <a:spcBef>
+                <a:spcPts val="0"/>
+              </a:spcBef>
+              <a:spcAft>
+                <a:spcPts val="0"/>
+              </a:spcAft>
+            </a:pPr>
+            <a:r>
+              <a:rPr sz="950" b="1">
+                <a:solidFill>
+                  <a:srgbClr val="FFFFFF"/>
+                </a:solidFill>
+                <a:latin typeface="Arial"/>
+              </a:rPr>
+              <a:t>Экран на телефоне</a:t>
+            </a:r>
+          </a:p>
+        </p:txBody>
+      </p:sp>
+      <p:pic>
+        <p:nvPicPr>
+          <p:cNvPr id="14" name="Picture 13" descr="image.png"/>
+          <p:cNvPicPr>
+            <a:picLocks noChangeAspect="1"/>
+          </p:cNvPicPr>
+          <p:nvPr/>
+        </p:nvPicPr>
+        <p:blipFill>
+          <a:blip r:embed="rId2"/>
+          <a:stretch>
+            <a:fillRect/>
+          </a:stretch>
+        </p:blipFill>
+        <p:spPr>
+          <a:xfrm>
+            <a:off x="1318162" y="2432303"/>
+            <a:ext cx="2246571" cy="3767327"/>
+          </a:xfrm>
+          <a:prstGeom prst="rect">
+            <a:avLst/>
+          </a:prstGeom>
+        </p:spPr>
+      </p:pic>
+      <p:sp>
+        <p:nvSpPr>
+          <p:cNvPr id="15" name="Oval 14"/>
+          <p:cNvSpPr/>
+          <p:nvPr/>
+        </p:nvSpPr>
+        <p:spPr>
+          <a:xfrm>
+            <a:off x="2212848" y="5217566"/>
+            <a:ext cx="457200" cy="457200"/>
+          </a:xfrm>
+          <a:prstGeom prst="ellipse">
+            <a:avLst/>
+          </a:prstGeom>
+          <a:noFill/>
+          <a:ln w="27940">
+            <a:solidFill>
+              <a:srgbClr val="D94261"/>
+            </a:solidFill>
+          </a:ln>
+        </p:spPr>
+        <p:style>
+          <a:lnRef idx="1">
+            <a:schemeClr val="accent1"/>
+          </a:lnRef>
+          <a:fillRef idx="3">
+            <a:schemeClr val="accent1"/>
+          </a:fillRef>
+          <a:effectRef idx="2">
+            <a:schemeClr val="accent1"/>
+          </a:effectRef>
+          <a:fontRef idx="minor">
+            <a:schemeClr val="lt1"/>
+          </a:fontRef>
+        </p:style>
+        <p:txBody>
+          <a:bodyPr rtlCol="0" anchor="ctr"/>
+          <a:lstStyle/>
+          <a:p>
+            <a:pPr algn="ctr"/>
+          </a:p>
+        </p:txBody>
+      </p:sp>
+      <p:sp>
+        <p:nvSpPr>
+          <p:cNvPr id="16" name="Oval 15"/>
+          <p:cNvSpPr/>
+          <p:nvPr/>
+        </p:nvSpPr>
+        <p:spPr>
+          <a:xfrm>
+            <a:off x="2276856" y="5281574"/>
+            <a:ext cx="329184" cy="329184"/>
+          </a:xfrm>
+          <a:prstGeom prst="ellipse">
+            <a:avLst/>
+          </a:prstGeom>
+          <a:solidFill>
+            <a:srgbClr val="D94261"/>
+          </a:solidFill>
+          <a:ln>
+            <a:noFill/>
+          </a:ln>
+        </p:spPr>
+        <p:style>
+          <a:lnRef idx="1">
+            <a:schemeClr val="accent1"/>
+          </a:lnRef>
+          <a:fillRef idx="3">
+            <a:schemeClr val="accent1"/>
+          </a:fillRef>
+          <a:effectRef idx="2">
+            <a:schemeClr val="accent1"/>
+          </a:effectRef>
+          <a:fontRef idx="minor">
+            <a:schemeClr val="lt1"/>
+          </a:fontRef>
+        </p:style>
+        <p:txBody>
+          <a:bodyPr rtlCol="0" anchor="ctr" lIns="0" rIns="0" tIns="0" bIns="0"/>
+          <a:lstStyle/>
+          <a:p>
+            <a:pPr algn="ctr"/>
+            <a:r>
+              <a:rPr sz="1200" b="1">
+                <a:solidFill>
+                  <a:srgbClr val="FFFFFF"/>
+                </a:solidFill>
+                <a:latin typeface="Arial"/>
+              </a:rPr>
+              <a:t>3</a:t>
+            </a:r>
+          </a:p>
+        </p:txBody>
+      </p:sp>
+      <p:sp>
+        <p:nvSpPr>
+          <p:cNvPr id="17" name="Up Arrow 16"/>
+          <p:cNvSpPr/>
+          <p:nvPr/>
+        </p:nvSpPr>
+        <p:spPr>
+          <a:xfrm rot="18900000">
+            <a:off x="2532888" y="5555894"/>
+            <a:ext cx="256032" cy="365760"/>
+          </a:xfrm>
+          <a:prstGeom prst="upArrow">
+            <a:avLst/>
+          </a:prstGeom>
+          <a:solidFill>
+            <a:srgbClr val="FFFFFF"/>
+          </a:solidFill>
+          <a:ln w="17780">
+            <a:solidFill>
+              <a:srgbClr val="3B1F68"/>
+            </a:solidFill>
+          </a:ln>
+        </p:spPr>
+        <p:style>
+          <a:lnRef idx="1">
+            <a:schemeClr val="accent1"/>
+          </a:lnRef>
+          <a:fillRef idx="3">
+            <a:schemeClr val="accent1"/>
+          </a:fillRef>
+          <a:effectRef idx="2">
+            <a:schemeClr val="accent1"/>
+          </a:effectRef>
+          <a:fontRef idx="minor">
+            <a:schemeClr val="lt1"/>
+          </a:fontRef>
+        </p:style>
+        <p:txBody>
+          <a:bodyPr rtlCol="0" anchor="ctr"/>
+          <a:lstStyle/>
+          <a:p>
+            <a:pPr algn="ctr"/>
+          </a:p>
+        </p:txBody>
+      </p:sp>
+      <p:sp>
+        <p:nvSpPr>
+          <p:cNvPr id="18" name="Rectangle 17"/>
+          <p:cNvSpPr/>
+          <p:nvPr/>
+        </p:nvSpPr>
+        <p:spPr>
+          <a:xfrm>
+            <a:off x="4645152" y="2066543"/>
+            <a:ext cx="6949440" cy="420624"/>
+          </a:xfrm>
+          <a:prstGeom prst="rect">
+            <a:avLst/>
+          </a:prstGeom>
+          <a:solidFill>
+            <a:srgbClr val="3B1F68"/>
+          </a:solidFill>
+          <a:ln>
+            <a:noFill/>
+          </a:ln>
+        </p:spPr>
+        <p:style>
+          <a:lnRef idx="1">
+            <a:schemeClr val="accent1"/>
+          </a:lnRef>
+          <a:fillRef idx="3">
+            <a:schemeClr val="accent1"/>
+          </a:fillRef>
+          <a:effectRef idx="2">
+            <a:schemeClr val="accent1"/>
+          </a:effectRef>
+          <a:fontRef idx="minor">
+            <a:schemeClr val="lt1"/>
+          </a:fontRef>
+        </p:style>
+        <p:txBody>
+          <a:bodyPr rtlCol="0" anchor="ctr"/>
+          <a:lstStyle/>
+          <a:p>
+            <a:pPr algn="ctr"/>
+          </a:p>
+        </p:txBody>
+      </p:sp>
+      <p:sp>
+        <p:nvSpPr>
+          <p:cNvPr id="19" name="TextBox 18"/>
+          <p:cNvSpPr txBox="1"/>
+          <p:nvPr/>
+        </p:nvSpPr>
+        <p:spPr>
+          <a:xfrm>
+            <a:off x="4809744" y="2185416"/>
+            <a:ext cx="6620255" cy="164592"/>
+          </a:xfrm>
+          <a:prstGeom prst="rect">
+            <a:avLst/>
+          </a:prstGeom>
+          <a:noFill/>
+        </p:spPr>
+        <p:txBody>
+          <a:bodyPr wrap="square" anchor="t" lIns="0" rIns="0" tIns="0" bIns="0">
+            <a:spAutoFit/>
+          </a:bodyPr>
+          <a:lstStyle/>
+          <a:p>
+            <a:pPr algn="l">
+              <a:lnSpc>
+                <a:spcPct val="100000"/>
+              </a:lnSpc>
+              <a:spcBef>
+                <a:spcPts val="0"/>
+              </a:spcBef>
+              <a:spcAft>
+                <a:spcPts val="0"/>
+              </a:spcAft>
+            </a:pPr>
+            <a:r>
+              <a:rPr sz="950" b="1">
+                <a:solidFill>
+                  <a:srgbClr val="FFFFFF"/>
+                </a:solidFill>
+                <a:latin typeface="Arial"/>
+              </a:rPr>
+              <a:t>ШАГ 3 ИЗ 3</a:t>
+            </a:r>
+          </a:p>
+        </p:txBody>
+      </p:sp>
+      <p:sp>
+        <p:nvSpPr>
+          <p:cNvPr id="20" name="Rectangle 19"/>
+          <p:cNvSpPr/>
+          <p:nvPr/>
+        </p:nvSpPr>
+        <p:spPr>
+          <a:xfrm>
+            <a:off x="4645152" y="2596896"/>
+            <a:ext cx="6949440" cy="1499616"/>
+          </a:xfrm>
+          <a:prstGeom prst="rect">
+            <a:avLst/>
+          </a:prstGeom>
+          <a:solidFill>
+            <a:srgbClr val="FFFFFF"/>
+          </a:solidFill>
+          <a:ln w="10160">
+            <a:solidFill>
+              <a:srgbClr val="DED9E8"/>
+            </a:solidFill>
+          </a:ln>
+        </p:spPr>
+        <p:style>
+          <a:lnRef idx="1">
+            <a:schemeClr val="accent1"/>
+          </a:lnRef>
+          <a:fillRef idx="3">
+            <a:schemeClr val="accent1"/>
+          </a:fillRef>
+          <a:effectRef idx="2">
+            <a:schemeClr val="accent1"/>
+          </a:effectRef>
+          <a:fontRef idx="minor">
+            <a:schemeClr val="lt1"/>
+          </a:fontRef>
+        </p:style>
+        <p:txBody>
+          <a:bodyPr rtlCol="0" anchor="ctr"/>
+          <a:lstStyle/>
+          <a:p>
+            <a:pPr algn="ctr"/>
+          </a:p>
+        </p:txBody>
+      </p:sp>
+      <p:sp>
+        <p:nvSpPr>
+          <p:cNvPr id="21" name="Rectangle 20"/>
+          <p:cNvSpPr/>
+          <p:nvPr/>
+        </p:nvSpPr>
+        <p:spPr>
+          <a:xfrm>
+            <a:off x="4645152" y="2596896"/>
+            <a:ext cx="54864" cy="1499616"/>
+          </a:xfrm>
+          <a:prstGeom prst="rect">
+            <a:avLst/>
+          </a:prstGeom>
+          <a:solidFill>
+            <a:srgbClr val="D94261"/>
+          </a:solidFill>
+          <a:ln>
+            <a:noFill/>
+          </a:ln>
+        </p:spPr>
+        <p:style>
+          <a:lnRef idx="1">
+            <a:schemeClr val="accent1"/>
+          </a:lnRef>
+          <a:fillRef idx="3">
+            <a:schemeClr val="accent1"/>
+          </a:fillRef>
+          <a:effectRef idx="2">
+            <a:schemeClr val="accent1"/>
+          </a:effectRef>
+          <a:fontRef idx="minor">
+            <a:schemeClr val="lt1"/>
+          </a:fontRef>
+        </p:style>
+        <p:txBody>
+          <a:bodyPr rtlCol="0" anchor="ctr"/>
+          <a:lstStyle/>
+          <a:p>
+            <a:pPr algn="ctr"/>
+          </a:p>
+        </p:txBody>
+      </p:sp>
+      <p:sp>
+        <p:nvSpPr>
+          <p:cNvPr id="22" name="Rounded Rectangle 21"/>
+          <p:cNvSpPr/>
+          <p:nvPr/>
+        </p:nvSpPr>
+        <p:spPr>
+          <a:xfrm>
+            <a:off x="4809744" y="2734056"/>
+            <a:ext cx="310896" cy="310896"/>
+          </a:xfrm>
+          <a:prstGeom prst="roundRect">
+            <a:avLst/>
+          </a:prstGeom>
+          <a:solidFill>
+            <a:srgbClr val="D94261"/>
+          </a:solidFill>
+          <a:ln>
+            <a:noFill/>
+          </a:ln>
+        </p:spPr>
+        <p:style>
+          <a:lnRef idx="1">
+            <a:schemeClr val="accent1"/>
+          </a:lnRef>
+          <a:fillRef idx="3">
+            <a:schemeClr val="accent1"/>
+          </a:fillRef>
+          <a:effectRef idx="2">
+            <a:schemeClr val="accent1"/>
+          </a:effectRef>
+          <a:fontRef idx="minor">
+            <a:schemeClr val="lt1"/>
+          </a:fontRef>
+        </p:style>
+        <p:txBody>
+          <a:bodyPr rtlCol="0" anchor="ctr"/>
+          <a:lstStyle/>
+          <a:p>
+            <a:pPr algn="ctr"/>
+          </a:p>
+        </p:txBody>
+      </p:sp>
+      <p:sp>
+        <p:nvSpPr>
+          <p:cNvPr id="23" name="TextBox 22"/>
+          <p:cNvSpPr txBox="1"/>
+          <p:nvPr/>
+        </p:nvSpPr>
+        <p:spPr>
+          <a:xfrm>
+            <a:off x="4809744" y="2743200"/>
+            <a:ext cx="310896" cy="256032"/>
+          </a:xfrm>
+          <a:prstGeom prst="rect">
+            <a:avLst/>
+          </a:prstGeom>
+          <a:noFill/>
+        </p:spPr>
+        <p:txBody>
+          <a:bodyPr wrap="square" anchor="ctr" lIns="0" rIns="0" tIns="0" bIns="0">
+            <a:spAutoFit/>
+          </a:bodyPr>
+          <a:lstStyle/>
+          <a:p>
+            <a:pPr algn="ctr">
+              <a:lnSpc>
+                <a:spcPct val="100000"/>
+              </a:lnSpc>
+              <a:spcBef>
+                <a:spcPts val="0"/>
+              </a:spcBef>
+              <a:spcAft>
+                <a:spcPts val="0"/>
+              </a:spcAft>
+            </a:pPr>
+            <a:r>
+              <a:rPr sz="1100" b="1">
+                <a:solidFill>
+                  <a:srgbClr val="FFFFFF"/>
+                </a:solidFill>
+                <a:latin typeface="Arial"/>
+              </a:rPr>
+              <a:t>3</a:t>
+            </a:r>
+          </a:p>
+        </p:txBody>
+      </p:sp>
+      <p:sp>
+        <p:nvSpPr>
+          <p:cNvPr id="24" name="TextBox 23"/>
+          <p:cNvSpPr txBox="1"/>
+          <p:nvPr/>
+        </p:nvSpPr>
+        <p:spPr>
+          <a:xfrm>
+            <a:off x="5230368" y="2688336"/>
+            <a:ext cx="6217920" cy="310896"/>
+          </a:xfrm>
+          <a:prstGeom prst="rect">
+            <a:avLst/>
+          </a:prstGeom>
+          <a:noFill/>
+        </p:spPr>
+        <p:txBody>
+          <a:bodyPr wrap="square" anchor="t" lIns="0" rIns="0" tIns="0" bIns="0">
+            <a:spAutoFit/>
+          </a:bodyPr>
+          <a:lstStyle/>
+          <a:p>
+            <a:pPr algn="l">
+              <a:lnSpc>
+                <a:spcPct val="100000"/>
+              </a:lnSpc>
+              <a:spcBef>
+                <a:spcPts val="0"/>
+              </a:spcBef>
+              <a:spcAft>
+                <a:spcPts val="0"/>
+              </a:spcAft>
+            </a:pPr>
+            <a:r>
+              <a:rPr sz="1180" b="1">
+                <a:solidFill>
+                  <a:srgbClr val="21172F"/>
+                </a:solidFill>
+                <a:latin typeface="Arial"/>
+              </a:rPr>
+              <a:t>Отправьте один раз</a:t>
+            </a:r>
+          </a:p>
+        </p:txBody>
+      </p:sp>
+      <p:sp>
+        <p:nvSpPr>
+          <p:cNvPr id="25" name="TextBox 24"/>
+          <p:cNvSpPr txBox="1"/>
+          <p:nvPr/>
+        </p:nvSpPr>
+        <p:spPr>
+          <a:xfrm>
+            <a:off x="5230368" y="3008376"/>
+            <a:ext cx="6217920" cy="1033271"/>
+          </a:xfrm>
+          <a:prstGeom prst="rect">
+            <a:avLst/>
+          </a:prstGeom>
+          <a:noFill/>
+        </p:spPr>
+        <p:txBody>
+          <a:bodyPr wrap="square" anchor="t" lIns="0" rIns="0" tIns="0" bIns="0">
+            <a:spAutoFit/>
+          </a:bodyPr>
+          <a:lstStyle/>
+          <a:p>
+            <a:pPr algn="l">
+              <a:lnSpc>
+                <a:spcPct val="100000"/>
+              </a:lnSpc>
+              <a:spcBef>
+                <a:spcPts val="0"/>
+              </a:spcBef>
+              <a:spcAft>
+                <a:spcPts val="0"/>
+              </a:spcAft>
+            </a:pPr>
+            <a:r>
+              <a:rPr sz="1000" b="0">
+                <a:solidFill>
+                  <a:srgbClr val="6E687D"/>
+                </a:solidFill>
+                <a:latin typeface="Arial"/>
+              </a:rPr>
+              <a:t>Дождитесь итоговой статистики.</a:t>
+            </a:r>
+          </a:p>
+        </p:txBody>
+      </p:sp>
+      <p:sp>
+        <p:nvSpPr>
+          <p:cNvPr id="26" name="Rectangle 25"/>
+          <p:cNvSpPr/>
+          <p:nvPr/>
+        </p:nvSpPr>
+        <p:spPr>
+          <a:xfrm>
+            <a:off x="4645152" y="4315968"/>
+            <a:ext cx="6949440" cy="877824"/>
+          </a:xfrm>
+          <a:prstGeom prst="rect">
+            <a:avLst/>
+          </a:prstGeom>
+          <a:solidFill>
+            <a:srgbClr val="E1F6F3"/>
+          </a:solidFill>
+          <a:ln>
+            <a:noFill/>
+          </a:ln>
+        </p:spPr>
+        <p:style>
+          <a:lnRef idx="1">
+            <a:schemeClr val="accent1"/>
+          </a:lnRef>
+          <a:fillRef idx="3">
+            <a:schemeClr val="accent1"/>
+          </a:fillRef>
+          <a:effectRef idx="2">
+            <a:schemeClr val="accent1"/>
+          </a:effectRef>
+          <a:fontRef idx="minor">
+            <a:schemeClr val="lt1"/>
+          </a:fontRef>
+        </p:style>
+        <p:txBody>
+          <a:bodyPr rtlCol="0" anchor="ctr"/>
+          <a:lstStyle/>
+          <a:p>
+            <a:pPr algn="ctr"/>
+          </a:p>
+        </p:txBody>
+      </p:sp>
+      <p:sp>
+        <p:nvSpPr>
+          <p:cNvPr id="27" name="Rectangle 26"/>
+          <p:cNvSpPr/>
+          <p:nvPr/>
+        </p:nvSpPr>
+        <p:spPr>
+          <a:xfrm>
+            <a:off x="4645152" y="4315968"/>
+            <a:ext cx="54864" cy="877824"/>
+          </a:xfrm>
+          <a:prstGeom prst="rect">
+            <a:avLst/>
+          </a:prstGeom>
+          <a:solidFill>
+            <a:srgbClr val="149B91"/>
+          </a:solidFill>
+          <a:ln>
+            <a:noFill/>
+          </a:ln>
+        </p:spPr>
+        <p:style>
+          <a:lnRef idx="1">
+            <a:schemeClr val="accent1"/>
+          </a:lnRef>
+          <a:fillRef idx="3">
+            <a:schemeClr val="accent1"/>
+          </a:fillRef>
+          <a:effectRef idx="2">
+            <a:schemeClr val="accent1"/>
+          </a:effectRef>
+          <a:fontRef idx="minor">
+            <a:schemeClr val="lt1"/>
+          </a:fontRef>
+        </p:style>
+        <p:txBody>
+          <a:bodyPr rtlCol="0" anchor="ctr"/>
+          <a:lstStyle/>
+          <a:p>
+            <a:pPr algn="ctr"/>
+          </a:p>
+        </p:txBody>
+      </p:sp>
+      <p:sp>
+        <p:nvSpPr>
+          <p:cNvPr id="28" name="TextBox 27"/>
+          <p:cNvSpPr txBox="1"/>
+          <p:nvPr/>
+        </p:nvSpPr>
+        <p:spPr>
+          <a:xfrm>
+            <a:off x="4846320" y="4425696"/>
+            <a:ext cx="6620255" cy="219456"/>
+          </a:xfrm>
+          <a:prstGeom prst="rect">
+            <a:avLst/>
+          </a:prstGeom>
+          <a:noFill/>
+        </p:spPr>
+        <p:txBody>
+          <a:bodyPr wrap="square" anchor="t" lIns="0" rIns="0" tIns="0" bIns="0">
+            <a:spAutoFit/>
+          </a:bodyPr>
+          <a:lstStyle/>
+          <a:p>
+            <a:pPr algn="l">
+              <a:lnSpc>
+                <a:spcPct val="100000"/>
+              </a:lnSpc>
+              <a:spcBef>
+                <a:spcPts val="0"/>
+              </a:spcBef>
+              <a:spcAft>
+                <a:spcPts val="0"/>
+              </a:spcAft>
+            </a:pPr>
+            <a:r>
+              <a:rPr sz="1150" b="1">
+                <a:solidFill>
+                  <a:srgbClr val="21172F"/>
+                </a:solidFill>
+                <a:latin typeface="Arial"/>
+              </a:rPr>
+              <a:t>Проверка результата</a:t>
+            </a:r>
+          </a:p>
+        </p:txBody>
+      </p:sp>
+      <p:sp>
+        <p:nvSpPr>
+          <p:cNvPr id="29" name="TextBox 28"/>
+          <p:cNvSpPr txBox="1"/>
+          <p:nvPr/>
+        </p:nvSpPr>
+        <p:spPr>
+          <a:xfrm>
+            <a:off x="4846320" y="4681728"/>
+            <a:ext cx="6620255" cy="402336"/>
+          </a:xfrm>
+          <a:prstGeom prst="rect">
+            <a:avLst/>
+          </a:prstGeom>
+          <a:noFill/>
+        </p:spPr>
+        <p:txBody>
+          <a:bodyPr wrap="square" anchor="t" lIns="0" rIns="0" tIns="0" bIns="0">
+            <a:spAutoFit/>
+          </a:bodyPr>
+          <a:lstStyle/>
+          <a:p>
+            <a:pPr algn="l">
+              <a:lnSpc>
+                <a:spcPct val="100000"/>
+              </a:lnSpc>
+              <a:spcBef>
+                <a:spcPts val="0"/>
+              </a:spcBef>
+              <a:spcAft>
+                <a:spcPts val="0"/>
+              </a:spcAft>
+            </a:pPr>
+            <a:r>
+              <a:rPr sz="1000" b="0">
+                <a:solidFill>
+                  <a:srgbClr val="6E687D"/>
+                </a:solidFill>
+                <a:latin typeface="Arial"/>
+              </a:rPr>
+              <a:t>После отправки текст не редактируется; исправление отправляется новой рассылкой.</a:t>
+            </a:r>
+          </a:p>
+        </p:txBody>
+      </p:sp>
+      <p:sp>
+        <p:nvSpPr>
+          <p:cNvPr id="30" name="Rectangle 29"/>
+          <p:cNvSpPr/>
+          <p:nvPr/>
+        </p:nvSpPr>
+        <p:spPr>
+          <a:xfrm>
+            <a:off x="4645152" y="5413248"/>
+            <a:ext cx="6949440" cy="603504"/>
+          </a:xfrm>
+          <a:prstGeom prst="rect">
+            <a:avLst/>
+          </a:prstGeom>
+          <a:solidFill>
+            <a:srgbClr val="FFF5C9"/>
+          </a:solidFill>
+          <a:ln>
+            <a:noFill/>
+          </a:ln>
+        </p:spPr>
+        <p:style>
+          <a:lnRef idx="1">
+            <a:schemeClr val="accent1"/>
+          </a:lnRef>
+          <a:fillRef idx="3">
+            <a:schemeClr val="accent1"/>
+          </a:fillRef>
+          <a:effectRef idx="2">
+            <a:schemeClr val="accent1"/>
+          </a:effectRef>
+          <a:fontRef idx="minor">
+            <a:schemeClr val="lt1"/>
+          </a:fontRef>
+        </p:style>
+        <p:txBody>
+          <a:bodyPr rtlCol="0" anchor="ctr"/>
+          <a:lstStyle/>
+          <a:p>
+            <a:pPr algn="ctr"/>
+          </a:p>
+        </p:txBody>
+      </p:sp>
+      <p:sp>
+        <p:nvSpPr>
+          <p:cNvPr id="31" name="TextBox 30"/>
+          <p:cNvSpPr txBox="1"/>
+          <p:nvPr/>
+        </p:nvSpPr>
+        <p:spPr>
+          <a:xfrm>
+            <a:off x="4809744" y="5559552"/>
+            <a:ext cx="6620255" cy="292608"/>
+          </a:xfrm>
+          <a:prstGeom prst="rect">
+            <a:avLst/>
+          </a:prstGeom>
+          <a:noFill/>
+        </p:spPr>
+        <p:txBody>
+          <a:bodyPr wrap="square" anchor="t" lIns="0" rIns="0" tIns="0" bIns="0">
+            <a:spAutoFit/>
+          </a:bodyPr>
+          <a:lstStyle/>
+          <a:p>
+            <a:pPr algn="l">
+              <a:lnSpc>
+                <a:spcPct val="100000"/>
+              </a:lnSpc>
+              <a:spcBef>
+                <a:spcPts val="0"/>
+              </a:spcBef>
+              <a:spcAft>
+                <a:spcPts val="0"/>
+              </a:spcAft>
+            </a:pPr>
+            <a:r>
+              <a:rPr sz="919" b="0">
+                <a:solidFill>
+                  <a:srgbClr val="6E687D"/>
+                </a:solidFill>
+                <a:latin typeface="Arial"/>
+              </a:rPr>
+              <a:t>Курсор и номер показывают единственное действие этого кадра.</a:t>
+            </a:r>
+          </a:p>
+        </p:txBody>
+      </p:sp>
+      <p:sp>
+        <p:nvSpPr>
+          <p:cNvPr id="32" name="Rectangle 31"/>
+          <p:cNvSpPr/>
+          <p:nvPr/>
+        </p:nvSpPr>
+        <p:spPr>
+          <a:xfrm>
+            <a:off x="438912" y="6537960"/>
+            <a:ext cx="11247120" cy="9144"/>
+          </a:xfrm>
+          <a:prstGeom prst="rect">
+            <a:avLst/>
+          </a:prstGeom>
+          <a:solidFill>
+            <a:srgbClr val="DED9E8"/>
+          </a:solidFill>
+          <a:ln>
+            <a:noFill/>
+          </a:ln>
+        </p:spPr>
+        <p:style>
+          <a:lnRef idx="1">
+            <a:schemeClr val="accent1"/>
+          </a:lnRef>
+          <a:fillRef idx="3">
+            <a:schemeClr val="accent1"/>
+          </a:fillRef>
+          <a:effectRef idx="2">
+            <a:schemeClr val="accent1"/>
+          </a:effectRef>
+          <a:fontRef idx="minor">
+            <a:schemeClr val="lt1"/>
+          </a:fontRef>
+        </p:style>
+        <p:txBody>
+          <a:bodyPr rtlCol="0" anchor="ctr"/>
+          <a:lstStyle/>
+          <a:p>
+            <a:pPr algn="ctr"/>
+          </a:p>
+        </p:txBody>
+      </p:sp>
+      <p:sp>
+        <p:nvSpPr>
+          <p:cNvPr id="33" name="TextBox 32"/>
+          <p:cNvSpPr txBox="1"/>
+          <p:nvPr/>
+        </p:nvSpPr>
+        <p:spPr>
+          <a:xfrm>
+            <a:off x="438912" y="6601968"/>
+            <a:ext cx="7315200" cy="182880"/>
+          </a:xfrm>
+          <a:prstGeom prst="rect">
+            <a:avLst/>
+          </a:prstGeom>
+          <a:noFill/>
+        </p:spPr>
+        <p:txBody>
+          <a:bodyPr wrap="square" anchor="t" lIns="0" rIns="0" tIns="0" bIns="0">
+            <a:spAutoFit/>
+          </a:bodyPr>
+          <a:lstStyle/>
+          <a:p>
+            <a:pPr algn="l">
+              <a:lnSpc>
+                <a:spcPct val="100000"/>
+              </a:lnSpc>
+              <a:spcBef>
+                <a:spcPts val="0"/>
+              </a:spcBef>
+              <a:spcAft>
+                <a:spcPts val="0"/>
+              </a:spcAft>
+            </a:pPr>
+            <a:r>
+              <a:rPr sz="900" b="0">
+                <a:solidFill>
+                  <a:srgbClr val="6E687D"/>
+                </a:solidFill>
+                <a:latin typeface="Arial"/>
+              </a:rPr>
+              <a:t>Роль: Куратор · Algo MAX</a:t>
+            </a:r>
+          </a:p>
+        </p:txBody>
+      </p:sp>
+    </p:spTree>
+  </p:cSld>
+  <p:clrMapOvr>
+    <a:masterClrMapping/>
+  </p:clrMapOvr>
+</p:sld>
+</file>
+
+<file path=ppt/slides/slide24.xml><?xml version="1.0" encoding="utf-8"?>
 <p:sld xmlns:a="http://schemas.openxmlformats.org/drawingml/2006/main" xmlns:p="http://schemas.openxmlformats.org/presentationml/2006/main" xmlns:r="http://schemas.openxmlformats.org/officeDocument/2006/relationships">
   <p:cSld>
     <p:bg>
@@ -24671,8 +28964,8 @@
         </p:blipFill>
         <p:spPr>
           <a:xfrm>
-            <a:off x="1510223" y="2432303"/>
-            <a:ext cx="6178417" cy="3767327"/>
+            <a:off x="1585569" y="2432303"/>
+            <a:ext cx="6027724" cy="3767327"/>
           </a:xfrm>
           <a:prstGeom prst="rect">
             <a:avLst/>
@@ -24687,7 +28980,7 @@
         </p:nvSpPr>
         <p:spPr>
           <a:xfrm>
-            <a:off x="5730083" y="3899001"/>
+            <a:off x="5696931" y="3899001"/>
             <a:ext cx="457200" cy="457200"/>
           </a:xfrm>
           <a:prstGeom prst="ellipse">
@@ -24730,7 +29023,7 @@
         </p:nvSpPr>
         <p:spPr>
           <a:xfrm>
-            <a:off x="5794091" y="3963009"/>
+            <a:off x="5760939" y="3963009"/>
             <a:ext cx="329184" cy="329184"/>
           </a:xfrm>
           <a:prstGeom prst="ellipse">
@@ -24782,7 +29075,7 @@
         </p:nvSpPr>
         <p:spPr>
           <a:xfrm rot="18900000">
-            <a:off x="6050123" y="4237329"/>
+            <a:off x="6016971" y="4237329"/>
             <a:ext cx="256032" cy="365760"/>
           </a:xfrm>
           <a:prstGeom prst="upArrow">
@@ -26101,8 +30394,8 @@
         </p:blipFill>
         <p:spPr>
           <a:xfrm>
-            <a:off x="1510223" y="2432303"/>
-            <a:ext cx="6178417" cy="3767327"/>
+            <a:off x="1585569" y="2432303"/>
+            <a:ext cx="6027724" cy="3767327"/>
           </a:xfrm>
           <a:prstGeom prst="rect">
             <a:avLst/>
@@ -26117,7 +30410,7 @@
         </p:nvSpPr>
         <p:spPr>
           <a:xfrm>
-            <a:off x="5606515" y="4351080"/>
+            <a:off x="5576376" y="4351080"/>
             <a:ext cx="457200" cy="457200"/>
           </a:xfrm>
           <a:prstGeom prst="ellipse">
@@ -26160,7 +30453,7 @@
         </p:nvSpPr>
         <p:spPr>
           <a:xfrm>
-            <a:off x="5670523" y="4415088"/>
+            <a:off x="5640384" y="4415088"/>
             <a:ext cx="329184" cy="329184"/>
           </a:xfrm>
           <a:prstGeom prst="ellipse">
@@ -26212,7 +30505,7 @@
         </p:nvSpPr>
         <p:spPr>
           <a:xfrm rot="18900000">
-            <a:off x="5926555" y="4689408"/>
+            <a:off x="5896416" y="4689408"/>
             <a:ext cx="256032" cy="365760"/>
           </a:xfrm>
           <a:prstGeom prst="upArrow">
@@ -27531,8 +31824,8 @@
         </p:blipFill>
         <p:spPr>
           <a:xfrm>
-            <a:off x="1510223" y="2432303"/>
-            <a:ext cx="6178417" cy="3767327"/>
+            <a:off x="1585569" y="2432303"/>
+            <a:ext cx="6027724" cy="3767327"/>
           </a:xfrm>
           <a:prstGeom prst="rect">
             <a:avLst/>
@@ -27547,7 +31840,7 @@
         </p:nvSpPr>
         <p:spPr>
           <a:xfrm>
-            <a:off x="6595062" y="4765487"/>
+            <a:off x="6540812" y="4765487"/>
             <a:ext cx="457200" cy="457200"/>
           </a:xfrm>
           <a:prstGeom prst="ellipse">
@@ -27590,7 +31883,7 @@
         </p:nvSpPr>
         <p:spPr>
           <a:xfrm>
-            <a:off x="6659070" y="4829495"/>
+            <a:off x="6604820" y="4829495"/>
             <a:ext cx="329184" cy="329184"/>
           </a:xfrm>
           <a:prstGeom prst="ellipse">
@@ -27642,7 +31935,7 @@
         </p:nvSpPr>
         <p:spPr>
           <a:xfrm rot="18900000">
-            <a:off x="6915102" y="5103815"/>
+            <a:off x="6860852" y="5103815"/>
             <a:ext cx="256032" cy="365760"/>
           </a:xfrm>
           <a:prstGeom prst="upArrow">
@@ -28584,7 +32877,7 @@
                 </a:solidFill>
                 <a:latin typeface="Arial"/>
               </a:rPr>
-              <a:t>РАССЫЛКИ</a:t>
+              <a:t>ОТЧЕТ AC</a:t>
             </a:r>
           </a:p>
         </p:txBody>
@@ -28629,7 +32922,7 @@
                 </a:solidFill>
                 <a:latin typeface="Arial"/>
               </a:rPr>
-              <a:t>Категория, формат и группы</a:t>
+              <a:t>Период, преподаватель и группа</a:t>
             </a:r>
           </a:p>
         </p:txBody>
@@ -28807,7 +33100,7 @@
                 </a:solidFill>
                 <a:latin typeface="Arial"/>
               </a:rPr>
-              <a:t>Рассылки -&gt; Получатели</a:t>
+              <a:t>Отчет AC</a:t>
             </a:r>
           </a:p>
         </p:txBody>
@@ -28961,8 +33254,8 @@
         </p:blipFill>
         <p:spPr>
           <a:xfrm>
-            <a:off x="1510223" y="2432303"/>
-            <a:ext cx="6178417" cy="3767327"/>
+            <a:off x="1585569" y="2432303"/>
+            <a:ext cx="6027724" cy="3767327"/>
           </a:xfrm>
           <a:prstGeom prst="rect">
             <a:avLst/>
@@ -28977,7 +33270,7 @@
         </p:nvSpPr>
         <p:spPr>
           <a:xfrm>
-            <a:off x="2949795" y="3484595"/>
+            <a:off x="3225564" y="3333902"/>
             <a:ext cx="457200" cy="457200"/>
           </a:xfrm>
           <a:prstGeom prst="ellipse">
@@ -29020,7 +33313,7 @@
         </p:nvSpPr>
         <p:spPr>
           <a:xfrm>
-            <a:off x="3013803" y="3548603"/>
+            <a:off x="3289572" y="3397910"/>
             <a:ext cx="329184" cy="329184"/>
           </a:xfrm>
           <a:prstGeom prst="ellipse">
@@ -29072,7 +33365,7 @@
         </p:nvSpPr>
         <p:spPr>
           <a:xfrm rot="18900000">
-            <a:off x="3269835" y="3822923"/>
+            <a:off x="3545604" y="3672230"/>
             <a:ext cx="256032" cy="365760"/>
           </a:xfrm>
           <a:prstGeom prst="upArrow">
@@ -29413,7 +33706,7 @@
                 </a:solidFill>
                 <a:latin typeface="Arial"/>
               </a:rPr>
-              <a:t>Выберите получателей</a:t>
+              <a:t>Выберите период</a:t>
             </a:r>
           </a:p>
         </p:txBody>
@@ -29458,7 +33751,7 @@
                 </a:solidFill>
                 <a:latin typeface="Arial"/>
               </a:rPr>
-              <a:t>Родители, ученики или обе категории.</a:t>
+              <a:t>Используйте быстрый интервал или даты.</a:t>
             </a:r>
           </a:p>
         </p:txBody>
@@ -30014,7 +34307,7 @@
                 </a:solidFill>
                 <a:latin typeface="Arial"/>
               </a:rPr>
-              <a:t>РАССЫЛКИ</a:t>
+              <a:t>ОТЧЕТ AC</a:t>
             </a:r>
           </a:p>
         </p:txBody>
@@ -30059,7 +34352,7 @@
                 </a:solidFill>
                 <a:latin typeface="Arial"/>
               </a:rPr>
-              <a:t>Категория, формат и группы</a:t>
+              <a:t>Период, преподаватель и группа</a:t>
             </a:r>
           </a:p>
         </p:txBody>
@@ -30237,7 +34530,7 @@
                 </a:solidFill>
                 <a:latin typeface="Arial"/>
               </a:rPr>
-              <a:t>Рассылки -&gt; Получатели</a:t>
+              <a:t>Отчет AC</a:t>
             </a:r>
           </a:p>
         </p:txBody>
@@ -30391,8 +34684,8 @@
         </p:blipFill>
         <p:spPr>
           <a:xfrm>
-            <a:off x="1510223" y="2432303"/>
-            <a:ext cx="6178417" cy="3767327"/>
+            <a:off x="1585569" y="2432303"/>
+            <a:ext cx="6027724" cy="3767327"/>
           </a:xfrm>
           <a:prstGeom prst="rect">
             <a:avLst/>
@@ -30407,7 +34700,7 @@
         </p:nvSpPr>
         <p:spPr>
           <a:xfrm>
-            <a:off x="3073364" y="4200387"/>
+            <a:off x="3647505" y="3974348"/>
             <a:ext cx="457200" cy="457200"/>
           </a:xfrm>
           <a:prstGeom prst="ellipse">
@@ -30450,7 +34743,7 @@
         </p:nvSpPr>
         <p:spPr>
           <a:xfrm>
-            <a:off x="3137372" y="4264395"/>
+            <a:off x="3711513" y="4038356"/>
             <a:ext cx="329184" cy="329184"/>
           </a:xfrm>
           <a:prstGeom prst="ellipse">
@@ -30502,7 +34795,7 @@
         </p:nvSpPr>
         <p:spPr>
           <a:xfrm rot="18900000">
-            <a:off x="3393404" y="4538715"/>
+            <a:off x="3967545" y="4312676"/>
             <a:ext cx="256032" cy="365760"/>
           </a:xfrm>
           <a:prstGeom prst="upArrow">
@@ -30843,7 +35136,7 @@
                 </a:solidFill>
                 <a:latin typeface="Arial"/>
               </a:rPr>
-              <a:t>Выберите формат</a:t>
+              <a:t>Уточните преподавателя</a:t>
             </a:r>
           </a:p>
         </p:txBody>
@@ -30888,7 +35181,7 @@
                 </a:solidFill>
                 <a:latin typeface="Arial"/>
               </a:rPr>
-              <a:t>Очные, онлайн или индивидуальные группы.</a:t>
+              <a:t>Можно оставить всех сотрудников.</a:t>
             </a:r>
           </a:p>
         </p:txBody>
